--- a/ppt/07_het.pptx
+++ b/ppt/07_het.pptx
@@ -16,6 +16,10 @@
     <p:sldId id="264" r:id="rId15"/>
     <p:sldId id="265" r:id="rId16"/>
     <p:sldId id="266" r:id="rId17"/>
+    <p:sldId id="267" r:id="rId18"/>
+    <p:sldId id="268" r:id="rId19"/>
+    <p:sldId id="269" r:id="rId20"/>
+    <p:sldId id="270" r:id="rId21"/>
   </p:sldIdLst>
   <p:sldSz cx="12191695" cy="6858000" type="screen4x3"/>
   <p:notesSz cx="6858000" cy="9144000"/>
@@ -3094,7 +3098,7 @@
     <p:bg>
       <p:bgPr>
         <a:solidFill>
-          <a:srgbClr val="122D48"/>
+          <a:srgbClr val="0B2F4B"/>
         </a:solidFill>
         <a:effectLst/>
       </p:bgPr>
@@ -3114,163 +3118,129 @@
         </p:nvSpPr>
         <p:spPr>
           <a:xfrm>
-            <a:off x="640080" y="502920"/>
-            <a:ext cx="1828800" cy="411480"/>
-          </a:xfrm>
-          <a:prstGeom prst="rect">
-            <a:avLst/>
-          </a:prstGeom>
-          <a:noFill/>
-        </p:spPr>
-        <p:txBody>
-          <a:bodyPr wrap="none" anchor="ctr">
+            <a:off x="411480" y="365760"/>
+            <a:ext cx="4572000" cy="274320"/>
+          </a:xfrm>
+          <a:prstGeom prst="rect">
+            <a:avLst/>
+          </a:prstGeom>
+          <a:noFill/>
+        </p:spPr>
+        <p:txBody>
+          <a:bodyPr wrap="square">
             <a:spAutoFit/>
           </a:bodyPr>
           <a:lstStyle/>
           <a:p>
             <a:pPr algn="l">
-              <a:defRPr sz="3000" b="1">
+              <a:defRPr sz="800" b="1">
+                <a:solidFill>
+                  <a:srgbClr val="128EDA"/>
+                </a:solidFill>
+                <a:latin typeface="Aptos Display"/>
+              </a:defRPr>
+            </a:pPr>
+            <a:r>
+              <a:t>IAP • INTEGRÁLT AUTOMATIKA PROGRAM</a:t>
+            </a:r>
+          </a:p>
+        </p:txBody>
+      </p:sp>
+      <p:sp>
+        <p:nvSpPr>
+          <p:cNvPr id="3" name="TextBox 2"/>
+          <p:cNvSpPr txBox="1"/>
+          <p:nvPr/>
+        </p:nvSpPr>
+        <p:spPr>
+          <a:xfrm>
+            <a:off x="411480" y="1280160"/>
+            <a:ext cx="6400800" cy="1005840"/>
+          </a:xfrm>
+          <a:prstGeom prst="rect">
+            <a:avLst/>
+          </a:prstGeom>
+          <a:noFill/>
+        </p:spPr>
+        <p:txBody>
+          <a:bodyPr wrap="square">
+            <a:spAutoFit/>
+          </a:bodyPr>
+          <a:lstStyle/>
+          <a:p>
+            <a:pPr algn="l">
+              <a:defRPr sz="2500" b="1">
                 <a:solidFill>
                   <a:srgbClr val="FFFFFF"/>
                 </a:solidFill>
+                <a:latin typeface="Aptos Display"/>
+              </a:defRPr>
+            </a:pPr>
+            <a:r>
+              <a:t>SORKAPCSOK ÉS</a:t>
+            </a:r>
+            <a:br/>
+            <a:r>
+              <a:t>VEZETÉKKÖTÉSEK</a:t>
+            </a:r>
+          </a:p>
+        </p:txBody>
+      </p:sp>
+      <p:sp>
+        <p:nvSpPr>
+          <p:cNvPr id="4" name="TextBox 3"/>
+          <p:cNvSpPr txBox="1"/>
+          <p:nvPr/>
+        </p:nvSpPr>
+        <p:spPr>
+          <a:xfrm>
+            <a:off x="411480" y="2560320"/>
+            <a:ext cx="6400800" cy="365760"/>
+          </a:xfrm>
+          <a:prstGeom prst="rect">
+            <a:avLst/>
+          </a:prstGeom>
+          <a:noFill/>
+        </p:spPr>
+        <p:txBody>
+          <a:bodyPr wrap="square">
+            <a:spAutoFit/>
+          </a:bodyPr>
+          <a:lstStyle/>
+          <a:p>
+            <a:pPr algn="l">
+              <a:defRPr sz="1200" b="0">
+                <a:solidFill>
+                  <a:srgbClr val="FFFFFF"/>
+                </a:solidFill>
                 <a:latin typeface="Aptos"/>
               </a:defRPr>
             </a:pPr>
             <a:r>
-              <a:t>IAP</a:t>
-            </a:r>
-          </a:p>
-        </p:txBody>
-      </p:sp>
-      <p:sp>
-        <p:nvSpPr>
-          <p:cNvPr id="3" name="TextBox 2"/>
-          <p:cNvSpPr txBox="1"/>
-          <p:nvPr/>
-        </p:nvSpPr>
-        <p:spPr>
-          <a:xfrm>
-            <a:off x="658368" y="1005840"/>
-            <a:ext cx="6858000" cy="320040"/>
-          </a:xfrm>
-          <a:prstGeom prst="rect">
-            <a:avLst/>
-          </a:prstGeom>
-          <a:noFill/>
-        </p:spPr>
-        <p:txBody>
-          <a:bodyPr wrap="none" anchor="ctr">
-            <a:spAutoFit/>
-          </a:bodyPr>
-          <a:lstStyle/>
-          <a:p>
-            <a:pPr algn="l">
-              <a:defRPr sz="1400" b="0">
-                <a:solidFill>
-                  <a:srgbClr val="FFFFFF"/>
-                </a:solidFill>
-                <a:latin typeface="Aptos"/>
-              </a:defRPr>
-            </a:pPr>
-            <a:r>
-              <a:t>11. évfolyam • Analóg áramkörök • 7. hét</a:t>
-            </a:r>
-          </a:p>
-        </p:txBody>
-      </p:sp>
-      <p:sp>
-        <p:nvSpPr>
-          <p:cNvPr id="4" name="TextBox 3"/>
-          <p:cNvSpPr txBox="1"/>
-          <p:nvPr/>
-        </p:nvSpPr>
-        <p:spPr>
-          <a:xfrm>
-            <a:off x="658368" y="1691640"/>
-            <a:ext cx="7315200" cy="914400"/>
-          </a:xfrm>
-          <a:prstGeom prst="rect">
-            <a:avLst/>
-          </a:prstGeom>
-          <a:noFill/>
-        </p:spPr>
-        <p:txBody>
-          <a:bodyPr wrap="none" anchor="ctr">
-            <a:spAutoFit/>
-          </a:bodyPr>
-          <a:lstStyle/>
-          <a:p>
-            <a:pPr algn="l">
-              <a:defRPr sz="3500" b="1">
-                <a:solidFill>
-                  <a:srgbClr val="FFFFFF"/>
-                </a:solidFill>
-                <a:latin typeface="Aptos"/>
-              </a:defRPr>
-            </a:pPr>
-            <a:r>
-              <a:t>FREKVENCIAÁTVITEL</a:t>
-            </a:r>
-          </a:p>
-        </p:txBody>
-      </p:sp>
-      <p:sp>
-        <p:nvSpPr>
-          <p:cNvPr id="5" name="TextBox 4"/>
-          <p:cNvSpPr txBox="1"/>
-          <p:nvPr/>
-        </p:nvSpPr>
-        <p:spPr>
-          <a:xfrm>
-            <a:off x="685800" y="2743200"/>
-            <a:ext cx="6400800" cy="502920"/>
-          </a:xfrm>
-          <a:prstGeom prst="rect">
-            <a:avLst/>
-          </a:prstGeom>
-          <a:noFill/>
-        </p:spPr>
-        <p:txBody>
-          <a:bodyPr wrap="none" anchor="ctr">
-            <a:spAutoFit/>
-          </a:bodyPr>
-          <a:lstStyle/>
-          <a:p>
-            <a:pPr algn="l">
-              <a:defRPr sz="2400" b="1">
-                <a:solidFill>
-                  <a:srgbClr val="DE9136"/>
-                </a:solidFill>
-                <a:latin typeface="Aptos"/>
-              </a:defRPr>
-            </a:pPr>
-            <a:r>
-              <a:t>Bode-diagram alapjai</a:t>
-            </a:r>
-          </a:p>
-        </p:txBody>
-      </p:sp>
-      <p:sp>
-        <p:nvSpPr>
-          <p:cNvPr id="6" name="Rounded Rectangle 5"/>
+              <a:t>07. hét • Csavaros és rugós csatlakozások</a:t>
+            </a:r>
+          </a:p>
+        </p:txBody>
+      </p:sp>
+      <p:sp>
+        <p:nvSpPr>
+          <p:cNvPr id="5" name="Hexagon 4"/>
           <p:cNvSpPr/>
           <p:nvPr/>
         </p:nvSpPr>
         <p:spPr>
           <a:xfrm>
-            <a:off x="7772400" y="1371600"/>
-            <a:ext cx="3566160" cy="3840480"/>
-          </a:xfrm>
-          <a:prstGeom prst="roundRect">
+            <a:off x="8412480" y="1828800"/>
+            <a:ext cx="960120" cy="960120"/>
+          </a:xfrm>
+          <a:prstGeom prst="hexagon">
             <a:avLst/>
           </a:prstGeom>
           <a:solidFill>
-            <a:srgbClr val="1F4465"/>
+            <a:srgbClr val="F59722"/>
           </a:solidFill>
           <a:ln>
-            <a:solidFill>
-              <a:srgbClr val="42AAD2"/>
-            </a:solidFill>
+            <a:noFill/>
           </a:ln>
         </p:spPr>
         <p:style>
@@ -3297,92 +3267,56 @@
       </p:sp>
       <p:sp>
         <p:nvSpPr>
-          <p:cNvPr id="7" name="TextBox 6"/>
-          <p:cNvSpPr txBox="1"/>
-          <p:nvPr/>
-        </p:nvSpPr>
-        <p:spPr>
-          <a:xfrm>
-            <a:off x="8046720" y="1600200"/>
-            <a:ext cx="1097280" cy="274320"/>
-          </a:xfrm>
-          <a:prstGeom prst="rect">
-            <a:avLst/>
-          </a:prstGeom>
-          <a:noFill/>
-        </p:spPr>
-        <p:txBody>
-          <a:bodyPr wrap="none" anchor="ctr">
-            <a:spAutoFit/>
-          </a:bodyPr>
-          <a:lstStyle/>
-          <a:p>
-            <a:pPr algn="l">
-              <a:defRPr sz="1200" b="1">
+          <p:cNvPr id="6" name="TextBox 5"/>
+          <p:cNvSpPr txBox="1"/>
+          <p:nvPr/>
+        </p:nvSpPr>
+        <p:spPr>
+          <a:xfrm>
+            <a:off x="8412480" y="1993392"/>
+            <a:ext cx="960120" cy="365760"/>
+          </a:xfrm>
+          <a:prstGeom prst="rect">
+            <a:avLst/>
+          </a:prstGeom>
+          <a:noFill/>
+        </p:spPr>
+        <p:txBody>
+          <a:bodyPr wrap="square">
+            <a:spAutoFit/>
+          </a:bodyPr>
+          <a:lstStyle/>
+          <a:p>
+            <a:pPr algn="ctr">
+              <a:defRPr sz="1800" b="1">
                 <a:solidFill>
                   <a:srgbClr val="FFFFFF"/>
                 </a:solidFill>
-                <a:latin typeface="Aptos"/>
-              </a:defRPr>
-            </a:pPr>
-            <a:r>
-              <a:t>Av (dB)</a:t>
-            </a:r>
-          </a:p>
-        </p:txBody>
-      </p:sp>
-      <p:sp>
-        <p:nvSpPr>
-          <p:cNvPr id="8" name="TextBox 7"/>
-          <p:cNvSpPr txBox="1"/>
-          <p:nvPr/>
-        </p:nvSpPr>
-        <p:spPr>
-          <a:xfrm>
-            <a:off x="10241280" y="4709160"/>
-            <a:ext cx="731520" cy="274320"/>
-          </a:xfrm>
-          <a:prstGeom prst="rect">
-            <a:avLst/>
-          </a:prstGeom>
-          <a:noFill/>
-        </p:spPr>
-        <p:txBody>
-          <a:bodyPr wrap="none" anchor="ctr">
-            <a:spAutoFit/>
-          </a:bodyPr>
-          <a:lstStyle/>
-          <a:p>
-            <a:pPr algn="l">
-              <a:defRPr sz="1200" b="1">
-                <a:solidFill>
-                  <a:srgbClr val="FFFFFF"/>
-                </a:solidFill>
-                <a:latin typeface="Aptos"/>
-              </a:defRPr>
-            </a:pPr>
-            <a:r>
-              <a:t>log f</a:t>
-            </a:r>
-          </a:p>
-        </p:txBody>
-      </p:sp>
-      <p:sp>
-        <p:nvSpPr>
-          <p:cNvPr id="9" name="Rectangle 8"/>
+                <a:latin typeface="Aptos Display"/>
+              </a:defRPr>
+            </a:pPr>
+            <a:r>
+              <a:t>↻</a:t>
+            </a:r>
+          </a:p>
+        </p:txBody>
+      </p:sp>
+      <p:sp>
+        <p:nvSpPr>
+          <p:cNvPr id="7" name="Hexagon 6"/>
           <p:cNvSpPr/>
           <p:nvPr/>
         </p:nvSpPr>
         <p:spPr>
           <a:xfrm>
-            <a:off x="8229600" y="4114800"/>
-            <a:ext cx="640080" cy="73152"/>
-          </a:xfrm>
-          <a:prstGeom prst="rect">
+            <a:off x="9235440" y="2560320"/>
+            <a:ext cx="960120" cy="960120"/>
+          </a:xfrm>
+          <a:prstGeom prst="hexagon">
             <a:avLst/>
           </a:prstGeom>
           <a:solidFill>
-            <a:srgbClr val="DE9136"/>
+            <a:srgbClr val="128EDA"/>
           </a:solidFill>
           <a:ln>
             <a:noFill/>
@@ -3412,20 +3346,56 @@
       </p:sp>
       <p:sp>
         <p:nvSpPr>
-          <p:cNvPr id="10" name="Rectangle 9"/>
+          <p:cNvPr id="8" name="TextBox 7"/>
+          <p:cNvSpPr txBox="1"/>
+          <p:nvPr/>
+        </p:nvSpPr>
+        <p:spPr>
+          <a:xfrm>
+            <a:off x="9235440" y="2724912"/>
+            <a:ext cx="960120" cy="365760"/>
+          </a:xfrm>
+          <a:prstGeom prst="rect">
+            <a:avLst/>
+          </a:prstGeom>
+          <a:noFill/>
+        </p:spPr>
+        <p:txBody>
+          <a:bodyPr wrap="square">
+            <a:spAutoFit/>
+          </a:bodyPr>
+          <a:lstStyle/>
+          <a:p>
+            <a:pPr algn="ctr">
+              <a:defRPr sz="1800" b="1">
+                <a:solidFill>
+                  <a:srgbClr val="FFFFFF"/>
+                </a:solidFill>
+                <a:latin typeface="Aptos Display"/>
+              </a:defRPr>
+            </a:pPr>
+            <a:r>
+              <a:t>≡</a:t>
+            </a:r>
+          </a:p>
+        </p:txBody>
+      </p:sp>
+      <p:sp>
+        <p:nvSpPr>
+          <p:cNvPr id="9" name="Hexagon 8"/>
           <p:cNvSpPr/>
           <p:nvPr/>
         </p:nvSpPr>
         <p:spPr>
           <a:xfrm>
-            <a:off x="8869680" y="3108960"/>
-            <a:ext cx="1371600" cy="73152"/>
-          </a:xfrm>
-          <a:prstGeom prst="rect">
+            <a:off x="10058400" y="3291840"/>
+            <a:ext cx="960120" cy="960120"/>
+          </a:xfrm>
+          <a:prstGeom prst="hexagon">
             <a:avLst/>
           </a:prstGeom>
           <a:solidFill>
-            <a:srgbClr val="DE9136"/>
+            <a:srgbClr val="31A668"/>
           </a:solidFill>
           <a:ln>
             <a:noFill/>
@@ -3455,151 +3425,72 @@
       </p:sp>
       <p:sp>
         <p:nvSpPr>
-          <p:cNvPr id="11" name="Rectangle 10"/>
-          <p:cNvSpPr/>
-          <p:nvPr/>
-        </p:nvSpPr>
-        <p:spPr>
-          <a:xfrm>
-            <a:off x="10241280" y="4069080"/>
-            <a:ext cx="640080" cy="73152"/>
-          </a:xfrm>
-          <a:prstGeom prst="rect">
-            <a:avLst/>
-          </a:prstGeom>
-          <a:solidFill>
-            <a:srgbClr val="DE9136"/>
-          </a:solidFill>
-          <a:ln>
-            <a:noFill/>
-          </a:ln>
-        </p:spPr>
-        <p:style>
-          <a:lnRef idx="1">
-            <a:schemeClr val="accent1"/>
-          </a:lnRef>
-          <a:fillRef idx="3">
-            <a:schemeClr val="accent1"/>
-          </a:fillRef>
-          <a:effectRef idx="2">
-            <a:schemeClr val="accent1"/>
-          </a:effectRef>
-          <a:fontRef idx="minor">
-            <a:schemeClr val="lt1"/>
-          </a:fontRef>
-        </p:style>
-        <p:txBody>
-          <a:bodyPr rtlCol="0" anchor="ctr"/>
-          <a:lstStyle/>
-          <a:p>
-            <a:pPr algn="ctr"/>
-          </a:p>
-        </p:txBody>
-      </p:sp>
-      <p:sp>
-        <p:nvSpPr>
-          <p:cNvPr id="12" name="TextBox 11"/>
-          <p:cNvSpPr txBox="1"/>
-          <p:nvPr/>
-        </p:nvSpPr>
-        <p:spPr>
-          <a:xfrm>
-            <a:off x="8092440" y="3429000"/>
-            <a:ext cx="914400" cy="274320"/>
-          </a:xfrm>
-          <a:prstGeom prst="rect">
-            <a:avLst/>
-          </a:prstGeom>
-          <a:noFill/>
-        </p:spPr>
-        <p:txBody>
-          <a:bodyPr wrap="none" anchor="ctr">
+          <p:cNvPr id="10" name="TextBox 9"/>
+          <p:cNvSpPr txBox="1"/>
+          <p:nvPr/>
+        </p:nvSpPr>
+        <p:spPr>
+          <a:xfrm>
+            <a:off x="10058400" y="3456432"/>
+            <a:ext cx="960120" cy="365760"/>
+          </a:xfrm>
+          <a:prstGeom prst="rect">
+            <a:avLst/>
+          </a:prstGeom>
+          <a:noFill/>
+        </p:spPr>
+        <p:txBody>
+          <a:bodyPr wrap="square">
+            <a:spAutoFit/>
+          </a:bodyPr>
+          <a:lstStyle/>
+          <a:p>
+            <a:pPr algn="ctr">
+              <a:defRPr sz="1800" b="1">
+                <a:solidFill>
+                  <a:srgbClr val="FFFFFF"/>
+                </a:solidFill>
+                <a:latin typeface="Aptos Display"/>
+              </a:defRPr>
+            </a:pPr>
+            <a:r>
+              <a:t>✓</a:t>
+            </a:r>
+          </a:p>
+        </p:txBody>
+      </p:sp>
+      <p:sp>
+        <p:nvSpPr>
+          <p:cNvPr id="11" name="TextBox 10"/>
+          <p:cNvSpPr txBox="1"/>
+          <p:nvPr/>
+        </p:nvSpPr>
+        <p:spPr>
+          <a:xfrm>
+            <a:off x="411480" y="6217920"/>
+            <a:ext cx="3657600" cy="182880"/>
+          </a:xfrm>
+          <a:prstGeom prst="rect">
+            <a:avLst/>
+          </a:prstGeom>
+          <a:noFill/>
+        </p:spPr>
+        <p:txBody>
+          <a:bodyPr wrap="square">
             <a:spAutoFit/>
           </a:bodyPr>
           <a:lstStyle/>
           <a:p>
             <a:pPr algn="l">
-              <a:defRPr sz="1200" b="1">
-                <a:solidFill>
-                  <a:srgbClr val="42AAD2"/>
+              <a:defRPr sz="700" b="0">
+                <a:solidFill>
+                  <a:srgbClr val="FFFFFF"/>
                 </a:solidFill>
                 <a:latin typeface="Aptos"/>
               </a:defRPr>
             </a:pPr>
             <a:r>
-              <a:t>-3 dB</a:t>
-            </a:r>
-          </a:p>
-        </p:txBody>
-      </p:sp>
-      <p:sp>
-        <p:nvSpPr>
-          <p:cNvPr id="13" name="TextBox 12"/>
-          <p:cNvSpPr txBox="1"/>
-          <p:nvPr/>
-        </p:nvSpPr>
-        <p:spPr>
-          <a:xfrm>
-            <a:off x="8549640" y="4434840"/>
-            <a:ext cx="457200" cy="274320"/>
-          </a:xfrm>
-          <a:prstGeom prst="rect">
-            <a:avLst/>
-          </a:prstGeom>
-          <a:noFill/>
-        </p:spPr>
-        <p:txBody>
-          <a:bodyPr wrap="none" anchor="ctr">
-            <a:spAutoFit/>
-          </a:bodyPr>
-          <a:lstStyle/>
-          <a:p>
-            <a:pPr algn="l">
-              <a:defRPr sz="1200" b="1">
-                <a:solidFill>
-                  <a:srgbClr val="FFFFFF"/>
-                </a:solidFill>
-                <a:latin typeface="Aptos"/>
-              </a:defRPr>
-            </a:pPr>
-            <a:r>
-              <a:t>fL</a:t>
-            </a:r>
-          </a:p>
-        </p:txBody>
-      </p:sp>
-      <p:sp>
-        <p:nvSpPr>
-          <p:cNvPr id="14" name="TextBox 13"/>
-          <p:cNvSpPr txBox="1"/>
-          <p:nvPr/>
-        </p:nvSpPr>
-        <p:spPr>
-          <a:xfrm>
-            <a:off x="10378440" y="4434840"/>
-            <a:ext cx="457200" cy="274320"/>
-          </a:xfrm>
-          <a:prstGeom prst="rect">
-            <a:avLst/>
-          </a:prstGeom>
-          <a:noFill/>
-        </p:spPr>
-        <p:txBody>
-          <a:bodyPr wrap="none" anchor="ctr">
-            <a:spAutoFit/>
-          </a:bodyPr>
-          <a:lstStyle/>
-          <a:p>
-            <a:pPr algn="l">
-              <a:defRPr sz="1200" b="1">
-                <a:solidFill>
-                  <a:srgbClr val="FFFFFF"/>
-                </a:solidFill>
-                <a:latin typeface="Aptos"/>
-              </a:defRPr>
-            </a:pPr>
-            <a:r>
-              <a:t>fH</a:t>
+              <a:t>19–21. óra • 3 tanóra</a:t>
             </a:r>
           </a:p>
         </p:txBody>
@@ -3618,7 +3509,7 @@
     <p:bg>
       <p:bgPr>
         <a:solidFill>
-          <a:srgbClr val="F4F8FB"/>
+          <a:srgbClr val="EEF6FA"/>
         </a:solidFill>
         <a:effectLst/>
       </p:bgPr>
@@ -3638,102 +3529,102 @@
         </p:nvSpPr>
         <p:spPr>
           <a:xfrm>
-            <a:off x="594360" y="292608"/>
-            <a:ext cx="10972800" cy="502920"/>
-          </a:xfrm>
-          <a:prstGeom prst="rect">
-            <a:avLst/>
-          </a:prstGeom>
-          <a:noFill/>
-        </p:spPr>
-        <p:txBody>
-          <a:bodyPr wrap="none" anchor="ctr">
+            <a:off x="411480" y="201168"/>
+            <a:ext cx="3474720" cy="182880"/>
+          </a:xfrm>
+          <a:prstGeom prst="rect">
+            <a:avLst/>
+          </a:prstGeom>
+          <a:noFill/>
+        </p:spPr>
+        <p:txBody>
+          <a:bodyPr wrap="square">
             <a:spAutoFit/>
           </a:bodyPr>
           <a:lstStyle/>
           <a:p>
             <a:pPr algn="l">
-              <a:defRPr sz="2500" b="1">
-                <a:solidFill>
-                  <a:srgbClr val="122D48"/>
+              <a:defRPr sz="700" b="1">
+                <a:solidFill>
+                  <a:srgbClr val="F59722"/>
+                </a:solidFill>
+                <a:latin typeface="Aptos Display"/>
+              </a:defRPr>
+            </a:pPr>
+            <a:r>
+              <a:t>3. TANÓRA</a:t>
+            </a:r>
+          </a:p>
+        </p:txBody>
+      </p:sp>
+      <p:sp>
+        <p:nvSpPr>
+          <p:cNvPr id="3" name="TextBox 2"/>
+          <p:cNvSpPr txBox="1"/>
+          <p:nvPr/>
+        </p:nvSpPr>
+        <p:spPr>
+          <a:xfrm>
+            <a:off x="411480" y="457200"/>
+            <a:ext cx="10972800" cy="457200"/>
+          </a:xfrm>
+          <a:prstGeom prst="rect">
+            <a:avLst/>
+          </a:prstGeom>
+          <a:noFill/>
+        </p:spPr>
+        <p:txBody>
+          <a:bodyPr wrap="square">
+            <a:spAutoFit/>
+          </a:bodyPr>
+          <a:lstStyle/>
+          <a:p>
+            <a:pPr algn="l">
+              <a:defRPr sz="2000" b="1">
+                <a:solidFill>
+                  <a:srgbClr val="0B2F4B"/>
+                </a:solidFill>
+                <a:latin typeface="Aptos Display"/>
+              </a:defRPr>
+            </a:pPr>
+            <a:r>
+              <a:t>Gyakorlat: 4 kötés</a:t>
+            </a:r>
+          </a:p>
+        </p:txBody>
+      </p:sp>
+      <p:sp>
+        <p:nvSpPr>
+          <p:cNvPr id="4" name="TextBox 3"/>
+          <p:cNvSpPr txBox="1"/>
+          <p:nvPr/>
+        </p:nvSpPr>
+        <p:spPr>
+          <a:xfrm>
+            <a:off x="411480" y="6492240"/>
+            <a:ext cx="7315200" cy="164592"/>
+          </a:xfrm>
+          <a:prstGeom prst="rect">
+            <a:avLst/>
+          </a:prstGeom>
+          <a:noFill/>
+        </p:spPr>
+        <p:txBody>
+          <a:bodyPr wrap="square">
+            <a:spAutoFit/>
+          </a:bodyPr>
+          <a:lstStyle/>
+          <a:p>
+            <a:pPr algn="l">
+              <a:defRPr sz="600" b="0">
+                <a:solidFill>
+                  <a:srgbClr val="637988"/>
                 </a:solidFill>
                 <a:latin typeface="Aptos"/>
               </a:defRPr>
             </a:pPr>
             <a:r>
-              <a:t>Összefoglalás</a:t>
-            </a:r>
-          </a:p>
-        </p:txBody>
-      </p:sp>
-      <p:sp>
-        <p:nvSpPr>
-          <p:cNvPr id="3" name="TextBox 2"/>
-          <p:cNvSpPr txBox="1"/>
-          <p:nvPr/>
-        </p:nvSpPr>
-        <p:spPr>
-          <a:xfrm>
-            <a:off x="621792" y="822960"/>
-            <a:ext cx="10698480" cy="292608"/>
-          </a:xfrm>
-          <a:prstGeom prst="rect">
-            <a:avLst/>
-          </a:prstGeom>
-          <a:noFill/>
-        </p:spPr>
-        <p:txBody>
-          <a:bodyPr wrap="none" anchor="ctr">
-            <a:spAutoFit/>
-          </a:bodyPr>
-          <a:lstStyle/>
-          <a:p>
-            <a:pPr algn="l">
-              <a:defRPr sz="1100" b="0">
-                <a:solidFill>
-                  <a:srgbClr val="637380"/>
-                </a:solidFill>
-                <a:latin typeface="Aptos"/>
-              </a:defRPr>
-            </a:pPr>
-            <a:r>
-              <a:t>Négy kulcsállítás a forrásból.</a:t>
-            </a:r>
-          </a:p>
-        </p:txBody>
-      </p:sp>
-      <p:sp>
-        <p:nvSpPr>
-          <p:cNvPr id="4" name="TextBox 3"/>
-          <p:cNvSpPr txBox="1"/>
-          <p:nvPr/>
-        </p:nvSpPr>
-        <p:spPr>
-          <a:xfrm>
-            <a:off x="594360" y="6446520"/>
-            <a:ext cx="3657600" cy="182880"/>
-          </a:xfrm>
-          <a:prstGeom prst="rect">
-            <a:avLst/>
-          </a:prstGeom>
-          <a:noFill/>
-        </p:spPr>
-        <p:txBody>
-          <a:bodyPr wrap="none" anchor="ctr">
-            <a:spAutoFit/>
-          </a:bodyPr>
-          <a:lstStyle/>
-          <a:p>
-            <a:pPr algn="l">
-              <a:defRPr sz="900" b="1">
-                <a:solidFill>
-                  <a:srgbClr val="122D48"/>
-                </a:solidFill>
-                <a:latin typeface="Aptos"/>
-              </a:defRPr>
-            </a:pPr>
-            <a:r>
-              <a:t>IAP • Analóg áramkörök • 7. hét</a:t>
+              <a:t>IAP • 11. évfolyam • Villamos szerelések • 07. hét</a:t>
             </a:r>
           </a:p>
         </p:txBody>
@@ -3746,24 +3637,24 @@
         </p:nvSpPr>
         <p:spPr>
           <a:xfrm>
-            <a:off x="11155680" y="6428232"/>
-            <a:ext cx="411480" cy="182880"/>
-          </a:xfrm>
-          <a:prstGeom prst="rect">
-            <a:avLst/>
-          </a:prstGeom>
-          <a:noFill/>
-        </p:spPr>
-        <p:txBody>
-          <a:bodyPr wrap="none" anchor="ctr">
+            <a:off x="11430000" y="6473952"/>
+            <a:ext cx="274320" cy="182880"/>
+          </a:xfrm>
+          <a:prstGeom prst="rect">
+            <a:avLst/>
+          </a:prstGeom>
+          <a:noFill/>
+        </p:spPr>
+        <p:txBody>
+          <a:bodyPr wrap="square">
             <a:spAutoFit/>
           </a:bodyPr>
           <a:lstStyle/>
           <a:p>
             <a:pPr algn="r">
-              <a:defRPr sz="900" b="1">
-                <a:solidFill>
-                  <a:srgbClr val="637380"/>
+              <a:defRPr sz="700" b="0">
+                <a:solidFill>
+                  <a:srgbClr val="637988"/>
                 </a:solidFill>
                 <a:latin typeface="Aptos"/>
               </a:defRPr>
@@ -3782,8 +3673,8 @@
         </p:nvSpPr>
         <p:spPr>
           <a:xfrm>
-            <a:off x="502920" y="1417320"/>
-            <a:ext cx="5212080" cy="1600200"/>
+            <a:off x="914400" y="1325880"/>
+            <a:ext cx="10241280" cy="749808"/>
           </a:xfrm>
           <a:prstGeom prst="roundRect">
             <a:avLst/>
@@ -3793,7 +3684,7 @@
           </a:solidFill>
           <a:ln>
             <a:solidFill>
-              <a:srgbClr val="DCE7EF"/>
+              <a:srgbClr val="C9D8E2"/>
             </a:solidFill>
           </a:ln>
         </p:spPr>
@@ -3827,80 +3718,44 @@
         </p:nvSpPr>
         <p:spPr>
           <a:xfrm>
-            <a:off x="667512" y="1554480"/>
-            <a:ext cx="4882896" cy="365760"/>
-          </a:xfrm>
-          <a:prstGeom prst="rect">
-            <a:avLst/>
-          </a:prstGeom>
-          <a:noFill/>
-        </p:spPr>
-        <p:txBody>
-          <a:bodyPr wrap="none" anchor="ctr">
-            <a:spAutoFit/>
-          </a:bodyPr>
-          <a:lstStyle/>
-          <a:p>
-            <a:pPr algn="ctr">
-              <a:defRPr sz="1500" b="1">
-                <a:solidFill>
-                  <a:srgbClr val="2B78B8"/>
-                </a:solidFill>
-                <a:latin typeface="Aptos"/>
-              </a:defRPr>
-            </a:pPr>
-            <a:r>
-              <a:t>1</a:t>
-            </a:r>
-          </a:p>
-        </p:txBody>
-      </p:sp>
-      <p:sp>
-        <p:nvSpPr>
-          <p:cNvPr id="8" name="TextBox 7"/>
-          <p:cNvSpPr txBox="1"/>
-          <p:nvPr/>
-        </p:nvSpPr>
-        <p:spPr>
-          <a:xfrm>
-            <a:off x="704088" y="2039112"/>
-            <a:ext cx="4809744" cy="822960"/>
-          </a:xfrm>
-          <a:prstGeom prst="rect">
-            <a:avLst/>
-          </a:prstGeom>
-          <a:noFill/>
-        </p:spPr>
-        <p:txBody>
-          <a:bodyPr wrap="none" anchor="ctr">
-            <a:spAutoFit/>
-          </a:bodyPr>
-          <a:lstStyle/>
-          <a:p>
-            <a:pPr algn="ctr">
-              <a:defRPr sz="1300" b="0">
-                <a:solidFill>
-                  <a:srgbClr val="243441"/>
-                </a:solidFill>
-                <a:latin typeface="Aptos"/>
-              </a:defRPr>
-            </a:pPr>
-            <a:r>
-              <a:t>Az erősítés frekvenciafüggő.</a:t>
-            </a:r>
-          </a:p>
-        </p:txBody>
-      </p:sp>
-      <p:sp>
-        <p:nvSpPr>
-          <p:cNvPr id="9" name="Rounded Rectangle 8"/>
+            <a:off x="1234440" y="1536192"/>
+            <a:ext cx="9601200" cy="320040"/>
+          </a:xfrm>
+          <a:prstGeom prst="rect">
+            <a:avLst/>
+          </a:prstGeom>
+          <a:noFill/>
+        </p:spPr>
+        <p:txBody>
+          <a:bodyPr wrap="square">
+            <a:spAutoFit/>
+          </a:bodyPr>
+          <a:lstStyle/>
+          <a:p>
+            <a:pPr algn="l">
+              <a:defRPr sz="1300" b="1">
+                <a:solidFill>
+                  <a:srgbClr val="0B2F4B"/>
+                </a:solidFill>
+                <a:latin typeface="Aptos Display"/>
+              </a:defRPr>
+            </a:pPr>
+            <a:r>
+              <a:t>Tömör vezető + csavaros kapocs</a:t>
+            </a:r>
+          </a:p>
+        </p:txBody>
+      </p:sp>
+      <p:sp>
+        <p:nvSpPr>
+          <p:cNvPr id="8" name="Rounded Rectangle 7"/>
           <p:cNvSpPr/>
           <p:nvPr/>
         </p:nvSpPr>
         <p:spPr>
           <a:xfrm>
-            <a:off x="6172200" y="1417320"/>
-            <a:ext cx="5212080" cy="1600200"/>
+            <a:off x="914400" y="2377439"/>
+            <a:ext cx="10241280" cy="749808"/>
           </a:xfrm>
           <a:prstGeom prst="roundRect">
             <a:avLst/>
@@ -3910,7 +3765,7 @@
           </a:solidFill>
           <a:ln>
             <a:solidFill>
-              <a:srgbClr val="DCE7EF"/>
+              <a:srgbClr val="C9D8E2"/>
             </a:solidFill>
           </a:ln>
         </p:spPr>
@@ -3938,86 +3793,50 @@
       </p:sp>
       <p:sp>
         <p:nvSpPr>
-          <p:cNvPr id="10" name="TextBox 9"/>
-          <p:cNvSpPr txBox="1"/>
-          <p:nvPr/>
-        </p:nvSpPr>
-        <p:spPr>
-          <a:xfrm>
-            <a:off x="6336792" y="1554480"/>
-            <a:ext cx="4882896" cy="365760"/>
-          </a:xfrm>
-          <a:prstGeom prst="rect">
-            <a:avLst/>
-          </a:prstGeom>
-          <a:noFill/>
-        </p:spPr>
-        <p:txBody>
-          <a:bodyPr wrap="none" anchor="ctr">
-            <a:spAutoFit/>
-          </a:bodyPr>
-          <a:lstStyle/>
-          <a:p>
-            <a:pPr algn="ctr">
-              <a:defRPr sz="1500" b="1">
-                <a:solidFill>
-                  <a:srgbClr val="42AAD2"/>
-                </a:solidFill>
-                <a:latin typeface="Aptos"/>
-              </a:defRPr>
-            </a:pPr>
-            <a:r>
-              <a:t>2</a:t>
-            </a:r>
-          </a:p>
-        </p:txBody>
-      </p:sp>
-      <p:sp>
-        <p:nvSpPr>
-          <p:cNvPr id="11" name="TextBox 10"/>
-          <p:cNvSpPr txBox="1"/>
-          <p:nvPr/>
-        </p:nvSpPr>
-        <p:spPr>
-          <a:xfrm>
-            <a:off x="6373368" y="2039112"/>
-            <a:ext cx="4809744" cy="822960"/>
-          </a:xfrm>
-          <a:prstGeom prst="rect">
-            <a:avLst/>
-          </a:prstGeom>
-          <a:noFill/>
-        </p:spPr>
-        <p:txBody>
-          <a:bodyPr wrap="none" anchor="ctr">
-            <a:spAutoFit/>
-          </a:bodyPr>
-          <a:lstStyle/>
-          <a:p>
-            <a:pPr algn="ctr">
-              <a:defRPr sz="1300" b="0">
-                <a:solidFill>
-                  <a:srgbClr val="243441"/>
-                </a:solidFill>
-                <a:latin typeface="Aptos"/>
-              </a:defRPr>
-            </a:pPr>
-            <a:r>
-              <a:t>A Bode-diagram kapcsolatot mutat.</a:t>
-            </a:r>
-          </a:p>
-        </p:txBody>
-      </p:sp>
-      <p:sp>
-        <p:nvSpPr>
-          <p:cNvPr id="12" name="Rounded Rectangle 11"/>
+          <p:cNvPr id="9" name="TextBox 8"/>
+          <p:cNvSpPr txBox="1"/>
+          <p:nvPr/>
+        </p:nvSpPr>
+        <p:spPr>
+          <a:xfrm>
+            <a:off x="1234440" y="2587752"/>
+            <a:ext cx="9601200" cy="320040"/>
+          </a:xfrm>
+          <a:prstGeom prst="rect">
+            <a:avLst/>
+          </a:prstGeom>
+          <a:noFill/>
+        </p:spPr>
+        <p:txBody>
+          <a:bodyPr wrap="square">
+            <a:spAutoFit/>
+          </a:bodyPr>
+          <a:lstStyle/>
+          <a:p>
+            <a:pPr algn="l">
+              <a:defRPr sz="1300" b="1">
+                <a:solidFill>
+                  <a:srgbClr val="0B2F4B"/>
+                </a:solidFill>
+                <a:latin typeface="Aptos Display"/>
+              </a:defRPr>
+            </a:pPr>
+            <a:r>
+              <a:t>Sodrott vezető + csavaros kapocs</a:t>
+            </a:r>
+          </a:p>
+        </p:txBody>
+      </p:sp>
+      <p:sp>
+        <p:nvSpPr>
+          <p:cNvPr id="10" name="Rounded Rectangle 9"/>
           <p:cNvSpPr/>
           <p:nvPr/>
         </p:nvSpPr>
         <p:spPr>
           <a:xfrm>
-            <a:off x="502920" y="3474720"/>
-            <a:ext cx="5212080" cy="1600200"/>
+            <a:off x="914400" y="3429000"/>
+            <a:ext cx="10241280" cy="749808"/>
           </a:xfrm>
           <a:prstGeom prst="roundRect">
             <a:avLst/>
@@ -4027,7 +3846,7 @@
           </a:solidFill>
           <a:ln>
             <a:solidFill>
-              <a:srgbClr val="DCE7EF"/>
+              <a:srgbClr val="C9D8E2"/>
             </a:solidFill>
           </a:ln>
         </p:spPr>
@@ -4055,86 +3874,50 @@
       </p:sp>
       <p:sp>
         <p:nvSpPr>
-          <p:cNvPr id="13" name="TextBox 12"/>
-          <p:cNvSpPr txBox="1"/>
-          <p:nvPr/>
-        </p:nvSpPr>
-        <p:spPr>
-          <a:xfrm>
-            <a:off x="667512" y="3611879"/>
-            <a:ext cx="4882896" cy="365760"/>
-          </a:xfrm>
-          <a:prstGeom prst="rect">
-            <a:avLst/>
-          </a:prstGeom>
-          <a:noFill/>
-        </p:spPr>
-        <p:txBody>
-          <a:bodyPr wrap="none" anchor="ctr">
-            <a:spAutoFit/>
-          </a:bodyPr>
-          <a:lstStyle/>
-          <a:p>
-            <a:pPr algn="ctr">
-              <a:defRPr sz="1500" b="1">
-                <a:solidFill>
-                  <a:srgbClr val="DE9136"/>
-                </a:solidFill>
-                <a:latin typeface="Aptos"/>
-              </a:defRPr>
-            </a:pPr>
-            <a:r>
-              <a:t>3</a:t>
-            </a:r>
-          </a:p>
-        </p:txBody>
-      </p:sp>
-      <p:sp>
-        <p:nvSpPr>
-          <p:cNvPr id="14" name="TextBox 13"/>
-          <p:cNvSpPr txBox="1"/>
-          <p:nvPr/>
-        </p:nvSpPr>
-        <p:spPr>
-          <a:xfrm>
-            <a:off x="704088" y="4096511"/>
-            <a:ext cx="4809744" cy="822960"/>
-          </a:xfrm>
-          <a:prstGeom prst="rect">
-            <a:avLst/>
-          </a:prstGeom>
-          <a:noFill/>
-        </p:spPr>
-        <p:txBody>
-          <a:bodyPr wrap="none" anchor="ctr">
-            <a:spAutoFit/>
-          </a:bodyPr>
-          <a:lstStyle/>
-          <a:p>
-            <a:pPr algn="ctr">
-              <a:defRPr sz="1300" b="0">
-                <a:solidFill>
-                  <a:srgbClr val="243441"/>
-                </a:solidFill>
-                <a:latin typeface="Aptos"/>
-              </a:defRPr>
-            </a:pPr>
-            <a:r>
-              <a:t>A -3 dB határfrekvenciát jelöl.</a:t>
-            </a:r>
-          </a:p>
-        </p:txBody>
-      </p:sp>
-      <p:sp>
-        <p:nvSpPr>
-          <p:cNvPr id="15" name="Rounded Rectangle 14"/>
+          <p:cNvPr id="11" name="TextBox 10"/>
+          <p:cNvSpPr txBox="1"/>
+          <p:nvPr/>
+        </p:nvSpPr>
+        <p:spPr>
+          <a:xfrm>
+            <a:off x="1234440" y="3639311"/>
+            <a:ext cx="9601200" cy="320040"/>
+          </a:xfrm>
+          <a:prstGeom prst="rect">
+            <a:avLst/>
+          </a:prstGeom>
+          <a:noFill/>
+        </p:spPr>
+        <p:txBody>
+          <a:bodyPr wrap="square">
+            <a:spAutoFit/>
+          </a:bodyPr>
+          <a:lstStyle/>
+          <a:p>
+            <a:pPr algn="l">
+              <a:defRPr sz="1300" b="1">
+                <a:solidFill>
+                  <a:srgbClr val="0B2F4B"/>
+                </a:solidFill>
+                <a:latin typeface="Aptos Display"/>
+              </a:defRPr>
+            </a:pPr>
+            <a:r>
+              <a:t>Tömör vezető + rugós kapocs</a:t>
+            </a:r>
+          </a:p>
+        </p:txBody>
+      </p:sp>
+      <p:sp>
+        <p:nvSpPr>
+          <p:cNvPr id="12" name="Rounded Rectangle 11"/>
           <p:cNvSpPr/>
           <p:nvPr/>
         </p:nvSpPr>
         <p:spPr>
           <a:xfrm>
-            <a:off x="6172200" y="3474720"/>
-            <a:ext cx="5212080" cy="1600200"/>
+            <a:off x="914400" y="4480559"/>
+            <a:ext cx="10241280" cy="749808"/>
           </a:xfrm>
           <a:prstGeom prst="roundRect">
             <a:avLst/>
@@ -4144,7 +3927,7 @@
           </a:solidFill>
           <a:ln>
             <a:solidFill>
-              <a:srgbClr val="DCE7EF"/>
+              <a:srgbClr val="C9D8E2"/>
             </a:solidFill>
           </a:ln>
         </p:spPr>
@@ -4172,72 +3955,36 @@
       </p:sp>
       <p:sp>
         <p:nvSpPr>
-          <p:cNvPr id="16" name="TextBox 15"/>
-          <p:cNvSpPr txBox="1"/>
-          <p:nvPr/>
-        </p:nvSpPr>
-        <p:spPr>
-          <a:xfrm>
-            <a:off x="6336792" y="3611879"/>
-            <a:ext cx="4882896" cy="365760"/>
-          </a:xfrm>
-          <a:prstGeom prst="rect">
-            <a:avLst/>
-          </a:prstGeom>
-          <a:noFill/>
-        </p:spPr>
-        <p:txBody>
-          <a:bodyPr wrap="none" anchor="ctr">
-            <a:spAutoFit/>
-          </a:bodyPr>
-          <a:lstStyle/>
-          <a:p>
-            <a:pPr algn="ctr">
-              <a:defRPr sz="1500" b="1">
-                <a:solidFill>
-                  <a:srgbClr val="3F8F68"/>
-                </a:solidFill>
-                <a:latin typeface="Aptos"/>
-              </a:defRPr>
-            </a:pPr>
-            <a:r>
-              <a:t>4</a:t>
-            </a:r>
-          </a:p>
-        </p:txBody>
-      </p:sp>
-      <p:sp>
-        <p:nvSpPr>
-          <p:cNvPr id="17" name="TextBox 16"/>
-          <p:cNvSpPr txBox="1"/>
-          <p:nvPr/>
-        </p:nvSpPr>
-        <p:spPr>
-          <a:xfrm>
-            <a:off x="6373368" y="4096511"/>
-            <a:ext cx="4809744" cy="822960"/>
-          </a:xfrm>
-          <a:prstGeom prst="rect">
-            <a:avLst/>
-          </a:prstGeom>
-          <a:noFill/>
-        </p:spPr>
-        <p:txBody>
-          <a:bodyPr wrap="none" anchor="ctr">
-            <a:spAutoFit/>
-          </a:bodyPr>
-          <a:lstStyle/>
-          <a:p>
-            <a:pPr algn="ctr">
-              <a:defRPr sz="1300" b="0">
-                <a:solidFill>
-                  <a:srgbClr val="243441"/>
-                </a:solidFill>
-                <a:latin typeface="Aptos"/>
-              </a:defRPr>
-            </a:pPr>
-            <a:r>
-              <a:t>fL és fH között optimális.</a:t>
+          <p:cNvPr id="13" name="TextBox 12"/>
+          <p:cNvSpPr txBox="1"/>
+          <p:nvPr/>
+        </p:nvSpPr>
+        <p:spPr>
+          <a:xfrm>
+            <a:off x="1234440" y="4690872"/>
+            <a:ext cx="9601200" cy="320040"/>
+          </a:xfrm>
+          <a:prstGeom prst="rect">
+            <a:avLst/>
+          </a:prstGeom>
+          <a:noFill/>
+        </p:spPr>
+        <p:txBody>
+          <a:bodyPr wrap="square">
+            <a:spAutoFit/>
+          </a:bodyPr>
+          <a:lstStyle/>
+          <a:p>
+            <a:pPr algn="l">
+              <a:defRPr sz="1300" b="1">
+                <a:solidFill>
+                  <a:srgbClr val="0B2F4B"/>
+                </a:solidFill>
+                <a:latin typeface="Aptos Display"/>
+              </a:defRPr>
+            </a:pPr>
+            <a:r>
+              <a:t>Sodrott vezető + rugós kapocs</a:t>
             </a:r>
           </a:p>
         </p:txBody>
@@ -4256,7 +4003,7 @@
     <p:bg>
       <p:bgPr>
         <a:solidFill>
-          <a:srgbClr val="122D48"/>
+          <a:srgbClr val="EEF6FA"/>
         </a:solidFill>
         <a:effectLst/>
       </p:bgPr>
@@ -4276,30 +4023,1018 @@
         </p:nvSpPr>
         <p:spPr>
           <a:xfrm>
-            <a:off x="914400" y="1188720"/>
-            <a:ext cx="10332720" cy="548640"/>
-          </a:xfrm>
-          <a:prstGeom prst="rect">
-            <a:avLst/>
-          </a:prstGeom>
-          <a:noFill/>
-        </p:spPr>
-        <p:txBody>
-          <a:bodyPr wrap="none" anchor="ctr">
+            <a:off x="411480" y="201168"/>
+            <a:ext cx="3474720" cy="182880"/>
+          </a:xfrm>
+          <a:prstGeom prst="rect">
+            <a:avLst/>
+          </a:prstGeom>
+          <a:noFill/>
+        </p:spPr>
+        <p:txBody>
+          <a:bodyPr wrap="square">
+            <a:spAutoFit/>
+          </a:bodyPr>
+          <a:lstStyle/>
+          <a:p>
+            <a:pPr algn="l">
+              <a:defRPr sz="700" b="1">
+                <a:solidFill>
+                  <a:srgbClr val="F59722"/>
+                </a:solidFill>
+                <a:latin typeface="Aptos Display"/>
+              </a:defRPr>
+            </a:pPr>
+            <a:r>
+              <a:t>3. TANÓRA</a:t>
+            </a:r>
+          </a:p>
+        </p:txBody>
+      </p:sp>
+      <p:sp>
+        <p:nvSpPr>
+          <p:cNvPr id="3" name="TextBox 2"/>
+          <p:cNvSpPr txBox="1"/>
+          <p:nvPr/>
+        </p:nvSpPr>
+        <p:spPr>
+          <a:xfrm>
+            <a:off x="411480" y="457200"/>
+            <a:ext cx="10972800" cy="457200"/>
+          </a:xfrm>
+          <a:prstGeom prst="rect">
+            <a:avLst/>
+          </a:prstGeom>
+          <a:noFill/>
+        </p:spPr>
+        <p:txBody>
+          <a:bodyPr wrap="square">
+            <a:spAutoFit/>
+          </a:bodyPr>
+          <a:lstStyle/>
+          <a:p>
+            <a:pPr algn="l">
+              <a:defRPr sz="2000" b="1">
+                <a:solidFill>
+                  <a:srgbClr val="0B2F4B"/>
+                </a:solidFill>
+                <a:latin typeface="Aptos Display"/>
+              </a:defRPr>
+            </a:pPr>
+            <a:r>
+              <a:t>Minőségellenőrző lista</a:t>
+            </a:r>
+          </a:p>
+        </p:txBody>
+      </p:sp>
+      <p:sp>
+        <p:nvSpPr>
+          <p:cNvPr id="4" name="TextBox 3"/>
+          <p:cNvSpPr txBox="1"/>
+          <p:nvPr/>
+        </p:nvSpPr>
+        <p:spPr>
+          <a:xfrm>
+            <a:off x="411480" y="6492240"/>
+            <a:ext cx="7315200" cy="164592"/>
+          </a:xfrm>
+          <a:prstGeom prst="rect">
+            <a:avLst/>
+          </a:prstGeom>
+          <a:noFill/>
+        </p:spPr>
+        <p:txBody>
+          <a:bodyPr wrap="square">
+            <a:spAutoFit/>
+          </a:bodyPr>
+          <a:lstStyle/>
+          <a:p>
+            <a:pPr algn="l">
+              <a:defRPr sz="600" b="0">
+                <a:solidFill>
+                  <a:srgbClr val="637988"/>
+                </a:solidFill>
+                <a:latin typeface="Aptos"/>
+              </a:defRPr>
+            </a:pPr>
+            <a:r>
+              <a:t>IAP • 11. évfolyam • Villamos szerelések • 07. hét</a:t>
+            </a:r>
+          </a:p>
+        </p:txBody>
+      </p:sp>
+      <p:sp>
+        <p:nvSpPr>
+          <p:cNvPr id="5" name="TextBox 4"/>
+          <p:cNvSpPr txBox="1"/>
+          <p:nvPr/>
+        </p:nvSpPr>
+        <p:spPr>
+          <a:xfrm>
+            <a:off x="11430000" y="6473952"/>
+            <a:ext cx="274320" cy="182880"/>
+          </a:xfrm>
+          <a:prstGeom prst="rect">
+            <a:avLst/>
+          </a:prstGeom>
+          <a:noFill/>
+        </p:spPr>
+        <p:txBody>
+          <a:bodyPr wrap="square">
+            <a:spAutoFit/>
+          </a:bodyPr>
+          <a:lstStyle/>
+          <a:p>
+            <a:pPr algn="r">
+              <a:defRPr sz="700" b="0">
+                <a:solidFill>
+                  <a:srgbClr val="637988"/>
+                </a:solidFill>
+                <a:latin typeface="Aptos"/>
+              </a:defRPr>
+            </a:pPr>
+            <a:r>
+              <a:t>11</a:t>
+            </a:r>
+          </a:p>
+        </p:txBody>
+      </p:sp>
+      <p:sp>
+        <p:nvSpPr>
+          <p:cNvPr id="6" name="Rounded Rectangle 5"/>
+          <p:cNvSpPr/>
+          <p:nvPr/>
+        </p:nvSpPr>
+        <p:spPr>
+          <a:xfrm>
+            <a:off x="640080" y="1325880"/>
+            <a:ext cx="5029200" cy="914400"/>
+          </a:xfrm>
+          <a:prstGeom prst="roundRect">
+            <a:avLst/>
+          </a:prstGeom>
+          <a:solidFill>
+            <a:srgbClr val="FFFFFF"/>
+          </a:solidFill>
+          <a:ln>
+            <a:solidFill>
+              <a:srgbClr val="C9D8E2"/>
+            </a:solidFill>
+          </a:ln>
+        </p:spPr>
+        <p:style>
+          <a:lnRef idx="1">
+            <a:schemeClr val="accent1"/>
+          </a:lnRef>
+          <a:fillRef idx="3">
+            <a:schemeClr val="accent1"/>
+          </a:fillRef>
+          <a:effectRef idx="2">
+            <a:schemeClr val="accent1"/>
+          </a:effectRef>
+          <a:fontRef idx="minor">
+            <a:schemeClr val="lt1"/>
+          </a:fontRef>
+        </p:style>
+        <p:txBody>
+          <a:bodyPr rtlCol="0" anchor="ctr"/>
+          <a:lstStyle/>
+          <a:p>
+            <a:pPr algn="ctr"/>
+          </a:p>
+        </p:txBody>
+      </p:sp>
+      <p:sp>
+        <p:nvSpPr>
+          <p:cNvPr id="7" name="TextBox 6"/>
+          <p:cNvSpPr txBox="1"/>
+          <p:nvPr/>
+        </p:nvSpPr>
+        <p:spPr>
+          <a:xfrm>
+            <a:off x="914400" y="1600200"/>
+            <a:ext cx="4480560" cy="320040"/>
+          </a:xfrm>
+          <a:prstGeom prst="rect">
+            <a:avLst/>
+          </a:prstGeom>
+          <a:noFill/>
+        </p:spPr>
+        <p:txBody>
+          <a:bodyPr wrap="square">
             <a:spAutoFit/>
           </a:bodyPr>
           <a:lstStyle/>
           <a:p>
             <a:pPr algn="ctr">
-              <a:defRPr sz="2200" b="1">
-                <a:solidFill>
-                  <a:srgbClr val="42AAD2"/>
+              <a:defRPr sz="1100" b="1">
+                <a:solidFill>
+                  <a:srgbClr val="0B2F4B"/>
+                </a:solidFill>
+                <a:latin typeface="Aptos Display"/>
+              </a:defRPr>
+            </a:pPr>
+            <a:r>
+              <a:t>Nincs szabad csupasz rész.</a:t>
+            </a:r>
+          </a:p>
+        </p:txBody>
+      </p:sp>
+      <p:sp>
+        <p:nvSpPr>
+          <p:cNvPr id="8" name="Rounded Rectangle 7"/>
+          <p:cNvSpPr/>
+          <p:nvPr/>
+        </p:nvSpPr>
+        <p:spPr>
+          <a:xfrm>
+            <a:off x="6217920" y="1325880"/>
+            <a:ext cx="5029200" cy="914400"/>
+          </a:xfrm>
+          <a:prstGeom prst="roundRect">
+            <a:avLst/>
+          </a:prstGeom>
+          <a:solidFill>
+            <a:srgbClr val="FFFFFF"/>
+          </a:solidFill>
+          <a:ln>
+            <a:solidFill>
+              <a:srgbClr val="C9D8E2"/>
+            </a:solidFill>
+          </a:ln>
+        </p:spPr>
+        <p:style>
+          <a:lnRef idx="1">
+            <a:schemeClr val="accent1"/>
+          </a:lnRef>
+          <a:fillRef idx="3">
+            <a:schemeClr val="accent1"/>
+          </a:fillRef>
+          <a:effectRef idx="2">
+            <a:schemeClr val="accent1"/>
+          </a:effectRef>
+          <a:fontRef idx="minor">
+            <a:schemeClr val="lt1"/>
+          </a:fontRef>
+        </p:style>
+        <p:txBody>
+          <a:bodyPr rtlCol="0" anchor="ctr"/>
+          <a:lstStyle/>
+          <a:p>
+            <a:pPr algn="ctr"/>
+          </a:p>
+        </p:txBody>
+      </p:sp>
+      <p:sp>
+        <p:nvSpPr>
+          <p:cNvPr id="9" name="TextBox 8"/>
+          <p:cNvSpPr txBox="1"/>
+          <p:nvPr/>
+        </p:nvSpPr>
+        <p:spPr>
+          <a:xfrm>
+            <a:off x="6492240" y="1600200"/>
+            <a:ext cx="4480560" cy="320040"/>
+          </a:xfrm>
+          <a:prstGeom prst="rect">
+            <a:avLst/>
+          </a:prstGeom>
+          <a:noFill/>
+        </p:spPr>
+        <p:txBody>
+          <a:bodyPr wrap="square">
+            <a:spAutoFit/>
+          </a:bodyPr>
+          <a:lstStyle/>
+          <a:p>
+            <a:pPr algn="ctr">
+              <a:defRPr sz="1100" b="1">
+                <a:solidFill>
+                  <a:srgbClr val="0B2F4B"/>
+                </a:solidFill>
+                <a:latin typeface="Aptos Display"/>
+              </a:defRPr>
+            </a:pPr>
+            <a:r>
+              <a:t>A vezető stabil.</a:t>
+            </a:r>
+          </a:p>
+        </p:txBody>
+      </p:sp>
+      <p:sp>
+        <p:nvSpPr>
+          <p:cNvPr id="10" name="Rounded Rectangle 9"/>
+          <p:cNvSpPr/>
+          <p:nvPr/>
+        </p:nvSpPr>
+        <p:spPr>
+          <a:xfrm>
+            <a:off x="640080" y="2651760"/>
+            <a:ext cx="5029200" cy="914400"/>
+          </a:xfrm>
+          <a:prstGeom prst="roundRect">
+            <a:avLst/>
+          </a:prstGeom>
+          <a:solidFill>
+            <a:srgbClr val="FFFFFF"/>
+          </a:solidFill>
+          <a:ln>
+            <a:solidFill>
+              <a:srgbClr val="C9D8E2"/>
+            </a:solidFill>
+          </a:ln>
+        </p:spPr>
+        <p:style>
+          <a:lnRef idx="1">
+            <a:schemeClr val="accent1"/>
+          </a:lnRef>
+          <a:fillRef idx="3">
+            <a:schemeClr val="accent1"/>
+          </a:fillRef>
+          <a:effectRef idx="2">
+            <a:schemeClr val="accent1"/>
+          </a:effectRef>
+          <a:fontRef idx="minor">
+            <a:schemeClr val="lt1"/>
+          </a:fontRef>
+        </p:style>
+        <p:txBody>
+          <a:bodyPr rtlCol="0" anchor="ctr"/>
+          <a:lstStyle/>
+          <a:p>
+            <a:pPr algn="ctr"/>
+          </a:p>
+        </p:txBody>
+      </p:sp>
+      <p:sp>
+        <p:nvSpPr>
+          <p:cNvPr id="11" name="TextBox 10"/>
+          <p:cNvSpPr txBox="1"/>
+          <p:nvPr/>
+        </p:nvSpPr>
+        <p:spPr>
+          <a:xfrm>
+            <a:off x="914400" y="2926079"/>
+            <a:ext cx="4480560" cy="320040"/>
+          </a:xfrm>
+          <a:prstGeom prst="rect">
+            <a:avLst/>
+          </a:prstGeom>
+          <a:noFill/>
+        </p:spPr>
+        <p:txBody>
+          <a:bodyPr wrap="square">
+            <a:spAutoFit/>
+          </a:bodyPr>
+          <a:lstStyle/>
+          <a:p>
+            <a:pPr algn="ctr">
+              <a:defRPr sz="1100" b="1">
+                <a:solidFill>
+                  <a:srgbClr val="0B2F4B"/>
+                </a:solidFill>
+                <a:latin typeface="Aptos Display"/>
+              </a:defRPr>
+            </a:pPr>
+            <a:r>
+              <a:t>A szigetelés nem került a kontaktus alá.</a:t>
+            </a:r>
+          </a:p>
+        </p:txBody>
+      </p:sp>
+      <p:sp>
+        <p:nvSpPr>
+          <p:cNvPr id="12" name="Rounded Rectangle 11"/>
+          <p:cNvSpPr/>
+          <p:nvPr/>
+        </p:nvSpPr>
+        <p:spPr>
+          <a:xfrm>
+            <a:off x="6217920" y="2651760"/>
+            <a:ext cx="5029200" cy="914400"/>
+          </a:xfrm>
+          <a:prstGeom prst="roundRect">
+            <a:avLst/>
+          </a:prstGeom>
+          <a:solidFill>
+            <a:srgbClr val="FFFFFF"/>
+          </a:solidFill>
+          <a:ln>
+            <a:solidFill>
+              <a:srgbClr val="C9D8E2"/>
+            </a:solidFill>
+          </a:ln>
+        </p:spPr>
+        <p:style>
+          <a:lnRef idx="1">
+            <a:schemeClr val="accent1"/>
+          </a:lnRef>
+          <a:fillRef idx="3">
+            <a:schemeClr val="accent1"/>
+          </a:fillRef>
+          <a:effectRef idx="2">
+            <a:schemeClr val="accent1"/>
+          </a:effectRef>
+          <a:fontRef idx="minor">
+            <a:schemeClr val="lt1"/>
+          </a:fontRef>
+        </p:style>
+        <p:txBody>
+          <a:bodyPr rtlCol="0" anchor="ctr"/>
+          <a:lstStyle/>
+          <a:p>
+            <a:pPr algn="ctr"/>
+          </a:p>
+        </p:txBody>
+      </p:sp>
+      <p:sp>
+        <p:nvSpPr>
+          <p:cNvPr id="13" name="TextBox 12"/>
+          <p:cNvSpPr txBox="1"/>
+          <p:nvPr/>
+        </p:nvSpPr>
+        <p:spPr>
+          <a:xfrm>
+            <a:off x="6492240" y="2926079"/>
+            <a:ext cx="4480560" cy="320040"/>
+          </a:xfrm>
+          <a:prstGeom prst="rect">
+            <a:avLst/>
+          </a:prstGeom>
+          <a:noFill/>
+        </p:spPr>
+        <p:txBody>
+          <a:bodyPr wrap="square">
+            <a:spAutoFit/>
+          </a:bodyPr>
+          <a:lstStyle/>
+          <a:p>
+            <a:pPr algn="ctr">
+              <a:defRPr sz="1100" b="1">
+                <a:solidFill>
+                  <a:srgbClr val="0B2F4B"/>
+                </a:solidFill>
+                <a:latin typeface="Aptos Display"/>
+              </a:defRPr>
+            </a:pPr>
+            <a:r>
+              <a:t>A kötőelem sértetlen.</a:t>
+            </a:r>
+          </a:p>
+        </p:txBody>
+      </p:sp>
+      <p:sp>
+        <p:nvSpPr>
+          <p:cNvPr id="14" name="Rounded Rectangle 13"/>
+          <p:cNvSpPr/>
+          <p:nvPr/>
+        </p:nvSpPr>
+        <p:spPr>
+          <a:xfrm>
+            <a:off x="640080" y="3977639"/>
+            <a:ext cx="5029200" cy="914400"/>
+          </a:xfrm>
+          <a:prstGeom prst="roundRect">
+            <a:avLst/>
+          </a:prstGeom>
+          <a:solidFill>
+            <a:srgbClr val="FFFFFF"/>
+          </a:solidFill>
+          <a:ln>
+            <a:solidFill>
+              <a:srgbClr val="C9D8E2"/>
+            </a:solidFill>
+          </a:ln>
+        </p:spPr>
+        <p:style>
+          <a:lnRef idx="1">
+            <a:schemeClr val="accent1"/>
+          </a:lnRef>
+          <a:fillRef idx="3">
+            <a:schemeClr val="accent1"/>
+          </a:fillRef>
+          <a:effectRef idx="2">
+            <a:schemeClr val="accent1"/>
+          </a:effectRef>
+          <a:fontRef idx="minor">
+            <a:schemeClr val="lt1"/>
+          </a:fontRef>
+        </p:style>
+        <p:txBody>
+          <a:bodyPr rtlCol="0" anchor="ctr"/>
+          <a:lstStyle/>
+          <a:p>
+            <a:pPr algn="ctr"/>
+          </a:p>
+        </p:txBody>
+      </p:sp>
+      <p:sp>
+        <p:nvSpPr>
+          <p:cNvPr id="15" name="TextBox 14"/>
+          <p:cNvSpPr txBox="1"/>
+          <p:nvPr/>
+        </p:nvSpPr>
+        <p:spPr>
+          <a:xfrm>
+            <a:off x="914400" y="4251959"/>
+            <a:ext cx="4480560" cy="320040"/>
+          </a:xfrm>
+          <a:prstGeom prst="rect">
+            <a:avLst/>
+          </a:prstGeom>
+          <a:noFill/>
+        </p:spPr>
+        <p:txBody>
+          <a:bodyPr wrap="square">
+            <a:spAutoFit/>
+          </a:bodyPr>
+          <a:lstStyle/>
+          <a:p>
+            <a:pPr algn="ctr">
+              <a:defRPr sz="1100" b="1">
+                <a:solidFill>
+                  <a:srgbClr val="0B2F4B"/>
+                </a:solidFill>
+                <a:latin typeface="Aptos Display"/>
+              </a:defRPr>
+            </a:pPr>
+            <a:r>
+              <a:t>A munkaterület rendezett.</a:t>
+            </a:r>
+          </a:p>
+        </p:txBody>
+      </p:sp>
+    </p:spTree>
+  </p:cSld>
+  <p:clrMapOvr>
+    <a:masterClrMapping/>
+  </p:clrMapOvr>
+</p:sld>
+</file>
+
+<file path=ppt/slides/slide12.xml><?xml version="1.0" encoding="utf-8"?>
+<p:sld xmlns:a="http://schemas.openxmlformats.org/drawingml/2006/main" xmlns:p="http://schemas.openxmlformats.org/presentationml/2006/main" xmlns:r="http://schemas.openxmlformats.org/officeDocument/2006/relationships">
+  <p:cSld>
+    <p:bg>
+      <p:bgPr>
+        <a:solidFill>
+          <a:srgbClr val="EEF6FA"/>
+        </a:solidFill>
+        <a:effectLst/>
+      </p:bgPr>
+    </p:bg>
+    <p:spTree>
+      <p:nvGrpSpPr>
+        <p:cNvPr id="1" name=""/>
+        <p:cNvGrpSpPr/>
+        <p:nvPr/>
+      </p:nvGrpSpPr>
+      <p:grpSpPr/>
+      <p:sp>
+        <p:nvSpPr>
+          <p:cNvPr id="2" name="TextBox 1"/>
+          <p:cNvSpPr txBox="1"/>
+          <p:nvPr/>
+        </p:nvSpPr>
+        <p:spPr>
+          <a:xfrm>
+            <a:off x="411480" y="201168"/>
+            <a:ext cx="3474720" cy="182880"/>
+          </a:xfrm>
+          <a:prstGeom prst="rect">
+            <a:avLst/>
+          </a:prstGeom>
+          <a:noFill/>
+        </p:spPr>
+        <p:txBody>
+          <a:bodyPr wrap="square">
+            <a:spAutoFit/>
+          </a:bodyPr>
+          <a:lstStyle/>
+          <a:p>
+            <a:pPr algn="l">
+              <a:defRPr sz="700" b="1">
+                <a:solidFill>
+                  <a:srgbClr val="F59722"/>
+                </a:solidFill>
+                <a:latin typeface="Aptos Display"/>
+              </a:defRPr>
+            </a:pPr>
+            <a:r>
+              <a:t>KIHÍVÁS</a:t>
+            </a:r>
+          </a:p>
+        </p:txBody>
+      </p:sp>
+      <p:sp>
+        <p:nvSpPr>
+          <p:cNvPr id="3" name="TextBox 2"/>
+          <p:cNvSpPr txBox="1"/>
+          <p:nvPr/>
+        </p:nvSpPr>
+        <p:spPr>
+          <a:xfrm>
+            <a:off x="411480" y="457200"/>
+            <a:ext cx="10972800" cy="457200"/>
+          </a:xfrm>
+          <a:prstGeom prst="rect">
+            <a:avLst/>
+          </a:prstGeom>
+          <a:noFill/>
+        </p:spPr>
+        <p:txBody>
+          <a:bodyPr wrap="square">
+            <a:spAutoFit/>
+          </a:bodyPr>
+          <a:lstStyle/>
+          <a:p>
+            <a:pPr algn="l">
+              <a:defRPr sz="2000" b="1">
+                <a:solidFill>
+                  <a:srgbClr val="0B2F4B"/>
+                </a:solidFill>
+                <a:latin typeface="Aptos Display"/>
+              </a:defRPr>
+            </a:pPr>
+            <a:r>
+              <a:t>IAP heti kihívás</a:t>
+            </a:r>
+          </a:p>
+        </p:txBody>
+      </p:sp>
+      <p:sp>
+        <p:nvSpPr>
+          <p:cNvPr id="4" name="TextBox 3"/>
+          <p:cNvSpPr txBox="1"/>
+          <p:nvPr/>
+        </p:nvSpPr>
+        <p:spPr>
+          <a:xfrm>
+            <a:off x="411480" y="6492240"/>
+            <a:ext cx="7315200" cy="164592"/>
+          </a:xfrm>
+          <a:prstGeom prst="rect">
+            <a:avLst/>
+          </a:prstGeom>
+          <a:noFill/>
+        </p:spPr>
+        <p:txBody>
+          <a:bodyPr wrap="square">
+            <a:spAutoFit/>
+          </a:bodyPr>
+          <a:lstStyle/>
+          <a:p>
+            <a:pPr algn="l">
+              <a:defRPr sz="600" b="0">
+                <a:solidFill>
+                  <a:srgbClr val="637988"/>
                 </a:solidFill>
                 <a:latin typeface="Aptos"/>
               </a:defRPr>
             </a:pPr>
             <a:r>
-              <a:t>7. HÉT</a:t>
+              <a:t>IAP • 11. évfolyam • Villamos szerelések • 07. hét</a:t>
+            </a:r>
+          </a:p>
+        </p:txBody>
+      </p:sp>
+      <p:sp>
+        <p:nvSpPr>
+          <p:cNvPr id="5" name="TextBox 4"/>
+          <p:cNvSpPr txBox="1"/>
+          <p:nvPr/>
+        </p:nvSpPr>
+        <p:spPr>
+          <a:xfrm>
+            <a:off x="11430000" y="6473952"/>
+            <a:ext cx="274320" cy="182880"/>
+          </a:xfrm>
+          <a:prstGeom prst="rect">
+            <a:avLst/>
+          </a:prstGeom>
+          <a:noFill/>
+        </p:spPr>
+        <p:txBody>
+          <a:bodyPr wrap="square">
+            <a:spAutoFit/>
+          </a:bodyPr>
+          <a:lstStyle/>
+          <a:p>
+            <a:pPr algn="r">
+              <a:defRPr sz="700" b="0">
+                <a:solidFill>
+                  <a:srgbClr val="637988"/>
+                </a:solidFill>
+                <a:latin typeface="Aptos"/>
+              </a:defRPr>
+            </a:pPr>
+            <a:r>
+              <a:t>12</a:t>
+            </a:r>
+          </a:p>
+        </p:txBody>
+      </p:sp>
+      <p:sp>
+        <p:nvSpPr>
+          <p:cNvPr id="6" name="Rounded Rectangle 5"/>
+          <p:cNvSpPr/>
+          <p:nvPr/>
+        </p:nvSpPr>
+        <p:spPr>
+          <a:xfrm>
+            <a:off x="914400" y="1325880"/>
+            <a:ext cx="10241280" cy="749808"/>
+          </a:xfrm>
+          <a:prstGeom prst="roundRect">
+            <a:avLst/>
+          </a:prstGeom>
+          <a:solidFill>
+            <a:srgbClr val="FFFFFF"/>
+          </a:solidFill>
+          <a:ln>
+            <a:solidFill>
+              <a:srgbClr val="C9D8E2"/>
+            </a:solidFill>
+          </a:ln>
+        </p:spPr>
+        <p:style>
+          <a:lnRef idx="1">
+            <a:schemeClr val="accent1"/>
+          </a:lnRef>
+          <a:fillRef idx="3">
+            <a:schemeClr val="accent1"/>
+          </a:fillRef>
+          <a:effectRef idx="2">
+            <a:schemeClr val="accent1"/>
+          </a:effectRef>
+          <a:fontRef idx="minor">
+            <a:schemeClr val="lt1"/>
+          </a:fontRef>
+        </p:style>
+        <p:txBody>
+          <a:bodyPr rtlCol="0" anchor="ctr"/>
+          <a:lstStyle/>
+          <a:p>
+            <a:pPr algn="ctr"/>
+          </a:p>
+        </p:txBody>
+      </p:sp>
+      <p:sp>
+        <p:nvSpPr>
+          <p:cNvPr id="7" name="TextBox 6"/>
+          <p:cNvSpPr txBox="1"/>
+          <p:nvPr/>
+        </p:nvSpPr>
+        <p:spPr>
+          <a:xfrm>
+            <a:off x="1234440" y="1536192"/>
+            <a:ext cx="9601200" cy="320040"/>
+          </a:xfrm>
+          <a:prstGeom prst="rect">
+            <a:avLst/>
+          </a:prstGeom>
+          <a:noFill/>
+        </p:spPr>
+        <p:txBody>
+          <a:bodyPr wrap="square">
+            <a:spAutoFit/>
+          </a:bodyPr>
+          <a:lstStyle/>
+          <a:p>
+            <a:pPr algn="l">
+              <a:defRPr sz="1300" b="1">
+                <a:solidFill>
+                  <a:srgbClr val="0B2F4B"/>
+                </a:solidFill>
+                <a:latin typeface="Aptos Display"/>
+              </a:defRPr>
+            </a:pPr>
+            <a:r>
+              <a:t>Egy csavaros kötés terhelés közben melegszik.</a:t>
+            </a:r>
+          </a:p>
+        </p:txBody>
+      </p:sp>
+      <p:sp>
+        <p:nvSpPr>
+          <p:cNvPr id="8" name="Rounded Rectangle 7"/>
+          <p:cNvSpPr/>
+          <p:nvPr/>
+        </p:nvSpPr>
+        <p:spPr>
+          <a:xfrm>
+            <a:off x="914400" y="2377439"/>
+            <a:ext cx="10241280" cy="749808"/>
+          </a:xfrm>
+          <a:prstGeom prst="roundRect">
+            <a:avLst/>
+          </a:prstGeom>
+          <a:solidFill>
+            <a:srgbClr val="FFFFFF"/>
+          </a:solidFill>
+          <a:ln>
+            <a:solidFill>
+              <a:srgbClr val="C9D8E2"/>
+            </a:solidFill>
+          </a:ln>
+        </p:spPr>
+        <p:style>
+          <a:lnRef idx="1">
+            <a:schemeClr val="accent1"/>
+          </a:lnRef>
+          <a:fillRef idx="3">
+            <a:schemeClr val="accent1"/>
+          </a:fillRef>
+          <a:effectRef idx="2">
+            <a:schemeClr val="accent1"/>
+          </a:effectRef>
+          <a:fontRef idx="minor">
+            <a:schemeClr val="lt1"/>
+          </a:fontRef>
+        </p:style>
+        <p:txBody>
+          <a:bodyPr rtlCol="0" anchor="ctr"/>
+          <a:lstStyle/>
+          <a:p>
+            <a:pPr algn="ctr"/>
+          </a:p>
+        </p:txBody>
+      </p:sp>
+      <p:sp>
+        <p:nvSpPr>
+          <p:cNvPr id="9" name="TextBox 8"/>
+          <p:cNvSpPr txBox="1"/>
+          <p:nvPr/>
+        </p:nvSpPr>
+        <p:spPr>
+          <a:xfrm>
+            <a:off x="1234440" y="2587752"/>
+            <a:ext cx="9601200" cy="320040"/>
+          </a:xfrm>
+          <a:prstGeom prst="rect">
+            <a:avLst/>
+          </a:prstGeom>
+          <a:noFill/>
+        </p:spPr>
+        <p:txBody>
+          <a:bodyPr wrap="square">
+            <a:spAutoFit/>
+          </a:bodyPr>
+          <a:lstStyle/>
+          <a:p>
+            <a:pPr algn="l">
+              <a:defRPr sz="1300" b="1">
+                <a:solidFill>
+                  <a:srgbClr val="0B2F4B"/>
+                </a:solidFill>
+                <a:latin typeface="Aptos Display"/>
+              </a:defRPr>
+            </a:pPr>
+            <a:r>
+              <a:t>Mi lehet az oka?</a:t>
+            </a:r>
+          </a:p>
+        </p:txBody>
+      </p:sp>
+      <p:sp>
+        <p:nvSpPr>
+          <p:cNvPr id="10" name="Rounded Rectangle 9"/>
+          <p:cNvSpPr/>
+          <p:nvPr/>
+        </p:nvSpPr>
+        <p:spPr>
+          <a:xfrm>
+            <a:off x="914400" y="3429000"/>
+            <a:ext cx="10241280" cy="749808"/>
+          </a:xfrm>
+          <a:prstGeom prst="roundRect">
+            <a:avLst/>
+          </a:prstGeom>
+          <a:solidFill>
+            <a:srgbClr val="FFFFFF"/>
+          </a:solidFill>
+          <a:ln>
+            <a:solidFill>
+              <a:srgbClr val="C9D8E2"/>
+            </a:solidFill>
+          </a:ln>
+        </p:spPr>
+        <p:style>
+          <a:lnRef idx="1">
+            <a:schemeClr val="accent1"/>
+          </a:lnRef>
+          <a:fillRef idx="3">
+            <a:schemeClr val="accent1"/>
+          </a:fillRef>
+          <a:effectRef idx="2">
+            <a:schemeClr val="accent1"/>
+          </a:effectRef>
+          <a:fontRef idx="minor">
+            <a:schemeClr val="lt1"/>
+          </a:fontRef>
+        </p:style>
+        <p:txBody>
+          <a:bodyPr rtlCol="0" anchor="ctr"/>
+          <a:lstStyle/>
+          <a:p>
+            <a:pPr algn="ctr"/>
+          </a:p>
+        </p:txBody>
+      </p:sp>
+      <p:sp>
+        <p:nvSpPr>
+          <p:cNvPr id="11" name="TextBox 10"/>
+          <p:cNvSpPr txBox="1"/>
+          <p:nvPr/>
+        </p:nvSpPr>
+        <p:spPr>
+          <a:xfrm>
+            <a:off x="1234440" y="3639311"/>
+            <a:ext cx="9601200" cy="320040"/>
+          </a:xfrm>
+          <a:prstGeom prst="rect">
+            <a:avLst/>
+          </a:prstGeom>
+          <a:noFill/>
+        </p:spPr>
+        <p:txBody>
+          <a:bodyPr wrap="square">
+            <a:spAutoFit/>
+          </a:bodyPr>
+          <a:lstStyle/>
+          <a:p>
+            <a:pPr algn="l">
+              <a:defRPr sz="1300" b="1">
+                <a:solidFill>
+                  <a:srgbClr val="0B2F4B"/>
+                </a:solidFill>
+                <a:latin typeface="Aptos Display"/>
+              </a:defRPr>
+            </a:pPr>
+            <a:r>
+              <a:t>Mit ellenőriznél először?</a:t>
+            </a:r>
+          </a:p>
+        </p:txBody>
+      </p:sp>
+    </p:spTree>
+  </p:cSld>
+  <p:clrMapOvr>
+    <a:masterClrMapping/>
+  </p:clrMapOvr>
+</p:sld>
+</file>
+
+<file path=ppt/slides/slide13.xml><?xml version="1.0" encoding="utf-8"?>
+<p:sld xmlns:a="http://schemas.openxmlformats.org/drawingml/2006/main" xmlns:p="http://schemas.openxmlformats.org/presentationml/2006/main" xmlns:r="http://schemas.openxmlformats.org/officeDocument/2006/relationships">
+  <p:cSld>
+    <p:bg>
+      <p:bgPr>
+        <a:solidFill>
+          <a:srgbClr val="EEF6FA"/>
+        </a:solidFill>
+        <a:effectLst/>
+      </p:bgPr>
+    </p:bg>
+    <p:spTree>
+      <p:nvGrpSpPr>
+        <p:cNvPr id="1" name=""/>
+        <p:cNvGrpSpPr/>
+        <p:nvPr/>
+      </p:nvGrpSpPr>
+      <p:grpSpPr/>
+      <p:sp>
+        <p:nvSpPr>
+          <p:cNvPr id="2" name="TextBox 1"/>
+          <p:cNvSpPr txBox="1"/>
+          <p:nvPr/>
+        </p:nvSpPr>
+        <p:spPr>
+          <a:xfrm>
+            <a:off x="411480" y="201168"/>
+            <a:ext cx="3474720" cy="182880"/>
+          </a:xfrm>
+          <a:prstGeom prst="rect">
+            <a:avLst/>
+          </a:prstGeom>
+          <a:noFill/>
+        </p:spPr>
+        <p:txBody>
+          <a:bodyPr wrap="square">
+            <a:spAutoFit/>
+          </a:bodyPr>
+          <a:lstStyle/>
+          <a:p>
+            <a:pPr algn="l">
+              <a:defRPr sz="700" b="1">
+                <a:solidFill>
+                  <a:srgbClr val="F59722"/>
+                </a:solidFill>
+                <a:latin typeface="Aptos Display"/>
+              </a:defRPr>
+            </a:pPr>
+            <a:r>
+              <a:t>ELLENŐRZÉS</a:t>
             </a:r>
           </a:p>
         </p:txBody>
@@ -4312,66 +5047,1252 @@
         </p:nvSpPr>
         <p:spPr>
           <a:xfrm>
-            <a:off x="914400" y="1965960"/>
-            <a:ext cx="10332720" cy="685800"/>
-          </a:xfrm>
-          <a:prstGeom prst="rect">
-            <a:avLst/>
-          </a:prstGeom>
-          <a:noFill/>
-        </p:spPr>
-        <p:txBody>
-          <a:bodyPr wrap="none" anchor="ctr">
+            <a:off x="411480" y="457200"/>
+            <a:ext cx="10972800" cy="457200"/>
+          </a:xfrm>
+          <a:prstGeom prst="rect">
+            <a:avLst/>
+          </a:prstGeom>
+          <a:noFill/>
+        </p:spPr>
+        <p:txBody>
+          <a:bodyPr wrap="square">
+            <a:spAutoFit/>
+          </a:bodyPr>
+          <a:lstStyle/>
+          <a:p>
+            <a:pPr algn="l">
+              <a:defRPr sz="2000" b="1">
+                <a:solidFill>
+                  <a:srgbClr val="0B2F4B"/>
+                </a:solidFill>
+                <a:latin typeface="Aptos Display"/>
+              </a:defRPr>
+            </a:pPr>
+            <a:r>
+              <a:t>Szakmai döntés</a:t>
+            </a:r>
+          </a:p>
+        </p:txBody>
+      </p:sp>
+      <p:sp>
+        <p:nvSpPr>
+          <p:cNvPr id="4" name="TextBox 3"/>
+          <p:cNvSpPr txBox="1"/>
+          <p:nvPr/>
+        </p:nvSpPr>
+        <p:spPr>
+          <a:xfrm>
+            <a:off x="411480" y="6492240"/>
+            <a:ext cx="7315200" cy="164592"/>
+          </a:xfrm>
+          <a:prstGeom prst="rect">
+            <a:avLst/>
+          </a:prstGeom>
+          <a:noFill/>
+        </p:spPr>
+        <p:txBody>
+          <a:bodyPr wrap="square">
+            <a:spAutoFit/>
+          </a:bodyPr>
+          <a:lstStyle/>
+          <a:p>
+            <a:pPr algn="l">
+              <a:defRPr sz="600" b="0">
+                <a:solidFill>
+                  <a:srgbClr val="637988"/>
+                </a:solidFill>
+                <a:latin typeface="Aptos"/>
+              </a:defRPr>
+            </a:pPr>
+            <a:r>
+              <a:t>IAP • 11. évfolyam • Villamos szerelések • 07. hét</a:t>
+            </a:r>
+          </a:p>
+        </p:txBody>
+      </p:sp>
+      <p:sp>
+        <p:nvSpPr>
+          <p:cNvPr id="5" name="TextBox 4"/>
+          <p:cNvSpPr txBox="1"/>
+          <p:nvPr/>
+        </p:nvSpPr>
+        <p:spPr>
+          <a:xfrm>
+            <a:off x="11430000" y="6473952"/>
+            <a:ext cx="274320" cy="182880"/>
+          </a:xfrm>
+          <a:prstGeom prst="rect">
+            <a:avLst/>
+          </a:prstGeom>
+          <a:noFill/>
+        </p:spPr>
+        <p:txBody>
+          <a:bodyPr wrap="square">
+            <a:spAutoFit/>
+          </a:bodyPr>
+          <a:lstStyle/>
+          <a:p>
+            <a:pPr algn="r">
+              <a:defRPr sz="700" b="0">
+                <a:solidFill>
+                  <a:srgbClr val="637988"/>
+                </a:solidFill>
+                <a:latin typeface="Aptos"/>
+              </a:defRPr>
+            </a:pPr>
+            <a:r>
+              <a:t>13</a:t>
+            </a:r>
+          </a:p>
+        </p:txBody>
+      </p:sp>
+      <p:sp>
+        <p:nvSpPr>
+          <p:cNvPr id="6" name="Rounded Rectangle 5"/>
+          <p:cNvSpPr/>
+          <p:nvPr/>
+        </p:nvSpPr>
+        <p:spPr>
+          <a:xfrm>
+            <a:off x="914400" y="1325880"/>
+            <a:ext cx="10241280" cy="749808"/>
+          </a:xfrm>
+          <a:prstGeom prst="roundRect">
+            <a:avLst/>
+          </a:prstGeom>
+          <a:solidFill>
+            <a:srgbClr val="FFFFFF"/>
+          </a:solidFill>
+          <a:ln>
+            <a:solidFill>
+              <a:srgbClr val="C9D8E2"/>
+            </a:solidFill>
+          </a:ln>
+        </p:spPr>
+        <p:style>
+          <a:lnRef idx="1">
+            <a:schemeClr val="accent1"/>
+          </a:lnRef>
+          <a:fillRef idx="3">
+            <a:schemeClr val="accent1"/>
+          </a:fillRef>
+          <a:effectRef idx="2">
+            <a:schemeClr val="accent1"/>
+          </a:effectRef>
+          <a:fontRef idx="minor">
+            <a:schemeClr val="lt1"/>
+          </a:fontRef>
+        </p:style>
+        <p:txBody>
+          <a:bodyPr rtlCol="0" anchor="ctr"/>
+          <a:lstStyle/>
+          <a:p>
+            <a:pPr algn="ctr"/>
+          </a:p>
+        </p:txBody>
+      </p:sp>
+      <p:sp>
+        <p:nvSpPr>
+          <p:cNvPr id="7" name="TextBox 6"/>
+          <p:cNvSpPr txBox="1"/>
+          <p:nvPr/>
+        </p:nvSpPr>
+        <p:spPr>
+          <a:xfrm>
+            <a:off x="1234440" y="1536192"/>
+            <a:ext cx="9601200" cy="320040"/>
+          </a:xfrm>
+          <a:prstGeom prst="rect">
+            <a:avLst/>
+          </a:prstGeom>
+          <a:noFill/>
+        </p:spPr>
+        <p:txBody>
+          <a:bodyPr wrap="square">
+            <a:spAutoFit/>
+          </a:bodyPr>
+          <a:lstStyle/>
+          <a:p>
+            <a:pPr algn="l">
+              <a:defRPr sz="1300" b="1">
+                <a:solidFill>
+                  <a:srgbClr val="0B2F4B"/>
+                </a:solidFill>
+                <a:latin typeface="Aptos Display"/>
+              </a:defRPr>
+            </a:pPr>
+            <a:r>
+              <a:t>HASZNÁLHATÓ: stabil, sérülésmentes, megfelelően blankolt.</a:t>
+            </a:r>
+          </a:p>
+        </p:txBody>
+      </p:sp>
+      <p:sp>
+        <p:nvSpPr>
+          <p:cNvPr id="8" name="Rounded Rectangle 7"/>
+          <p:cNvSpPr/>
+          <p:nvPr/>
+        </p:nvSpPr>
+        <p:spPr>
+          <a:xfrm>
+            <a:off x="914400" y="2377439"/>
+            <a:ext cx="10241280" cy="749808"/>
+          </a:xfrm>
+          <a:prstGeom prst="roundRect">
+            <a:avLst/>
+          </a:prstGeom>
+          <a:solidFill>
+            <a:srgbClr val="FFFFFF"/>
+          </a:solidFill>
+          <a:ln>
+            <a:solidFill>
+              <a:srgbClr val="C9D8E2"/>
+            </a:solidFill>
+          </a:ln>
+        </p:spPr>
+        <p:style>
+          <a:lnRef idx="1">
+            <a:schemeClr val="accent1"/>
+          </a:lnRef>
+          <a:fillRef idx="3">
+            <a:schemeClr val="accent1"/>
+          </a:fillRef>
+          <a:effectRef idx="2">
+            <a:schemeClr val="accent1"/>
+          </a:effectRef>
+          <a:fontRef idx="minor">
+            <a:schemeClr val="lt1"/>
+          </a:fontRef>
+        </p:style>
+        <p:txBody>
+          <a:bodyPr rtlCol="0" anchor="ctr"/>
+          <a:lstStyle/>
+          <a:p>
+            <a:pPr algn="ctr"/>
+          </a:p>
+        </p:txBody>
+      </p:sp>
+      <p:sp>
+        <p:nvSpPr>
+          <p:cNvPr id="9" name="TextBox 8"/>
+          <p:cNvSpPr txBox="1"/>
+          <p:nvPr/>
+        </p:nvSpPr>
+        <p:spPr>
+          <a:xfrm>
+            <a:off x="1234440" y="2587752"/>
+            <a:ext cx="9601200" cy="320040"/>
+          </a:xfrm>
+          <a:prstGeom prst="rect">
+            <a:avLst/>
+          </a:prstGeom>
+          <a:noFill/>
+        </p:spPr>
+        <p:txBody>
+          <a:bodyPr wrap="square">
+            <a:spAutoFit/>
+          </a:bodyPr>
+          <a:lstStyle/>
+          <a:p>
+            <a:pPr algn="l">
+              <a:defRPr sz="1300" b="1">
+                <a:solidFill>
+                  <a:srgbClr val="0B2F4B"/>
+                </a:solidFill>
+                <a:latin typeface="Aptos Display"/>
+              </a:defRPr>
+            </a:pPr>
+            <a:r>
+              <a:t>ÚJRAKÉSZÍTENDŐ: laza, kilógó szálas, sérült vagy túlblankolt.</a:t>
+            </a:r>
+          </a:p>
+        </p:txBody>
+      </p:sp>
+    </p:spTree>
+  </p:cSld>
+  <p:clrMapOvr>
+    <a:masterClrMapping/>
+  </p:clrMapOvr>
+</p:sld>
+</file>
+
+<file path=ppt/slides/slide14.xml><?xml version="1.0" encoding="utf-8"?>
+<p:sld xmlns:a="http://schemas.openxmlformats.org/drawingml/2006/main" xmlns:p="http://schemas.openxmlformats.org/presentationml/2006/main" xmlns:r="http://schemas.openxmlformats.org/officeDocument/2006/relationships">
+  <p:cSld>
+    <p:bg>
+      <p:bgPr>
+        <a:solidFill>
+          <a:srgbClr val="EEF6FA"/>
+        </a:solidFill>
+        <a:effectLst/>
+      </p:bgPr>
+    </p:bg>
+    <p:spTree>
+      <p:nvGrpSpPr>
+        <p:cNvPr id="1" name=""/>
+        <p:cNvGrpSpPr/>
+        <p:nvPr/>
+      </p:nvGrpSpPr>
+      <p:grpSpPr/>
+      <p:sp>
+        <p:nvSpPr>
+          <p:cNvPr id="2" name="TextBox 1"/>
+          <p:cNvSpPr txBox="1"/>
+          <p:nvPr/>
+        </p:nvSpPr>
+        <p:spPr>
+          <a:xfrm>
+            <a:off x="411480" y="201168"/>
+            <a:ext cx="3474720" cy="182880"/>
+          </a:xfrm>
+          <a:prstGeom prst="rect">
+            <a:avLst/>
+          </a:prstGeom>
+          <a:noFill/>
+        </p:spPr>
+        <p:txBody>
+          <a:bodyPr wrap="square">
+            <a:spAutoFit/>
+          </a:bodyPr>
+          <a:lstStyle/>
+          <a:p>
+            <a:pPr algn="l">
+              <a:defRPr sz="700" b="1">
+                <a:solidFill>
+                  <a:srgbClr val="F59722"/>
+                </a:solidFill>
+                <a:latin typeface="Aptos Display"/>
+              </a:defRPr>
+            </a:pPr>
+            <a:r>
+              <a:t>ELLENŐRZÉS</a:t>
+            </a:r>
+          </a:p>
+        </p:txBody>
+      </p:sp>
+      <p:sp>
+        <p:nvSpPr>
+          <p:cNvPr id="3" name="TextBox 2"/>
+          <p:cNvSpPr txBox="1"/>
+          <p:nvPr/>
+        </p:nvSpPr>
+        <p:spPr>
+          <a:xfrm>
+            <a:off x="411480" y="457200"/>
+            <a:ext cx="10972800" cy="457200"/>
+          </a:xfrm>
+          <a:prstGeom prst="rect">
+            <a:avLst/>
+          </a:prstGeom>
+          <a:noFill/>
+        </p:spPr>
+        <p:txBody>
+          <a:bodyPr wrap="square">
+            <a:spAutoFit/>
+          </a:bodyPr>
+          <a:lstStyle/>
+          <a:p>
+            <a:pPr algn="l">
+              <a:defRPr sz="2000" b="1">
+                <a:solidFill>
+                  <a:srgbClr val="0B2F4B"/>
+                </a:solidFill>
+                <a:latin typeface="Aptos Display"/>
+              </a:defRPr>
+            </a:pPr>
+            <a:r>
+              <a:t>4 kérdés – 4 válasz</a:t>
+            </a:r>
+          </a:p>
+        </p:txBody>
+      </p:sp>
+      <p:sp>
+        <p:nvSpPr>
+          <p:cNvPr id="4" name="TextBox 3"/>
+          <p:cNvSpPr txBox="1"/>
+          <p:nvPr/>
+        </p:nvSpPr>
+        <p:spPr>
+          <a:xfrm>
+            <a:off x="411480" y="6492240"/>
+            <a:ext cx="7315200" cy="164592"/>
+          </a:xfrm>
+          <a:prstGeom prst="rect">
+            <a:avLst/>
+          </a:prstGeom>
+          <a:noFill/>
+        </p:spPr>
+        <p:txBody>
+          <a:bodyPr wrap="square">
+            <a:spAutoFit/>
+          </a:bodyPr>
+          <a:lstStyle/>
+          <a:p>
+            <a:pPr algn="l">
+              <a:defRPr sz="600" b="0">
+                <a:solidFill>
+                  <a:srgbClr val="637988"/>
+                </a:solidFill>
+                <a:latin typeface="Aptos"/>
+              </a:defRPr>
+            </a:pPr>
+            <a:r>
+              <a:t>IAP • 11. évfolyam • Villamos szerelések • 07. hét</a:t>
+            </a:r>
+          </a:p>
+        </p:txBody>
+      </p:sp>
+      <p:sp>
+        <p:nvSpPr>
+          <p:cNvPr id="5" name="TextBox 4"/>
+          <p:cNvSpPr txBox="1"/>
+          <p:nvPr/>
+        </p:nvSpPr>
+        <p:spPr>
+          <a:xfrm>
+            <a:off x="11430000" y="6473952"/>
+            <a:ext cx="274320" cy="182880"/>
+          </a:xfrm>
+          <a:prstGeom prst="rect">
+            <a:avLst/>
+          </a:prstGeom>
+          <a:noFill/>
+        </p:spPr>
+        <p:txBody>
+          <a:bodyPr wrap="square">
+            <a:spAutoFit/>
+          </a:bodyPr>
+          <a:lstStyle/>
+          <a:p>
+            <a:pPr algn="r">
+              <a:defRPr sz="700" b="0">
+                <a:solidFill>
+                  <a:srgbClr val="637988"/>
+                </a:solidFill>
+                <a:latin typeface="Aptos"/>
+              </a:defRPr>
+            </a:pPr>
+            <a:r>
+              <a:t>14</a:t>
+            </a:r>
+          </a:p>
+        </p:txBody>
+      </p:sp>
+      <p:sp>
+        <p:nvSpPr>
+          <p:cNvPr id="6" name="Rounded Rectangle 5"/>
+          <p:cNvSpPr/>
+          <p:nvPr/>
+        </p:nvSpPr>
+        <p:spPr>
+          <a:xfrm>
+            <a:off x="914400" y="1325880"/>
+            <a:ext cx="10241280" cy="749808"/>
+          </a:xfrm>
+          <a:prstGeom prst="roundRect">
+            <a:avLst/>
+          </a:prstGeom>
+          <a:solidFill>
+            <a:srgbClr val="FFFFFF"/>
+          </a:solidFill>
+          <a:ln>
+            <a:solidFill>
+              <a:srgbClr val="C9D8E2"/>
+            </a:solidFill>
+          </a:ln>
+        </p:spPr>
+        <p:style>
+          <a:lnRef idx="1">
+            <a:schemeClr val="accent1"/>
+          </a:lnRef>
+          <a:fillRef idx="3">
+            <a:schemeClr val="accent1"/>
+          </a:fillRef>
+          <a:effectRef idx="2">
+            <a:schemeClr val="accent1"/>
+          </a:effectRef>
+          <a:fontRef idx="minor">
+            <a:schemeClr val="lt1"/>
+          </a:fontRef>
+        </p:style>
+        <p:txBody>
+          <a:bodyPr rtlCol="0" anchor="ctr"/>
+          <a:lstStyle/>
+          <a:p>
+            <a:pPr algn="ctr"/>
+          </a:p>
+        </p:txBody>
+      </p:sp>
+      <p:sp>
+        <p:nvSpPr>
+          <p:cNvPr id="7" name="TextBox 6"/>
+          <p:cNvSpPr txBox="1"/>
+          <p:nvPr/>
+        </p:nvSpPr>
+        <p:spPr>
+          <a:xfrm>
+            <a:off x="1234440" y="1536192"/>
+            <a:ext cx="9601200" cy="320040"/>
+          </a:xfrm>
+          <a:prstGeom prst="rect">
+            <a:avLst/>
+          </a:prstGeom>
+          <a:noFill/>
+        </p:spPr>
+        <p:txBody>
+          <a:bodyPr wrap="square">
+            <a:spAutoFit/>
+          </a:bodyPr>
+          <a:lstStyle/>
+          <a:p>
+            <a:pPr algn="l">
+              <a:defRPr sz="1300" b="1">
+                <a:solidFill>
+                  <a:srgbClr val="0B2F4B"/>
+                </a:solidFill>
+                <a:latin typeface="Aptos Display"/>
+              </a:defRPr>
+            </a:pPr>
+            <a:r>
+              <a:t>Miért melegszik a laza kötés?</a:t>
+            </a:r>
+          </a:p>
+        </p:txBody>
+      </p:sp>
+      <p:sp>
+        <p:nvSpPr>
+          <p:cNvPr id="8" name="Rounded Rectangle 7"/>
+          <p:cNvSpPr/>
+          <p:nvPr/>
+        </p:nvSpPr>
+        <p:spPr>
+          <a:xfrm>
+            <a:off x="914400" y="2377439"/>
+            <a:ext cx="10241280" cy="749808"/>
+          </a:xfrm>
+          <a:prstGeom prst="roundRect">
+            <a:avLst/>
+          </a:prstGeom>
+          <a:solidFill>
+            <a:srgbClr val="FFFFFF"/>
+          </a:solidFill>
+          <a:ln>
+            <a:solidFill>
+              <a:srgbClr val="C9D8E2"/>
+            </a:solidFill>
+          </a:ln>
+        </p:spPr>
+        <p:style>
+          <a:lnRef idx="1">
+            <a:schemeClr val="accent1"/>
+          </a:lnRef>
+          <a:fillRef idx="3">
+            <a:schemeClr val="accent1"/>
+          </a:fillRef>
+          <a:effectRef idx="2">
+            <a:schemeClr val="accent1"/>
+          </a:effectRef>
+          <a:fontRef idx="minor">
+            <a:schemeClr val="lt1"/>
+          </a:fontRef>
+        </p:style>
+        <p:txBody>
+          <a:bodyPr rtlCol="0" anchor="ctr"/>
+          <a:lstStyle/>
+          <a:p>
+            <a:pPr algn="ctr"/>
+          </a:p>
+        </p:txBody>
+      </p:sp>
+      <p:sp>
+        <p:nvSpPr>
+          <p:cNvPr id="9" name="TextBox 8"/>
+          <p:cNvSpPr txBox="1"/>
+          <p:nvPr/>
+        </p:nvSpPr>
+        <p:spPr>
+          <a:xfrm>
+            <a:off x="1234440" y="2587752"/>
+            <a:ext cx="9601200" cy="320040"/>
+          </a:xfrm>
+          <a:prstGeom prst="rect">
+            <a:avLst/>
+          </a:prstGeom>
+          <a:noFill/>
+        </p:spPr>
+        <p:txBody>
+          <a:bodyPr wrap="square">
+            <a:spAutoFit/>
+          </a:bodyPr>
+          <a:lstStyle/>
+          <a:p>
+            <a:pPr algn="l">
+              <a:defRPr sz="1300" b="1">
+                <a:solidFill>
+                  <a:srgbClr val="0B2F4B"/>
+                </a:solidFill>
+                <a:latin typeface="Aptos Display"/>
+              </a:defRPr>
+            </a:pPr>
+            <a:r>
+              <a:t>Miért fontos a blankolási hossz?</a:t>
+            </a:r>
+          </a:p>
+        </p:txBody>
+      </p:sp>
+      <p:sp>
+        <p:nvSpPr>
+          <p:cNvPr id="10" name="Rounded Rectangle 9"/>
+          <p:cNvSpPr/>
+          <p:nvPr/>
+        </p:nvSpPr>
+        <p:spPr>
+          <a:xfrm>
+            <a:off x="914400" y="3429000"/>
+            <a:ext cx="10241280" cy="749808"/>
+          </a:xfrm>
+          <a:prstGeom prst="roundRect">
+            <a:avLst/>
+          </a:prstGeom>
+          <a:solidFill>
+            <a:srgbClr val="FFFFFF"/>
+          </a:solidFill>
+          <a:ln>
+            <a:solidFill>
+              <a:srgbClr val="C9D8E2"/>
+            </a:solidFill>
+          </a:ln>
+        </p:spPr>
+        <p:style>
+          <a:lnRef idx="1">
+            <a:schemeClr val="accent1"/>
+          </a:lnRef>
+          <a:fillRef idx="3">
+            <a:schemeClr val="accent1"/>
+          </a:fillRef>
+          <a:effectRef idx="2">
+            <a:schemeClr val="accent1"/>
+          </a:effectRef>
+          <a:fontRef idx="minor">
+            <a:schemeClr val="lt1"/>
+          </a:fontRef>
+        </p:style>
+        <p:txBody>
+          <a:bodyPr rtlCol="0" anchor="ctr"/>
+          <a:lstStyle/>
+          <a:p>
+            <a:pPr algn="ctr"/>
+          </a:p>
+        </p:txBody>
+      </p:sp>
+      <p:sp>
+        <p:nvSpPr>
+          <p:cNvPr id="11" name="TextBox 10"/>
+          <p:cNvSpPr txBox="1"/>
+          <p:nvPr/>
+        </p:nvSpPr>
+        <p:spPr>
+          <a:xfrm>
+            <a:off x="1234440" y="3639311"/>
+            <a:ext cx="9601200" cy="320040"/>
+          </a:xfrm>
+          <a:prstGeom prst="rect">
+            <a:avLst/>
+          </a:prstGeom>
+          <a:noFill/>
+        </p:spPr>
+        <p:txBody>
+          <a:bodyPr wrap="square">
+            <a:spAutoFit/>
+          </a:bodyPr>
+          <a:lstStyle/>
+          <a:p>
+            <a:pPr algn="l">
+              <a:defRPr sz="1300" b="1">
+                <a:solidFill>
+                  <a:srgbClr val="0B2F4B"/>
+                </a:solidFill>
+                <a:latin typeface="Aptos Display"/>
+              </a:defRPr>
+            </a:pPr>
+            <a:r>
+              <a:t>Mikor kell érvéghüvely?</a:t>
+            </a:r>
+          </a:p>
+        </p:txBody>
+      </p:sp>
+      <p:sp>
+        <p:nvSpPr>
+          <p:cNvPr id="12" name="Rounded Rectangle 11"/>
+          <p:cNvSpPr/>
+          <p:nvPr/>
+        </p:nvSpPr>
+        <p:spPr>
+          <a:xfrm>
+            <a:off x="914400" y="4480559"/>
+            <a:ext cx="10241280" cy="749808"/>
+          </a:xfrm>
+          <a:prstGeom prst="roundRect">
+            <a:avLst/>
+          </a:prstGeom>
+          <a:solidFill>
+            <a:srgbClr val="FFFFFF"/>
+          </a:solidFill>
+          <a:ln>
+            <a:solidFill>
+              <a:srgbClr val="C9D8E2"/>
+            </a:solidFill>
+          </a:ln>
+        </p:spPr>
+        <p:style>
+          <a:lnRef idx="1">
+            <a:schemeClr val="accent1"/>
+          </a:lnRef>
+          <a:fillRef idx="3">
+            <a:schemeClr val="accent1"/>
+          </a:fillRef>
+          <a:effectRef idx="2">
+            <a:schemeClr val="accent1"/>
+          </a:effectRef>
+          <a:fontRef idx="minor">
+            <a:schemeClr val="lt1"/>
+          </a:fontRef>
+        </p:style>
+        <p:txBody>
+          <a:bodyPr rtlCol="0" anchor="ctr"/>
+          <a:lstStyle/>
+          <a:p>
+            <a:pPr algn="ctr"/>
+          </a:p>
+        </p:txBody>
+      </p:sp>
+      <p:sp>
+        <p:nvSpPr>
+          <p:cNvPr id="13" name="TextBox 12"/>
+          <p:cNvSpPr txBox="1"/>
+          <p:nvPr/>
+        </p:nvSpPr>
+        <p:spPr>
+          <a:xfrm>
+            <a:off x="1234440" y="4690872"/>
+            <a:ext cx="9601200" cy="320040"/>
+          </a:xfrm>
+          <a:prstGeom prst="rect">
+            <a:avLst/>
+          </a:prstGeom>
+          <a:noFill/>
+        </p:spPr>
+        <p:txBody>
+          <a:bodyPr wrap="square">
+            <a:spAutoFit/>
+          </a:bodyPr>
+          <a:lstStyle/>
+          <a:p>
+            <a:pPr algn="l">
+              <a:defRPr sz="1300" b="1">
+                <a:solidFill>
+                  <a:srgbClr val="0B2F4B"/>
+                </a:solidFill>
+                <a:latin typeface="Aptos Display"/>
+              </a:defRPr>
+            </a:pPr>
+            <a:r>
+              <a:t>Mit jelent a kész kötés ellenőrzése?</a:t>
+            </a:r>
+          </a:p>
+        </p:txBody>
+      </p:sp>
+    </p:spTree>
+  </p:cSld>
+  <p:clrMapOvr>
+    <a:masterClrMapping/>
+  </p:clrMapOvr>
+</p:sld>
+</file>
+
+<file path=ppt/slides/slide15.xml><?xml version="1.0" encoding="utf-8"?>
+<p:sld xmlns:a="http://schemas.openxmlformats.org/drawingml/2006/main" xmlns:p="http://schemas.openxmlformats.org/presentationml/2006/main" xmlns:r="http://schemas.openxmlformats.org/officeDocument/2006/relationships">
+  <p:cSld>
+    <p:bg>
+      <p:bgPr>
+        <a:solidFill>
+          <a:srgbClr val="0B2F4B"/>
+        </a:solidFill>
+        <a:effectLst/>
+      </p:bgPr>
+    </p:bg>
+    <p:spTree>
+      <p:nvGrpSpPr>
+        <p:cNvPr id="1" name=""/>
+        <p:cNvGrpSpPr/>
+        <p:nvPr/>
+      </p:nvGrpSpPr>
+      <p:grpSpPr/>
+      <p:sp>
+        <p:nvSpPr>
+          <p:cNvPr id="2" name="TextBox 1"/>
+          <p:cNvSpPr txBox="1"/>
+          <p:nvPr/>
+        </p:nvSpPr>
+        <p:spPr>
+          <a:xfrm>
+            <a:off x="411480" y="365760"/>
+            <a:ext cx="2743200" cy="182880"/>
+          </a:xfrm>
+          <a:prstGeom prst="rect">
+            <a:avLst/>
+          </a:prstGeom>
+          <a:noFill/>
+        </p:spPr>
+        <p:txBody>
+          <a:bodyPr wrap="square">
+            <a:spAutoFit/>
+          </a:bodyPr>
+          <a:lstStyle/>
+          <a:p>
+            <a:pPr algn="l">
+              <a:defRPr sz="700" b="1">
+                <a:solidFill>
+                  <a:srgbClr val="128EDA"/>
+                </a:solidFill>
+                <a:latin typeface="Aptos Display"/>
+              </a:defRPr>
+            </a:pPr>
+            <a:r>
+              <a:t>07. HÉT • ZÁRÁS</a:t>
+            </a:r>
+          </a:p>
+        </p:txBody>
+      </p:sp>
+      <p:sp>
+        <p:nvSpPr>
+          <p:cNvPr id="3" name="TextBox 2"/>
+          <p:cNvSpPr txBox="1"/>
+          <p:nvPr/>
+        </p:nvSpPr>
+        <p:spPr>
+          <a:xfrm>
+            <a:off x="411480" y="777240"/>
+            <a:ext cx="4572000" cy="457200"/>
+          </a:xfrm>
+          <a:prstGeom prst="rect">
+            <a:avLst/>
+          </a:prstGeom>
+          <a:noFill/>
+        </p:spPr>
+        <p:txBody>
+          <a:bodyPr wrap="square">
+            <a:spAutoFit/>
+          </a:bodyPr>
+          <a:lstStyle/>
+          <a:p>
+            <a:pPr algn="l">
+              <a:defRPr sz="2300" b="1">
+                <a:solidFill>
+                  <a:srgbClr val="FFFFFF"/>
+                </a:solidFill>
+                <a:latin typeface="Aptos Display"/>
+              </a:defRPr>
+            </a:pPr>
+            <a:r>
+              <a:t>A hét 4 mondata</a:t>
+            </a:r>
+          </a:p>
+        </p:txBody>
+      </p:sp>
+      <p:sp>
+        <p:nvSpPr>
+          <p:cNvPr id="4" name="TextBox 3"/>
+          <p:cNvSpPr txBox="1"/>
+          <p:nvPr/>
+        </p:nvSpPr>
+        <p:spPr>
+          <a:xfrm>
+            <a:off x="640080" y="1600200"/>
+            <a:ext cx="365760" cy="274320"/>
+          </a:xfrm>
+          <a:prstGeom prst="rect">
+            <a:avLst/>
+          </a:prstGeom>
+          <a:noFill/>
+        </p:spPr>
+        <p:txBody>
+          <a:bodyPr wrap="square">
             <a:spAutoFit/>
           </a:bodyPr>
           <a:lstStyle/>
           <a:p>
             <a:pPr algn="ctr">
-              <a:defRPr sz="3400" b="1">
+              <a:defRPr sz="1100" b="1">
+                <a:solidFill>
+                  <a:srgbClr val="128EDA"/>
+                </a:solidFill>
+                <a:latin typeface="Aptos Display"/>
+              </a:defRPr>
+            </a:pPr>
+            <a:r>
+              <a:t>1</a:t>
+            </a:r>
+          </a:p>
+        </p:txBody>
+      </p:sp>
+      <p:sp>
+        <p:nvSpPr>
+          <p:cNvPr id="5" name="TextBox 4"/>
+          <p:cNvSpPr txBox="1"/>
+          <p:nvPr/>
+        </p:nvSpPr>
+        <p:spPr>
+          <a:xfrm>
+            <a:off x="1188720" y="1554480"/>
+            <a:ext cx="9144000" cy="411480"/>
+          </a:xfrm>
+          <a:prstGeom prst="rect">
+            <a:avLst/>
+          </a:prstGeom>
+          <a:noFill/>
+        </p:spPr>
+        <p:txBody>
+          <a:bodyPr wrap="square">
+            <a:spAutoFit/>
+          </a:bodyPr>
+          <a:lstStyle/>
+          <a:p>
+            <a:pPr algn="l">
+              <a:defRPr sz="1300" b="1">
                 <a:solidFill>
                   <a:srgbClr val="FFFFFF"/>
                 </a:solidFill>
+                <a:latin typeface="Aptos Display"/>
+              </a:defRPr>
+            </a:pPr>
+            <a:r>
+              <a:t>A jó kötés villamosan és mechanikailag is stabil.</a:t>
+            </a:r>
+          </a:p>
+        </p:txBody>
+      </p:sp>
+      <p:sp>
+        <p:nvSpPr>
+          <p:cNvPr id="6" name="TextBox 5"/>
+          <p:cNvSpPr txBox="1"/>
+          <p:nvPr/>
+        </p:nvSpPr>
+        <p:spPr>
+          <a:xfrm>
+            <a:off x="640080" y="2377440"/>
+            <a:ext cx="365760" cy="274320"/>
+          </a:xfrm>
+          <a:prstGeom prst="rect">
+            <a:avLst/>
+          </a:prstGeom>
+          <a:noFill/>
+        </p:spPr>
+        <p:txBody>
+          <a:bodyPr wrap="square">
+            <a:spAutoFit/>
+          </a:bodyPr>
+          <a:lstStyle/>
+          <a:p>
+            <a:pPr algn="ctr">
+              <a:defRPr sz="1100" b="1">
+                <a:solidFill>
+                  <a:srgbClr val="128EDA"/>
+                </a:solidFill>
+                <a:latin typeface="Aptos Display"/>
+              </a:defRPr>
+            </a:pPr>
+            <a:r>
+              <a:t>2</a:t>
+            </a:r>
+          </a:p>
+        </p:txBody>
+      </p:sp>
+      <p:sp>
+        <p:nvSpPr>
+          <p:cNvPr id="7" name="TextBox 6"/>
+          <p:cNvSpPr txBox="1"/>
+          <p:nvPr/>
+        </p:nvSpPr>
+        <p:spPr>
+          <a:xfrm>
+            <a:off x="1188720" y="2331720"/>
+            <a:ext cx="9144000" cy="411480"/>
+          </a:xfrm>
+          <a:prstGeom prst="rect">
+            <a:avLst/>
+          </a:prstGeom>
+          <a:noFill/>
+        </p:spPr>
+        <p:txBody>
+          <a:bodyPr wrap="square">
+            <a:spAutoFit/>
+          </a:bodyPr>
+          <a:lstStyle/>
+          <a:p>
+            <a:pPr algn="l">
+              <a:defRPr sz="1300" b="1">
+                <a:solidFill>
+                  <a:srgbClr val="FFFFFF"/>
+                </a:solidFill>
+                <a:latin typeface="Aptos Display"/>
+              </a:defRPr>
+            </a:pPr>
+            <a:r>
+              <a:t>A blankolási hossz a kötőelemhez igazodik.</a:t>
+            </a:r>
+          </a:p>
+        </p:txBody>
+      </p:sp>
+      <p:sp>
+        <p:nvSpPr>
+          <p:cNvPr id="8" name="TextBox 7"/>
+          <p:cNvSpPr txBox="1"/>
+          <p:nvPr/>
+        </p:nvSpPr>
+        <p:spPr>
+          <a:xfrm>
+            <a:off x="640080" y="3154680"/>
+            <a:ext cx="365760" cy="274320"/>
+          </a:xfrm>
+          <a:prstGeom prst="rect">
+            <a:avLst/>
+          </a:prstGeom>
+          <a:noFill/>
+        </p:spPr>
+        <p:txBody>
+          <a:bodyPr wrap="square">
+            <a:spAutoFit/>
+          </a:bodyPr>
+          <a:lstStyle/>
+          <a:p>
+            <a:pPr algn="ctr">
+              <a:defRPr sz="1100" b="1">
+                <a:solidFill>
+                  <a:srgbClr val="128EDA"/>
+                </a:solidFill>
+                <a:latin typeface="Aptos Display"/>
+              </a:defRPr>
+            </a:pPr>
+            <a:r>
+              <a:t>3</a:t>
+            </a:r>
+          </a:p>
+        </p:txBody>
+      </p:sp>
+      <p:sp>
+        <p:nvSpPr>
+          <p:cNvPr id="9" name="TextBox 8"/>
+          <p:cNvSpPr txBox="1"/>
+          <p:nvPr/>
+        </p:nvSpPr>
+        <p:spPr>
+          <a:xfrm>
+            <a:off x="1188720" y="3108960"/>
+            <a:ext cx="9144000" cy="411480"/>
+          </a:xfrm>
+          <a:prstGeom prst="rect">
+            <a:avLst/>
+          </a:prstGeom>
+          <a:noFill/>
+        </p:spPr>
+        <p:txBody>
+          <a:bodyPr wrap="square">
+            <a:spAutoFit/>
+          </a:bodyPr>
+          <a:lstStyle/>
+          <a:p>
+            <a:pPr algn="l">
+              <a:defRPr sz="1300" b="1">
+                <a:solidFill>
+                  <a:srgbClr val="FFFFFF"/>
+                </a:solidFill>
+                <a:latin typeface="Aptos Display"/>
+              </a:defRPr>
+            </a:pPr>
+            <a:r>
+              <a:t>A sodrott vezető elemi szálait rendezetten kell befogni.</a:t>
+            </a:r>
+          </a:p>
+        </p:txBody>
+      </p:sp>
+      <p:sp>
+        <p:nvSpPr>
+          <p:cNvPr id="10" name="TextBox 9"/>
+          <p:cNvSpPr txBox="1"/>
+          <p:nvPr/>
+        </p:nvSpPr>
+        <p:spPr>
+          <a:xfrm>
+            <a:off x="640080" y="3931920"/>
+            <a:ext cx="365760" cy="274320"/>
+          </a:xfrm>
+          <a:prstGeom prst="rect">
+            <a:avLst/>
+          </a:prstGeom>
+          <a:noFill/>
+        </p:spPr>
+        <p:txBody>
+          <a:bodyPr wrap="square">
+            <a:spAutoFit/>
+          </a:bodyPr>
+          <a:lstStyle/>
+          <a:p>
+            <a:pPr algn="ctr">
+              <a:defRPr sz="1100" b="1">
+                <a:solidFill>
+                  <a:srgbClr val="128EDA"/>
+                </a:solidFill>
+                <a:latin typeface="Aptos Display"/>
+              </a:defRPr>
+            </a:pPr>
+            <a:r>
+              <a:t>4</a:t>
+            </a:r>
+          </a:p>
+        </p:txBody>
+      </p:sp>
+      <p:sp>
+        <p:nvSpPr>
+          <p:cNvPr id="11" name="TextBox 10"/>
+          <p:cNvSpPr txBox="1"/>
+          <p:nvPr/>
+        </p:nvSpPr>
+        <p:spPr>
+          <a:xfrm>
+            <a:off x="1188720" y="3886200"/>
+            <a:ext cx="9144000" cy="411480"/>
+          </a:xfrm>
+          <a:prstGeom prst="rect">
+            <a:avLst/>
+          </a:prstGeom>
+          <a:noFill/>
+        </p:spPr>
+        <p:txBody>
+          <a:bodyPr wrap="square">
+            <a:spAutoFit/>
+          </a:bodyPr>
+          <a:lstStyle/>
+          <a:p>
+            <a:pPr algn="l">
+              <a:defRPr sz="1300" b="1">
+                <a:solidFill>
+                  <a:srgbClr val="FFFFFF"/>
+                </a:solidFill>
+                <a:latin typeface="Aptos Display"/>
+              </a:defRPr>
+            </a:pPr>
+            <a:r>
+              <a:t>A kész kötést mindig ellenőrizzük.</a:t>
+            </a:r>
+          </a:p>
+        </p:txBody>
+      </p:sp>
+      <p:sp>
+        <p:nvSpPr>
+          <p:cNvPr id="12" name="TextBox 11"/>
+          <p:cNvSpPr txBox="1"/>
+          <p:nvPr/>
+        </p:nvSpPr>
+        <p:spPr>
+          <a:xfrm>
+            <a:off x="640080" y="5806440"/>
+            <a:ext cx="10515600" cy="365760"/>
+          </a:xfrm>
+          <a:prstGeom prst="rect">
+            <a:avLst/>
+          </a:prstGeom>
+          <a:noFill/>
+        </p:spPr>
+        <p:txBody>
+          <a:bodyPr wrap="square">
+            <a:spAutoFit/>
+          </a:bodyPr>
+          <a:lstStyle/>
+          <a:p>
+            <a:pPr algn="l">
+              <a:defRPr sz="800" b="0">
+                <a:solidFill>
+                  <a:srgbClr val="BBD3E2"/>
+                </a:solidFill>
                 <a:latin typeface="Aptos"/>
               </a:defRPr>
             </a:pPr>
             <a:r>
-              <a:t>FREKVENCIAÁTVITEL</a:t>
-            </a:r>
-          </a:p>
-        </p:txBody>
-      </p:sp>
-      <p:sp>
-        <p:nvSpPr>
-          <p:cNvPr id="4" name="TextBox 3"/>
-          <p:cNvSpPr txBox="1"/>
-          <p:nvPr/>
-        </p:nvSpPr>
-        <p:spPr>
-          <a:xfrm>
-            <a:off x="914400" y="2971800"/>
-            <a:ext cx="10332720" cy="548640"/>
-          </a:xfrm>
-          <a:prstGeom prst="rect">
-            <a:avLst/>
-          </a:prstGeom>
-          <a:noFill/>
-        </p:spPr>
-        <p:txBody>
-          <a:bodyPr wrap="none" anchor="ctr">
-            <a:spAutoFit/>
-          </a:bodyPr>
-          <a:lstStyle/>
-          <a:p>
-            <a:pPr algn="ctr">
-              <a:defRPr sz="2200" b="1">
-                <a:solidFill>
-                  <a:srgbClr val="DE9136"/>
+              <a:t>Következő hét: Kötődobozok, elágazások és egyszerű vezetékkötések kialakítása.</a:t>
+            </a:r>
+          </a:p>
+        </p:txBody>
+      </p:sp>
+      <p:sp>
+        <p:nvSpPr>
+          <p:cNvPr id="13" name="TextBox 12"/>
+          <p:cNvSpPr txBox="1"/>
+          <p:nvPr/>
+        </p:nvSpPr>
+        <p:spPr>
+          <a:xfrm>
+            <a:off x="411480" y="6473952"/>
+            <a:ext cx="7315200" cy="164592"/>
+          </a:xfrm>
+          <a:prstGeom prst="rect">
+            <a:avLst/>
+          </a:prstGeom>
+          <a:noFill/>
+        </p:spPr>
+        <p:txBody>
+          <a:bodyPr wrap="square">
+            <a:spAutoFit/>
+          </a:bodyPr>
+          <a:lstStyle/>
+          <a:p>
+            <a:pPr algn="l">
+              <a:defRPr sz="600" b="0">
+                <a:solidFill>
+                  <a:srgbClr val="BBD3E2"/>
                 </a:solidFill>
                 <a:latin typeface="Aptos"/>
               </a:defRPr>
             </a:pPr>
             <a:r>
-              <a:t>MÉRÉS → SZÁMÍTÁS → BODE-GÖRBE</a:t>
+              <a:t>IAP • 11. évfolyam • Villamos szerelések • 07. hét</a:t>
+            </a:r>
+          </a:p>
+        </p:txBody>
+      </p:sp>
+      <p:sp>
+        <p:nvSpPr>
+          <p:cNvPr id="14" name="TextBox 13"/>
+          <p:cNvSpPr txBox="1"/>
+          <p:nvPr/>
+        </p:nvSpPr>
+        <p:spPr>
+          <a:xfrm>
+            <a:off x="11430000" y="6473952"/>
+            <a:ext cx="274320" cy="182880"/>
+          </a:xfrm>
+          <a:prstGeom prst="rect">
+            <a:avLst/>
+          </a:prstGeom>
+          <a:noFill/>
+        </p:spPr>
+        <p:txBody>
+          <a:bodyPr wrap="square">
+            <a:spAutoFit/>
+          </a:bodyPr>
+          <a:lstStyle/>
+          <a:p>
+            <a:pPr algn="r">
+              <a:defRPr sz="700" b="0">
+                <a:solidFill>
+                  <a:srgbClr val="BBD3E2"/>
+                </a:solidFill>
+                <a:latin typeface="Aptos"/>
+              </a:defRPr>
+            </a:pPr>
+            <a:r>
+              <a:t>16</a:t>
             </a:r>
           </a:p>
         </p:txBody>
@@ -4390,7 +6311,7 @@
     <p:bg>
       <p:bgPr>
         <a:solidFill>
-          <a:srgbClr val="F4F8FB"/>
+          <a:srgbClr val="EEF6FA"/>
         </a:solidFill>
         <a:effectLst/>
       </p:bgPr>
@@ -4410,102 +6331,102 @@
         </p:nvSpPr>
         <p:spPr>
           <a:xfrm>
-            <a:off x="594360" y="292608"/>
-            <a:ext cx="10972800" cy="502920"/>
-          </a:xfrm>
-          <a:prstGeom prst="rect">
-            <a:avLst/>
-          </a:prstGeom>
-          <a:noFill/>
-        </p:spPr>
-        <p:txBody>
-          <a:bodyPr wrap="none" anchor="ctr">
+            <a:off x="411480" y="201168"/>
+            <a:ext cx="3474720" cy="182880"/>
+          </a:xfrm>
+          <a:prstGeom prst="rect">
+            <a:avLst/>
+          </a:prstGeom>
+          <a:noFill/>
+        </p:spPr>
+        <p:txBody>
+          <a:bodyPr wrap="square">
             <a:spAutoFit/>
           </a:bodyPr>
           <a:lstStyle/>
           <a:p>
             <a:pPr algn="l">
-              <a:defRPr sz="2500" b="1">
-                <a:solidFill>
-                  <a:srgbClr val="122D48"/>
+              <a:defRPr sz="700" b="1">
+                <a:solidFill>
+                  <a:srgbClr val="F59722"/>
+                </a:solidFill>
+                <a:latin typeface="Aptos Display"/>
+              </a:defRPr>
+            </a:pPr>
+            <a:r>
+              <a:t>INDÍTÁS</a:t>
+            </a:r>
+          </a:p>
+        </p:txBody>
+      </p:sp>
+      <p:sp>
+        <p:nvSpPr>
+          <p:cNvPr id="3" name="TextBox 2"/>
+          <p:cNvSpPr txBox="1"/>
+          <p:nvPr/>
+        </p:nvSpPr>
+        <p:spPr>
+          <a:xfrm>
+            <a:off x="411480" y="457200"/>
+            <a:ext cx="10972800" cy="457200"/>
+          </a:xfrm>
+          <a:prstGeom prst="rect">
+            <a:avLst/>
+          </a:prstGeom>
+          <a:noFill/>
+        </p:spPr>
+        <p:txBody>
+          <a:bodyPr wrap="square">
+            <a:spAutoFit/>
+          </a:bodyPr>
+          <a:lstStyle/>
+          <a:p>
+            <a:pPr algn="l">
+              <a:defRPr sz="2000" b="1">
+                <a:solidFill>
+                  <a:srgbClr val="0B2F4B"/>
+                </a:solidFill>
+                <a:latin typeface="Aptos Display"/>
+              </a:defRPr>
+            </a:pPr>
+            <a:r>
+              <a:t>Miért kritikus pont a kötés?</a:t>
+            </a:r>
+          </a:p>
+        </p:txBody>
+      </p:sp>
+      <p:sp>
+        <p:nvSpPr>
+          <p:cNvPr id="4" name="TextBox 3"/>
+          <p:cNvSpPr txBox="1"/>
+          <p:nvPr/>
+        </p:nvSpPr>
+        <p:spPr>
+          <a:xfrm>
+            <a:off x="411480" y="6492240"/>
+            <a:ext cx="7315200" cy="164592"/>
+          </a:xfrm>
+          <a:prstGeom prst="rect">
+            <a:avLst/>
+          </a:prstGeom>
+          <a:noFill/>
+        </p:spPr>
+        <p:txBody>
+          <a:bodyPr wrap="square">
+            <a:spAutoFit/>
+          </a:bodyPr>
+          <a:lstStyle/>
+          <a:p>
+            <a:pPr algn="l">
+              <a:defRPr sz="600" b="0">
+                <a:solidFill>
+                  <a:srgbClr val="637988"/>
                 </a:solidFill>
                 <a:latin typeface="Aptos"/>
               </a:defRPr>
             </a:pPr>
             <a:r>
-              <a:t>A hét célja</a:t>
-            </a:r>
-          </a:p>
-        </p:txBody>
-      </p:sp>
-      <p:sp>
-        <p:nvSpPr>
-          <p:cNvPr id="3" name="TextBox 2"/>
-          <p:cNvSpPr txBox="1"/>
-          <p:nvPr/>
-        </p:nvSpPr>
-        <p:spPr>
-          <a:xfrm>
-            <a:off x="621792" y="822960"/>
-            <a:ext cx="10698480" cy="292608"/>
-          </a:xfrm>
-          <a:prstGeom prst="rect">
-            <a:avLst/>
-          </a:prstGeom>
-          <a:noFill/>
-        </p:spPr>
-        <p:txBody>
-          <a:bodyPr wrap="none" anchor="ctr">
-            <a:spAutoFit/>
-          </a:bodyPr>
-          <a:lstStyle/>
-          <a:p>
-            <a:pPr algn="l">
-              <a:defRPr sz="1100" b="0">
-                <a:solidFill>
-                  <a:srgbClr val="637380"/>
-                </a:solidFill>
-                <a:latin typeface="Aptos"/>
-              </a:defRPr>
-            </a:pPr>
-            <a:r>
-              <a:t>Frekvenciaátvitel • Bode-diagram • -3 dB • fL • fH</a:t>
-            </a:r>
-          </a:p>
-        </p:txBody>
-      </p:sp>
-      <p:sp>
-        <p:nvSpPr>
-          <p:cNvPr id="4" name="TextBox 3"/>
-          <p:cNvSpPr txBox="1"/>
-          <p:nvPr/>
-        </p:nvSpPr>
-        <p:spPr>
-          <a:xfrm>
-            <a:off x="594360" y="6446520"/>
-            <a:ext cx="3657600" cy="182880"/>
-          </a:xfrm>
-          <a:prstGeom prst="rect">
-            <a:avLst/>
-          </a:prstGeom>
-          <a:noFill/>
-        </p:spPr>
-        <p:txBody>
-          <a:bodyPr wrap="none" anchor="ctr">
-            <a:spAutoFit/>
-          </a:bodyPr>
-          <a:lstStyle/>
-          <a:p>
-            <a:pPr algn="l">
-              <a:defRPr sz="900" b="1">
-                <a:solidFill>
-                  <a:srgbClr val="122D48"/>
-                </a:solidFill>
-                <a:latin typeface="Aptos"/>
-              </a:defRPr>
-            </a:pPr>
-            <a:r>
-              <a:t>IAP • Analóg áramkörök • 7. hét</a:t>
+              <a:t>IAP • 11. évfolyam • Villamos szerelések • 07. hét</a:t>
             </a:r>
           </a:p>
         </p:txBody>
@@ -4518,24 +6439,24 @@
         </p:nvSpPr>
         <p:spPr>
           <a:xfrm>
-            <a:off x="11155680" y="6428232"/>
-            <a:ext cx="411480" cy="182880"/>
-          </a:xfrm>
-          <a:prstGeom prst="rect">
-            <a:avLst/>
-          </a:prstGeom>
-          <a:noFill/>
-        </p:spPr>
-        <p:txBody>
-          <a:bodyPr wrap="none" anchor="ctr">
+            <a:off x="11430000" y="6473952"/>
+            <a:ext cx="274320" cy="182880"/>
+          </a:xfrm>
+          <a:prstGeom prst="rect">
+            <a:avLst/>
+          </a:prstGeom>
+          <a:noFill/>
+        </p:spPr>
+        <p:txBody>
+          <a:bodyPr wrap="square">
             <a:spAutoFit/>
           </a:bodyPr>
           <a:lstStyle/>
           <a:p>
             <a:pPr algn="r">
-              <a:defRPr sz="900" b="1">
-                <a:solidFill>
-                  <a:srgbClr val="637380"/>
+              <a:defRPr sz="700" b="0">
+                <a:solidFill>
+                  <a:srgbClr val="637988"/>
                 </a:solidFill>
                 <a:latin typeface="Aptos"/>
               </a:defRPr>
@@ -4554,8 +6475,8 @@
         </p:nvSpPr>
         <p:spPr>
           <a:xfrm>
-            <a:off x="658368" y="1508760"/>
-            <a:ext cx="3310128" cy="3154680"/>
+            <a:off x="914400" y="1325880"/>
+            <a:ext cx="10241280" cy="749808"/>
           </a:xfrm>
           <a:prstGeom prst="roundRect">
             <a:avLst/>
@@ -4565,7 +6486,7 @@
           </a:solidFill>
           <a:ln>
             <a:solidFill>
-              <a:srgbClr val="DCE7EF"/>
+              <a:srgbClr val="C9D8E2"/>
             </a:solidFill>
           </a:ln>
         </p:spPr>
@@ -4599,80 +6520,44 @@
         </p:nvSpPr>
         <p:spPr>
           <a:xfrm>
-            <a:off x="822959" y="1645919"/>
-            <a:ext cx="2980944" cy="365760"/>
-          </a:xfrm>
-          <a:prstGeom prst="rect">
-            <a:avLst/>
-          </a:prstGeom>
-          <a:noFill/>
-        </p:spPr>
-        <p:txBody>
-          <a:bodyPr wrap="none" anchor="ctr">
-            <a:spAutoFit/>
-          </a:bodyPr>
-          <a:lstStyle/>
-          <a:p>
-            <a:pPr algn="ctr">
-              <a:defRPr sz="1500" b="1">
-                <a:solidFill>
-                  <a:srgbClr val="2B78B8"/>
-                </a:solidFill>
-                <a:latin typeface="Aptos"/>
-              </a:defRPr>
-            </a:pPr>
-            <a:r>
-              <a:t>FREKVENCIA</a:t>
-            </a:r>
-          </a:p>
-        </p:txBody>
-      </p:sp>
-      <p:sp>
-        <p:nvSpPr>
-          <p:cNvPr id="8" name="TextBox 7"/>
-          <p:cNvSpPr txBox="1"/>
-          <p:nvPr/>
-        </p:nvSpPr>
-        <p:spPr>
-          <a:xfrm>
-            <a:off x="859536" y="2130552"/>
-            <a:ext cx="2907792" cy="2377440"/>
-          </a:xfrm>
-          <a:prstGeom prst="rect">
-            <a:avLst/>
-          </a:prstGeom>
-          <a:noFill/>
-        </p:spPr>
-        <p:txBody>
-          <a:bodyPr wrap="none" anchor="ctr">
-            <a:spAutoFit/>
-          </a:bodyPr>
-          <a:lstStyle/>
-          <a:p>
-            <a:pPr algn="ctr">
-              <a:defRPr sz="1300" b="0">
-                <a:solidFill>
-                  <a:srgbClr val="243441"/>
-                </a:solidFill>
-                <a:latin typeface="Aptos"/>
-              </a:defRPr>
-            </a:pPr>
-            <a:r>
-              <a:t>az erősítés nem állandó</a:t>
-            </a:r>
-          </a:p>
-        </p:txBody>
-      </p:sp>
-      <p:sp>
-        <p:nvSpPr>
-          <p:cNvPr id="9" name="Rounded Rectangle 8"/>
+            <a:off x="1234440" y="1536192"/>
+            <a:ext cx="9601200" cy="320040"/>
+          </a:xfrm>
+          <a:prstGeom prst="rect">
+            <a:avLst/>
+          </a:prstGeom>
+          <a:noFill/>
+        </p:spPr>
+        <p:txBody>
+          <a:bodyPr wrap="square">
+            <a:spAutoFit/>
+          </a:bodyPr>
+          <a:lstStyle/>
+          <a:p>
+            <a:pPr algn="l">
+              <a:defRPr sz="1300" b="1">
+                <a:solidFill>
+                  <a:srgbClr val="0B2F4B"/>
+                </a:solidFill>
+                <a:latin typeface="Aptos Display"/>
+              </a:defRPr>
+            </a:pPr>
+            <a:r>
+              <a:t>A vezeték lehet jó – a rossz kötés mégis hibát okoz.</a:t>
+            </a:r>
+          </a:p>
+        </p:txBody>
+      </p:sp>
+      <p:sp>
+        <p:nvSpPr>
+          <p:cNvPr id="8" name="Rounded Rectangle 7"/>
           <p:cNvSpPr/>
           <p:nvPr/>
         </p:nvSpPr>
         <p:spPr>
           <a:xfrm>
-            <a:off x="4480559" y="1508760"/>
-            <a:ext cx="3310128" cy="3154680"/>
+            <a:off x="914400" y="2377439"/>
+            <a:ext cx="10241280" cy="749808"/>
           </a:xfrm>
           <a:prstGeom prst="roundRect">
             <a:avLst/>
@@ -4682,7 +6567,7 @@
           </a:solidFill>
           <a:ln>
             <a:solidFill>
-              <a:srgbClr val="DCE7EF"/>
+              <a:srgbClr val="C9D8E2"/>
             </a:solidFill>
           </a:ln>
         </p:spPr>
@@ -4710,86 +6595,50 @@
       </p:sp>
       <p:sp>
         <p:nvSpPr>
-          <p:cNvPr id="10" name="TextBox 9"/>
-          <p:cNvSpPr txBox="1"/>
-          <p:nvPr/>
-        </p:nvSpPr>
-        <p:spPr>
-          <a:xfrm>
-            <a:off x="4645151" y="1645919"/>
-            <a:ext cx="2980944" cy="365760"/>
-          </a:xfrm>
-          <a:prstGeom prst="rect">
-            <a:avLst/>
-          </a:prstGeom>
-          <a:noFill/>
-        </p:spPr>
-        <p:txBody>
-          <a:bodyPr wrap="none" anchor="ctr">
-            <a:spAutoFit/>
-          </a:bodyPr>
-          <a:lstStyle/>
-          <a:p>
-            <a:pPr algn="ctr">
-              <a:defRPr sz="1500" b="1">
-                <a:solidFill>
-                  <a:srgbClr val="DE9136"/>
-                </a:solidFill>
-                <a:latin typeface="Aptos"/>
-              </a:defRPr>
-            </a:pPr>
-            <a:r>
-              <a:t>BODE</a:t>
-            </a:r>
-          </a:p>
-        </p:txBody>
-      </p:sp>
-      <p:sp>
-        <p:nvSpPr>
-          <p:cNvPr id="11" name="TextBox 10"/>
-          <p:cNvSpPr txBox="1"/>
-          <p:nvPr/>
-        </p:nvSpPr>
-        <p:spPr>
-          <a:xfrm>
-            <a:off x="4681727" y="2130552"/>
-            <a:ext cx="2907792" cy="2377440"/>
-          </a:xfrm>
-          <a:prstGeom prst="rect">
-            <a:avLst/>
-          </a:prstGeom>
-          <a:noFill/>
-        </p:spPr>
-        <p:txBody>
-          <a:bodyPr wrap="none" anchor="ctr">
-            <a:spAutoFit/>
-          </a:bodyPr>
-          <a:lstStyle/>
-          <a:p>
-            <a:pPr algn="ctr">
-              <a:defRPr sz="1300" b="0">
-                <a:solidFill>
-                  <a:srgbClr val="243441"/>
-                </a:solidFill>
-                <a:latin typeface="Aptos"/>
-              </a:defRPr>
-            </a:pPr>
-            <a:r>
-              <a:t>logaritmikus frekvenciatengely</a:t>
-            </a:r>
-          </a:p>
-        </p:txBody>
-      </p:sp>
-      <p:sp>
-        <p:nvSpPr>
-          <p:cNvPr id="12" name="Rounded Rectangle 11"/>
+          <p:cNvPr id="9" name="TextBox 8"/>
+          <p:cNvSpPr txBox="1"/>
+          <p:nvPr/>
+        </p:nvSpPr>
+        <p:spPr>
+          <a:xfrm>
+            <a:off x="1234440" y="2587752"/>
+            <a:ext cx="9601200" cy="320040"/>
+          </a:xfrm>
+          <a:prstGeom prst="rect">
+            <a:avLst/>
+          </a:prstGeom>
+          <a:noFill/>
+        </p:spPr>
+        <p:txBody>
+          <a:bodyPr wrap="square">
+            <a:spAutoFit/>
+          </a:bodyPr>
+          <a:lstStyle/>
+          <a:p>
+            <a:pPr algn="l">
+              <a:defRPr sz="1300" b="1">
+                <a:solidFill>
+                  <a:srgbClr val="0B2F4B"/>
+                </a:solidFill>
+                <a:latin typeface="Aptos Display"/>
+              </a:defRPr>
+            </a:pPr>
+            <a:r>
+              <a:t>Átmeneti ellenállás → melegedés → üzemzavar.</a:t>
+            </a:r>
+          </a:p>
+        </p:txBody>
+      </p:sp>
+      <p:sp>
+        <p:nvSpPr>
+          <p:cNvPr id="10" name="Rounded Rectangle 9"/>
           <p:cNvSpPr/>
           <p:nvPr/>
         </p:nvSpPr>
         <p:spPr>
           <a:xfrm>
-            <a:off x="8302752" y="1508760"/>
-            <a:ext cx="3310128" cy="3154680"/>
+            <a:off x="914400" y="3429000"/>
+            <a:ext cx="10241280" cy="749808"/>
           </a:xfrm>
           <a:prstGeom prst="roundRect">
             <a:avLst/>
@@ -4799,7 +6648,7 @@
           </a:solidFill>
           <a:ln>
             <a:solidFill>
-              <a:srgbClr val="DCE7EF"/>
+              <a:srgbClr val="C9D8E2"/>
             </a:solidFill>
           </a:ln>
         </p:spPr>
@@ -4827,72 +6676,36 @@
       </p:sp>
       <p:sp>
         <p:nvSpPr>
-          <p:cNvPr id="13" name="TextBox 12"/>
-          <p:cNvSpPr txBox="1"/>
-          <p:nvPr/>
-        </p:nvSpPr>
-        <p:spPr>
-          <a:xfrm>
-            <a:off x="8467344" y="1645919"/>
-            <a:ext cx="2980944" cy="365760"/>
-          </a:xfrm>
-          <a:prstGeom prst="rect">
-            <a:avLst/>
-          </a:prstGeom>
-          <a:noFill/>
-        </p:spPr>
-        <p:txBody>
-          <a:bodyPr wrap="none" anchor="ctr">
-            <a:spAutoFit/>
-          </a:bodyPr>
-          <a:lstStyle/>
-          <a:p>
-            <a:pPr algn="ctr">
-              <a:defRPr sz="1500" b="1">
-                <a:solidFill>
-                  <a:srgbClr val="3F8F68"/>
-                </a:solidFill>
-                <a:latin typeface="Aptos"/>
-              </a:defRPr>
-            </a:pPr>
-            <a:r>
-              <a:t>HATÁROK</a:t>
-            </a:r>
-          </a:p>
-        </p:txBody>
-      </p:sp>
-      <p:sp>
-        <p:nvSpPr>
-          <p:cNvPr id="14" name="TextBox 13"/>
-          <p:cNvSpPr txBox="1"/>
-          <p:nvPr/>
-        </p:nvSpPr>
-        <p:spPr>
-          <a:xfrm>
-            <a:off x="8503920" y="2130552"/>
-            <a:ext cx="2907792" cy="2377440"/>
-          </a:xfrm>
-          <a:prstGeom prst="rect">
-            <a:avLst/>
-          </a:prstGeom>
-          <a:noFill/>
-        </p:spPr>
-        <p:txBody>
-          <a:bodyPr wrap="none" anchor="ctr">
-            <a:spAutoFit/>
-          </a:bodyPr>
-          <a:lstStyle/>
-          <a:p>
-            <a:pPr algn="ctr">
-              <a:defRPr sz="1300" b="0">
-                <a:solidFill>
-                  <a:srgbClr val="243441"/>
-                </a:solidFill>
-                <a:latin typeface="Aptos"/>
-              </a:defRPr>
-            </a:pPr>
-            <a:r>
-              <a:t>fL és fH</a:t>
+          <p:cNvPr id="11" name="TextBox 10"/>
+          <p:cNvSpPr txBox="1"/>
+          <p:nvPr/>
+        </p:nvSpPr>
+        <p:spPr>
+          <a:xfrm>
+            <a:off x="1234440" y="3639311"/>
+            <a:ext cx="9601200" cy="320040"/>
+          </a:xfrm>
+          <a:prstGeom prst="rect">
+            <a:avLst/>
+          </a:prstGeom>
+          <a:noFill/>
+        </p:spPr>
+        <p:txBody>
+          <a:bodyPr wrap="square">
+            <a:spAutoFit/>
+          </a:bodyPr>
+          <a:lstStyle/>
+          <a:p>
+            <a:pPr algn="l">
+              <a:defRPr sz="1300" b="1">
+                <a:solidFill>
+                  <a:srgbClr val="0B2F4B"/>
+                </a:solidFill>
+                <a:latin typeface="Aptos Display"/>
+              </a:defRPr>
+            </a:pPr>
+            <a:r>
+              <a:t>Cél: kis ellenállás + stabil mechanika + érintésvédelem.</a:t>
             </a:r>
           </a:p>
         </p:txBody>
@@ -4911,7 +6724,7 @@
     <p:bg>
       <p:bgPr>
         <a:solidFill>
-          <a:srgbClr val="F4F8FB"/>
+          <a:srgbClr val="EEF6FA"/>
         </a:solidFill>
         <a:effectLst/>
       </p:bgPr>
@@ -4931,102 +6744,102 @@
         </p:nvSpPr>
         <p:spPr>
           <a:xfrm>
-            <a:off x="594360" y="292608"/>
-            <a:ext cx="10972800" cy="502920"/>
-          </a:xfrm>
-          <a:prstGeom prst="rect">
-            <a:avLst/>
-          </a:prstGeom>
-          <a:noFill/>
-        </p:spPr>
-        <p:txBody>
-          <a:bodyPr wrap="none" anchor="ctr">
+            <a:off x="411480" y="201168"/>
+            <a:ext cx="3474720" cy="182880"/>
+          </a:xfrm>
+          <a:prstGeom prst="rect">
+            <a:avLst/>
+          </a:prstGeom>
+          <a:noFill/>
+        </p:spPr>
+        <p:txBody>
+          <a:bodyPr wrap="square">
             <a:spAutoFit/>
           </a:bodyPr>
           <a:lstStyle/>
           <a:p>
             <a:pPr algn="l">
-              <a:defRPr sz="2500" b="1">
-                <a:solidFill>
-                  <a:srgbClr val="122D48"/>
+              <a:defRPr sz="700" b="1">
+                <a:solidFill>
+                  <a:srgbClr val="F59722"/>
+                </a:solidFill>
+                <a:latin typeface="Aptos Display"/>
+              </a:defRPr>
+            </a:pPr>
+            <a:r>
+              <a:t>HETI TÉRKÉP</a:t>
+            </a:r>
+          </a:p>
+        </p:txBody>
+      </p:sp>
+      <p:sp>
+        <p:nvSpPr>
+          <p:cNvPr id="3" name="TextBox 2"/>
+          <p:cNvSpPr txBox="1"/>
+          <p:nvPr/>
+        </p:nvSpPr>
+        <p:spPr>
+          <a:xfrm>
+            <a:off x="411480" y="457200"/>
+            <a:ext cx="10972800" cy="457200"/>
+          </a:xfrm>
+          <a:prstGeom prst="rect">
+            <a:avLst/>
+          </a:prstGeom>
+          <a:noFill/>
+        </p:spPr>
+        <p:txBody>
+          <a:bodyPr wrap="square">
+            <a:spAutoFit/>
+          </a:bodyPr>
+          <a:lstStyle/>
+          <a:p>
+            <a:pPr algn="l">
+              <a:defRPr sz="2000" b="1">
+                <a:solidFill>
+                  <a:srgbClr val="0B2F4B"/>
+                </a:solidFill>
+                <a:latin typeface="Aptos Display"/>
+              </a:defRPr>
+            </a:pPr>
+            <a:r>
+              <a:t>A hét 3 tanórája</a:t>
+            </a:r>
+          </a:p>
+        </p:txBody>
+      </p:sp>
+      <p:sp>
+        <p:nvSpPr>
+          <p:cNvPr id="4" name="TextBox 3"/>
+          <p:cNvSpPr txBox="1"/>
+          <p:nvPr/>
+        </p:nvSpPr>
+        <p:spPr>
+          <a:xfrm>
+            <a:off x="411480" y="6492240"/>
+            <a:ext cx="7315200" cy="164592"/>
+          </a:xfrm>
+          <a:prstGeom prst="rect">
+            <a:avLst/>
+          </a:prstGeom>
+          <a:noFill/>
+        </p:spPr>
+        <p:txBody>
+          <a:bodyPr wrap="square">
+            <a:spAutoFit/>
+          </a:bodyPr>
+          <a:lstStyle/>
+          <a:p>
+            <a:pPr algn="l">
+              <a:defRPr sz="600" b="0">
+                <a:solidFill>
+                  <a:srgbClr val="637988"/>
                 </a:solidFill>
                 <a:latin typeface="Aptos"/>
               </a:defRPr>
             </a:pPr>
             <a:r>
-              <a:t>Az erősítés frekvenciafüggése</a:t>
-            </a:r>
-          </a:p>
-        </p:txBody>
-      </p:sp>
-      <p:sp>
-        <p:nvSpPr>
-          <p:cNvPr id="3" name="TextBox 2"/>
-          <p:cNvSpPr txBox="1"/>
-          <p:nvPr/>
-        </p:nvSpPr>
-        <p:spPr>
-          <a:xfrm>
-            <a:off x="621792" y="822960"/>
-            <a:ext cx="10698480" cy="292608"/>
-          </a:xfrm>
-          <a:prstGeom prst="rect">
-            <a:avLst/>
-          </a:prstGeom>
-          <a:noFill/>
-        </p:spPr>
-        <p:txBody>
-          <a:bodyPr wrap="none" anchor="ctr">
-            <a:spAutoFit/>
-          </a:bodyPr>
-          <a:lstStyle/>
-          <a:p>
-            <a:pPr algn="l">
-              <a:defRPr sz="1100" b="0">
-                <a:solidFill>
-                  <a:srgbClr val="637380"/>
-                </a:solidFill>
-                <a:latin typeface="Aptos"/>
-              </a:defRPr>
-            </a:pPr>
-            <a:r>
-              <a:t>A valós erősítőnél az aktív elemek és kondenzátorok is számítanak.</a:t>
-            </a:r>
-          </a:p>
-        </p:txBody>
-      </p:sp>
-      <p:sp>
-        <p:nvSpPr>
-          <p:cNvPr id="4" name="TextBox 3"/>
-          <p:cNvSpPr txBox="1"/>
-          <p:nvPr/>
-        </p:nvSpPr>
-        <p:spPr>
-          <a:xfrm>
-            <a:off x="594360" y="6446520"/>
-            <a:ext cx="3657600" cy="182880"/>
-          </a:xfrm>
-          <a:prstGeom prst="rect">
-            <a:avLst/>
-          </a:prstGeom>
-          <a:noFill/>
-        </p:spPr>
-        <p:txBody>
-          <a:bodyPr wrap="none" anchor="ctr">
-            <a:spAutoFit/>
-          </a:bodyPr>
-          <a:lstStyle/>
-          <a:p>
-            <a:pPr algn="l">
-              <a:defRPr sz="900" b="1">
-                <a:solidFill>
-                  <a:srgbClr val="122D48"/>
-                </a:solidFill>
-                <a:latin typeface="Aptos"/>
-              </a:defRPr>
-            </a:pPr>
-            <a:r>
-              <a:t>IAP • Analóg áramkörök • 7. hét</a:t>
+              <a:t>IAP • 11. évfolyam • Villamos szerelések • 07. hét</a:t>
             </a:r>
           </a:p>
         </p:txBody>
@@ -5039,24 +6852,24 @@
         </p:nvSpPr>
         <p:spPr>
           <a:xfrm>
-            <a:off x="11155680" y="6428232"/>
-            <a:ext cx="411480" cy="182880"/>
-          </a:xfrm>
-          <a:prstGeom prst="rect">
-            <a:avLst/>
-          </a:prstGeom>
-          <a:noFill/>
-        </p:spPr>
-        <p:txBody>
-          <a:bodyPr wrap="none" anchor="ctr">
+            <a:off x="11430000" y="6473952"/>
+            <a:ext cx="274320" cy="182880"/>
+          </a:xfrm>
+          <a:prstGeom prst="rect">
+            <a:avLst/>
+          </a:prstGeom>
+          <a:noFill/>
+        </p:spPr>
+        <p:txBody>
+          <a:bodyPr wrap="square">
             <a:spAutoFit/>
           </a:bodyPr>
           <a:lstStyle/>
           <a:p>
             <a:pPr algn="r">
-              <a:defRPr sz="900" b="1">
-                <a:solidFill>
-                  <a:srgbClr val="637380"/>
+              <a:defRPr sz="700" b="0">
+                <a:solidFill>
+                  <a:srgbClr val="637988"/>
                 </a:solidFill>
                 <a:latin typeface="Aptos"/>
               </a:defRPr>
@@ -5075,8 +6888,8 @@
         </p:nvSpPr>
         <p:spPr>
           <a:xfrm>
-            <a:off x="658368" y="1508760"/>
-            <a:ext cx="3310128" cy="3154680"/>
+            <a:off x="914400" y="1325880"/>
+            <a:ext cx="10241280" cy="749808"/>
           </a:xfrm>
           <a:prstGeom prst="roundRect">
             <a:avLst/>
@@ -5086,7 +6899,7 @@
           </a:solidFill>
           <a:ln>
             <a:solidFill>
-              <a:srgbClr val="DCE7EF"/>
+              <a:srgbClr val="C9D8E2"/>
             </a:solidFill>
           </a:ln>
         </p:spPr>
@@ -5120,80 +6933,44 @@
         </p:nvSpPr>
         <p:spPr>
           <a:xfrm>
-            <a:off x="822959" y="1645919"/>
-            <a:ext cx="2980944" cy="365760"/>
-          </a:xfrm>
-          <a:prstGeom prst="rect">
-            <a:avLst/>
-          </a:prstGeom>
-          <a:noFill/>
-        </p:spPr>
-        <p:txBody>
-          <a:bodyPr wrap="none" anchor="ctr">
-            <a:spAutoFit/>
-          </a:bodyPr>
-          <a:lstStyle/>
-          <a:p>
-            <a:pPr algn="ctr">
-              <a:defRPr sz="1500" b="1">
-                <a:solidFill>
-                  <a:srgbClr val="42AAD2"/>
-                </a:solidFill>
-                <a:latin typeface="Aptos"/>
-              </a:defRPr>
-            </a:pPr>
-            <a:r>
-              <a:t>ALACSONY f</a:t>
-            </a:r>
-          </a:p>
-        </p:txBody>
-      </p:sp>
-      <p:sp>
-        <p:nvSpPr>
-          <p:cNvPr id="8" name="TextBox 7"/>
-          <p:cNvSpPr txBox="1"/>
-          <p:nvPr/>
-        </p:nvSpPr>
-        <p:spPr>
-          <a:xfrm>
-            <a:off x="859536" y="2130552"/>
-            <a:ext cx="2907792" cy="2377440"/>
-          </a:xfrm>
-          <a:prstGeom prst="rect">
-            <a:avLst/>
-          </a:prstGeom>
-          <a:noFill/>
-        </p:spPr>
-        <p:txBody>
-          <a:bodyPr wrap="none" anchor="ctr">
-            <a:spAutoFit/>
-          </a:bodyPr>
-          <a:lstStyle/>
-          <a:p>
-            <a:pPr algn="ctr">
-              <a:defRPr sz="1300" b="0">
-                <a:solidFill>
-                  <a:srgbClr val="243441"/>
-                </a:solidFill>
-                <a:latin typeface="Aptos"/>
-              </a:defRPr>
-            </a:pPr>
-            <a:r>
-              <a:t>az erősítés változhat</a:t>
-            </a:r>
-          </a:p>
-        </p:txBody>
-      </p:sp>
-      <p:sp>
-        <p:nvSpPr>
-          <p:cNvPr id="9" name="Rounded Rectangle 8"/>
+            <a:off x="1234440" y="1536192"/>
+            <a:ext cx="9601200" cy="320040"/>
+          </a:xfrm>
+          <a:prstGeom prst="rect">
+            <a:avLst/>
+          </a:prstGeom>
+          <a:noFill/>
+        </p:spPr>
+        <p:txBody>
+          <a:bodyPr wrap="square">
+            <a:spAutoFit/>
+          </a:bodyPr>
+          <a:lstStyle/>
+          <a:p>
+            <a:pPr algn="l">
+              <a:defRPr sz="1300" b="1">
+                <a:solidFill>
+                  <a:srgbClr val="0B2F4B"/>
+                </a:solidFill>
+                <a:latin typeface="Aptos Display"/>
+              </a:defRPr>
+            </a:pPr>
+            <a:r>
+              <a:t>1 • Kötőelemek felismerése</a:t>
+            </a:r>
+          </a:p>
+        </p:txBody>
+      </p:sp>
+      <p:sp>
+        <p:nvSpPr>
+          <p:cNvPr id="8" name="Rounded Rectangle 7"/>
           <p:cNvSpPr/>
           <p:nvPr/>
         </p:nvSpPr>
         <p:spPr>
           <a:xfrm>
-            <a:off x="4480559" y="1508760"/>
-            <a:ext cx="3310128" cy="3154680"/>
+            <a:off x="914400" y="2377439"/>
+            <a:ext cx="10241280" cy="749808"/>
           </a:xfrm>
           <a:prstGeom prst="roundRect">
             <a:avLst/>
@@ -5203,7 +6980,7 @@
           </a:solidFill>
           <a:ln>
             <a:solidFill>
-              <a:srgbClr val="DCE7EF"/>
+              <a:srgbClr val="C9D8E2"/>
             </a:solidFill>
           </a:ln>
         </p:spPr>
@@ -5231,86 +7008,50 @@
       </p:sp>
       <p:sp>
         <p:nvSpPr>
-          <p:cNvPr id="10" name="TextBox 9"/>
-          <p:cNvSpPr txBox="1"/>
-          <p:nvPr/>
-        </p:nvSpPr>
-        <p:spPr>
-          <a:xfrm>
-            <a:off x="4645151" y="1645919"/>
-            <a:ext cx="2980944" cy="365760"/>
-          </a:xfrm>
-          <a:prstGeom prst="rect">
-            <a:avLst/>
-          </a:prstGeom>
-          <a:noFill/>
-        </p:spPr>
-        <p:txBody>
-          <a:bodyPr wrap="none" anchor="ctr">
-            <a:spAutoFit/>
-          </a:bodyPr>
-          <a:lstStyle/>
-          <a:p>
-            <a:pPr algn="ctr">
-              <a:defRPr sz="1500" b="1">
-                <a:solidFill>
-                  <a:srgbClr val="3F8F68"/>
-                </a:solidFill>
-                <a:latin typeface="Aptos"/>
-              </a:defRPr>
-            </a:pPr>
-            <a:r>
-              <a:t>KÖZÉPTARTOMÁNY</a:t>
-            </a:r>
-          </a:p>
-        </p:txBody>
-      </p:sp>
-      <p:sp>
-        <p:nvSpPr>
-          <p:cNvPr id="11" name="TextBox 10"/>
-          <p:cNvSpPr txBox="1"/>
-          <p:nvPr/>
-        </p:nvSpPr>
-        <p:spPr>
-          <a:xfrm>
-            <a:off x="4681727" y="2130552"/>
-            <a:ext cx="2907792" cy="2377440"/>
-          </a:xfrm>
-          <a:prstGeom prst="rect">
-            <a:avLst/>
-          </a:prstGeom>
-          <a:noFill/>
-        </p:spPr>
-        <p:txBody>
-          <a:bodyPr wrap="none" anchor="ctr">
-            <a:spAutoFit/>
-          </a:bodyPr>
-          <a:lstStyle/>
-          <a:p>
-            <a:pPr algn="ctr">
-              <a:defRPr sz="1300" b="0">
-                <a:solidFill>
-                  <a:srgbClr val="243441"/>
-                </a:solidFill>
-                <a:latin typeface="Aptos"/>
-              </a:defRPr>
-            </a:pPr>
-            <a:r>
-              <a:t>közel állandó erősítés</a:t>
-            </a:r>
-          </a:p>
-        </p:txBody>
-      </p:sp>
-      <p:sp>
-        <p:nvSpPr>
-          <p:cNvPr id="12" name="Rounded Rectangle 11"/>
+          <p:cNvPr id="9" name="TextBox 8"/>
+          <p:cNvSpPr txBox="1"/>
+          <p:nvPr/>
+        </p:nvSpPr>
+        <p:spPr>
+          <a:xfrm>
+            <a:off x="1234440" y="2587752"/>
+            <a:ext cx="9601200" cy="320040"/>
+          </a:xfrm>
+          <a:prstGeom prst="rect">
+            <a:avLst/>
+          </a:prstGeom>
+          <a:noFill/>
+        </p:spPr>
+        <p:txBody>
+          <a:bodyPr wrap="square">
+            <a:spAutoFit/>
+          </a:bodyPr>
+          <a:lstStyle/>
+          <a:p>
+            <a:pPr algn="l">
+              <a:defRPr sz="1300" b="1">
+                <a:solidFill>
+                  <a:srgbClr val="0B2F4B"/>
+                </a:solidFill>
+                <a:latin typeface="Aptos Display"/>
+              </a:defRPr>
+            </a:pPr>
+            <a:r>
+              <a:t>2 • Csavaros és rugós kötések</a:t>
+            </a:r>
+          </a:p>
+        </p:txBody>
+      </p:sp>
+      <p:sp>
+        <p:nvSpPr>
+          <p:cNvPr id="10" name="Rounded Rectangle 9"/>
           <p:cNvSpPr/>
           <p:nvPr/>
         </p:nvSpPr>
         <p:spPr>
           <a:xfrm>
-            <a:off x="8302752" y="1508760"/>
-            <a:ext cx="3310128" cy="3154680"/>
+            <a:off x="914400" y="3429000"/>
+            <a:ext cx="10241280" cy="749808"/>
           </a:xfrm>
           <a:prstGeom prst="roundRect">
             <a:avLst/>
@@ -5320,7 +7061,7 @@
           </a:solidFill>
           <a:ln>
             <a:solidFill>
-              <a:srgbClr val="DCE7EF"/>
+              <a:srgbClr val="C9D8E2"/>
             </a:solidFill>
           </a:ln>
         </p:spPr>
@@ -5348,72 +7089,36 @@
       </p:sp>
       <p:sp>
         <p:nvSpPr>
-          <p:cNvPr id="13" name="TextBox 12"/>
-          <p:cNvSpPr txBox="1"/>
-          <p:nvPr/>
-        </p:nvSpPr>
-        <p:spPr>
-          <a:xfrm>
-            <a:off x="8467344" y="1645919"/>
-            <a:ext cx="2980944" cy="365760"/>
-          </a:xfrm>
-          <a:prstGeom prst="rect">
-            <a:avLst/>
-          </a:prstGeom>
-          <a:noFill/>
-        </p:spPr>
-        <p:txBody>
-          <a:bodyPr wrap="none" anchor="ctr">
-            <a:spAutoFit/>
-          </a:bodyPr>
-          <a:lstStyle/>
-          <a:p>
-            <a:pPr algn="ctr">
-              <a:defRPr sz="1500" b="1">
-                <a:solidFill>
-                  <a:srgbClr val="DE9136"/>
-                </a:solidFill>
-                <a:latin typeface="Aptos"/>
-              </a:defRPr>
-            </a:pPr>
-            <a:r>
-              <a:t>MAGAS f</a:t>
-            </a:r>
-          </a:p>
-        </p:txBody>
-      </p:sp>
-      <p:sp>
-        <p:nvSpPr>
-          <p:cNvPr id="14" name="TextBox 13"/>
-          <p:cNvSpPr txBox="1"/>
-          <p:nvPr/>
-        </p:nvSpPr>
-        <p:spPr>
-          <a:xfrm>
-            <a:off x="8503920" y="2130552"/>
-            <a:ext cx="2907792" cy="2377440"/>
-          </a:xfrm>
-          <a:prstGeom prst="rect">
-            <a:avLst/>
-          </a:prstGeom>
-          <a:noFill/>
-        </p:spPr>
-        <p:txBody>
-          <a:bodyPr wrap="none" anchor="ctr">
-            <a:spAutoFit/>
-          </a:bodyPr>
-          <a:lstStyle/>
-          <a:p>
-            <a:pPr algn="ctr">
-              <a:defRPr sz="1300" b="0">
-                <a:solidFill>
-                  <a:srgbClr val="243441"/>
-                </a:solidFill>
-                <a:latin typeface="Aptos"/>
-              </a:defRPr>
-            </a:pPr>
-            <a:r>
-              <a:t>az erősítés változhat</a:t>
+          <p:cNvPr id="11" name="TextBox 10"/>
+          <p:cNvSpPr txBox="1"/>
+          <p:nvPr/>
+        </p:nvSpPr>
+        <p:spPr>
+          <a:xfrm>
+            <a:off x="1234440" y="3639311"/>
+            <a:ext cx="9601200" cy="320040"/>
+          </a:xfrm>
+          <a:prstGeom prst="rect">
+            <a:avLst/>
+          </a:prstGeom>
+          <a:noFill/>
+        </p:spPr>
+        <p:txBody>
+          <a:bodyPr wrap="square">
+            <a:spAutoFit/>
+          </a:bodyPr>
+          <a:lstStyle/>
+          <a:p>
+            <a:pPr algn="l">
+              <a:defRPr sz="1300" b="1">
+                <a:solidFill>
+                  <a:srgbClr val="0B2F4B"/>
+                </a:solidFill>
+                <a:latin typeface="Aptos Display"/>
+              </a:defRPr>
+            </a:pPr>
+            <a:r>
+              <a:t>3 • Gyakorlat és minőségellenőrzés</a:t>
             </a:r>
           </a:p>
         </p:txBody>
@@ -5432,7 +7137,7 @@
     <p:bg>
       <p:bgPr>
         <a:solidFill>
-          <a:srgbClr val="F4F8FB"/>
+          <a:srgbClr val="EEF6FA"/>
         </a:solidFill>
         <a:effectLst/>
       </p:bgPr>
@@ -5452,102 +7157,102 @@
         </p:nvSpPr>
         <p:spPr>
           <a:xfrm>
-            <a:off x="594360" y="292608"/>
-            <a:ext cx="10972800" cy="502920"/>
-          </a:xfrm>
-          <a:prstGeom prst="rect">
-            <a:avLst/>
-          </a:prstGeom>
-          <a:noFill/>
-        </p:spPr>
-        <p:txBody>
-          <a:bodyPr wrap="none" anchor="ctr">
+            <a:off x="411480" y="201168"/>
+            <a:ext cx="3474720" cy="182880"/>
+          </a:xfrm>
+          <a:prstGeom prst="rect">
+            <a:avLst/>
+          </a:prstGeom>
+          <a:noFill/>
+        </p:spPr>
+        <p:txBody>
+          <a:bodyPr wrap="square">
             <a:spAutoFit/>
           </a:bodyPr>
           <a:lstStyle/>
           <a:p>
             <a:pPr algn="l">
-              <a:defRPr sz="2500" b="1">
-                <a:solidFill>
-                  <a:srgbClr val="122D48"/>
+              <a:defRPr sz="700" b="1">
+                <a:solidFill>
+                  <a:srgbClr val="F59722"/>
+                </a:solidFill>
+                <a:latin typeface="Aptos Display"/>
+              </a:defRPr>
+            </a:pPr>
+            <a:r>
+              <a:t>1. TANÓRA</a:t>
+            </a:r>
+          </a:p>
+        </p:txBody>
+      </p:sp>
+      <p:sp>
+        <p:nvSpPr>
+          <p:cNvPr id="3" name="TextBox 2"/>
+          <p:cNvSpPr txBox="1"/>
+          <p:nvPr/>
+        </p:nvSpPr>
+        <p:spPr>
+          <a:xfrm>
+            <a:off x="411480" y="457200"/>
+            <a:ext cx="10972800" cy="457200"/>
+          </a:xfrm>
+          <a:prstGeom prst="rect">
+            <a:avLst/>
+          </a:prstGeom>
+          <a:noFill/>
+        </p:spPr>
+        <p:txBody>
+          <a:bodyPr wrap="square">
+            <a:spAutoFit/>
+          </a:bodyPr>
+          <a:lstStyle/>
+          <a:p>
+            <a:pPr algn="l">
+              <a:defRPr sz="2000" b="1">
+                <a:solidFill>
+                  <a:srgbClr val="0B2F4B"/>
+                </a:solidFill>
+                <a:latin typeface="Aptos Display"/>
+              </a:defRPr>
+            </a:pPr>
+            <a:r>
+              <a:t>Négy gyakori kötőelem</a:t>
+            </a:r>
+          </a:p>
+        </p:txBody>
+      </p:sp>
+      <p:sp>
+        <p:nvSpPr>
+          <p:cNvPr id="4" name="TextBox 3"/>
+          <p:cNvSpPr txBox="1"/>
+          <p:nvPr/>
+        </p:nvSpPr>
+        <p:spPr>
+          <a:xfrm>
+            <a:off x="411480" y="6492240"/>
+            <a:ext cx="7315200" cy="164592"/>
+          </a:xfrm>
+          <a:prstGeom prst="rect">
+            <a:avLst/>
+          </a:prstGeom>
+          <a:noFill/>
+        </p:spPr>
+        <p:txBody>
+          <a:bodyPr wrap="square">
+            <a:spAutoFit/>
+          </a:bodyPr>
+          <a:lstStyle/>
+          <a:p>
+            <a:pPr algn="l">
+              <a:defRPr sz="600" b="0">
+                <a:solidFill>
+                  <a:srgbClr val="637988"/>
                 </a:solidFill>
                 <a:latin typeface="Aptos"/>
               </a:defRPr>
             </a:pPr>
             <a:r>
-              <a:t>Erősítés decibelben</a:t>
-            </a:r>
-          </a:p>
-        </p:txBody>
-      </p:sp>
-      <p:sp>
-        <p:nvSpPr>
-          <p:cNvPr id="3" name="TextBox 2"/>
-          <p:cNvSpPr txBox="1"/>
-          <p:nvPr/>
-        </p:nvSpPr>
-        <p:spPr>
-          <a:xfrm>
-            <a:off x="621792" y="822960"/>
-            <a:ext cx="10698480" cy="292608"/>
-          </a:xfrm>
-          <a:prstGeom prst="rect">
-            <a:avLst/>
-          </a:prstGeom>
-          <a:noFill/>
-        </p:spPr>
-        <p:txBody>
-          <a:bodyPr wrap="none" anchor="ctr">
-            <a:spAutoFit/>
-          </a:bodyPr>
-          <a:lstStyle/>
-          <a:p>
-            <a:pPr algn="l">
-              <a:defRPr sz="1100" b="0">
-                <a:solidFill>
-                  <a:srgbClr val="637380"/>
-                </a:solidFill>
-                <a:latin typeface="Aptos"/>
-              </a:defRPr>
-            </a:pPr>
-            <a:r>
-              <a:t>A forrás képlete a feszültségerősítésre.</a:t>
-            </a:r>
-          </a:p>
-        </p:txBody>
-      </p:sp>
-      <p:sp>
-        <p:nvSpPr>
-          <p:cNvPr id="4" name="TextBox 3"/>
-          <p:cNvSpPr txBox="1"/>
-          <p:nvPr/>
-        </p:nvSpPr>
-        <p:spPr>
-          <a:xfrm>
-            <a:off x="594360" y="6446520"/>
-            <a:ext cx="3657600" cy="182880"/>
-          </a:xfrm>
-          <a:prstGeom prst="rect">
-            <a:avLst/>
-          </a:prstGeom>
-          <a:noFill/>
-        </p:spPr>
-        <p:txBody>
-          <a:bodyPr wrap="none" anchor="ctr">
-            <a:spAutoFit/>
-          </a:bodyPr>
-          <a:lstStyle/>
-          <a:p>
-            <a:pPr algn="l">
-              <a:defRPr sz="900" b="1">
-                <a:solidFill>
-                  <a:srgbClr val="122D48"/>
-                </a:solidFill>
-                <a:latin typeface="Aptos"/>
-              </a:defRPr>
-            </a:pPr>
-            <a:r>
-              <a:t>IAP • Analóg áramkörök • 7. hét</a:t>
+              <a:t>IAP • 11. évfolyam • Villamos szerelések • 07. hét</a:t>
             </a:r>
           </a:p>
         </p:txBody>
@@ -5560,24 +7265,24 @@
         </p:nvSpPr>
         <p:spPr>
           <a:xfrm>
-            <a:off x="11155680" y="6428232"/>
-            <a:ext cx="411480" cy="182880"/>
-          </a:xfrm>
-          <a:prstGeom prst="rect">
-            <a:avLst/>
-          </a:prstGeom>
-          <a:noFill/>
-        </p:spPr>
-        <p:txBody>
-          <a:bodyPr wrap="none" anchor="ctr">
+            <a:off x="11430000" y="6473952"/>
+            <a:ext cx="274320" cy="182880"/>
+          </a:xfrm>
+          <a:prstGeom prst="rect">
+            <a:avLst/>
+          </a:prstGeom>
+          <a:noFill/>
+        </p:spPr>
+        <p:txBody>
+          <a:bodyPr wrap="square">
             <a:spAutoFit/>
           </a:bodyPr>
           <a:lstStyle/>
           <a:p>
             <a:pPr algn="r">
-              <a:defRPr sz="900" b="1">
-                <a:solidFill>
-                  <a:srgbClr val="637380"/>
+              <a:defRPr sz="700" b="0">
+                <a:solidFill>
+                  <a:srgbClr val="637988"/>
                 </a:solidFill>
                 <a:latin typeface="Aptos"/>
               </a:defRPr>
@@ -5596,8 +7301,8 @@
         </p:nvSpPr>
         <p:spPr>
           <a:xfrm>
-            <a:off x="658368" y="1508760"/>
-            <a:ext cx="3310128" cy="3154680"/>
+            <a:off x="914400" y="1325880"/>
+            <a:ext cx="10241280" cy="749808"/>
           </a:xfrm>
           <a:prstGeom prst="roundRect">
             <a:avLst/>
@@ -5607,7 +7312,7 @@
           </a:solidFill>
           <a:ln>
             <a:solidFill>
-              <a:srgbClr val="DCE7EF"/>
+              <a:srgbClr val="C9D8E2"/>
             </a:solidFill>
           </a:ln>
         </p:spPr>
@@ -5641,80 +7346,44 @@
         </p:nvSpPr>
         <p:spPr>
           <a:xfrm>
-            <a:off x="822959" y="1645919"/>
-            <a:ext cx="2980944" cy="365760"/>
-          </a:xfrm>
-          <a:prstGeom prst="rect">
-            <a:avLst/>
-          </a:prstGeom>
-          <a:noFill/>
-        </p:spPr>
-        <p:txBody>
-          <a:bodyPr wrap="none" anchor="ctr">
-            <a:spAutoFit/>
-          </a:bodyPr>
-          <a:lstStyle/>
-          <a:p>
-            <a:pPr algn="ctr">
-              <a:defRPr sz="1500" b="1">
-                <a:solidFill>
-                  <a:srgbClr val="2B78B8"/>
-                </a:solidFill>
-                <a:latin typeface="Aptos"/>
-              </a:defRPr>
-            </a:pPr>
-            <a:r>
-              <a:t>KÉPLET</a:t>
-            </a:r>
-          </a:p>
-        </p:txBody>
-      </p:sp>
-      <p:sp>
-        <p:nvSpPr>
-          <p:cNvPr id="8" name="TextBox 7"/>
-          <p:cNvSpPr txBox="1"/>
-          <p:nvPr/>
-        </p:nvSpPr>
-        <p:spPr>
-          <a:xfrm>
-            <a:off x="859536" y="2130552"/>
-            <a:ext cx="2907792" cy="2377440"/>
-          </a:xfrm>
-          <a:prstGeom prst="rect">
-            <a:avLst/>
-          </a:prstGeom>
-          <a:noFill/>
-        </p:spPr>
-        <p:txBody>
-          <a:bodyPr wrap="none" anchor="ctr">
-            <a:spAutoFit/>
-          </a:bodyPr>
-          <a:lstStyle/>
-          <a:p>
-            <a:pPr algn="ctr">
-              <a:defRPr sz="1300" b="0">
-                <a:solidFill>
-                  <a:srgbClr val="243441"/>
-                </a:solidFill>
-                <a:latin typeface="Aptos"/>
-              </a:defRPr>
-            </a:pPr>
-            <a:r>
-              <a:t>Av(dB) = 20 × log10(Uki/Ube)</a:t>
-            </a:r>
-          </a:p>
-        </p:txBody>
-      </p:sp>
-      <p:sp>
-        <p:nvSpPr>
-          <p:cNvPr id="9" name="Rounded Rectangle 8"/>
+            <a:off x="1234440" y="1536192"/>
+            <a:ext cx="9601200" cy="320040"/>
+          </a:xfrm>
+          <a:prstGeom prst="rect">
+            <a:avLst/>
+          </a:prstGeom>
+          <a:noFill/>
+        </p:spPr>
+        <p:txBody>
+          <a:bodyPr wrap="square">
+            <a:spAutoFit/>
+          </a:bodyPr>
+          <a:lstStyle/>
+          <a:p>
+            <a:pPr algn="l">
+              <a:defRPr sz="1300" b="1">
+                <a:solidFill>
+                  <a:srgbClr val="0B2F4B"/>
+                </a:solidFill>
+                <a:latin typeface="Aptos Display"/>
+              </a:defRPr>
+            </a:pPr>
+            <a:r>
+              <a:t>Csavaros sorkapocs</a:t>
+            </a:r>
+          </a:p>
+        </p:txBody>
+      </p:sp>
+      <p:sp>
+        <p:nvSpPr>
+          <p:cNvPr id="8" name="Rounded Rectangle 7"/>
           <p:cNvSpPr/>
           <p:nvPr/>
         </p:nvSpPr>
         <p:spPr>
           <a:xfrm>
-            <a:off x="4480559" y="1508760"/>
-            <a:ext cx="3310128" cy="3154680"/>
+            <a:off x="914400" y="2377439"/>
+            <a:ext cx="10241280" cy="749808"/>
           </a:xfrm>
           <a:prstGeom prst="roundRect">
             <a:avLst/>
@@ -5724,7 +7393,7 @@
           </a:solidFill>
           <a:ln>
             <a:solidFill>
-              <a:srgbClr val="DCE7EF"/>
+              <a:srgbClr val="C9D8E2"/>
             </a:solidFill>
           </a:ln>
         </p:spPr>
@@ -5752,86 +7421,50 @@
       </p:sp>
       <p:sp>
         <p:nvSpPr>
-          <p:cNvPr id="10" name="TextBox 9"/>
-          <p:cNvSpPr txBox="1"/>
-          <p:nvPr/>
-        </p:nvSpPr>
-        <p:spPr>
-          <a:xfrm>
-            <a:off x="4645151" y="1645919"/>
-            <a:ext cx="2980944" cy="365760"/>
-          </a:xfrm>
-          <a:prstGeom prst="rect">
-            <a:avLst/>
-          </a:prstGeom>
-          <a:noFill/>
-        </p:spPr>
-        <p:txBody>
-          <a:bodyPr wrap="none" anchor="ctr">
-            <a:spAutoFit/>
-          </a:bodyPr>
-          <a:lstStyle/>
-          <a:p>
-            <a:pPr algn="ctr">
-              <a:defRPr sz="1500" b="1">
-                <a:solidFill>
-                  <a:srgbClr val="42AAD2"/>
-                </a:solidFill>
-                <a:latin typeface="Aptos"/>
-              </a:defRPr>
-            </a:pPr>
-            <a:r>
-              <a:t>Ube</a:t>
-            </a:r>
-          </a:p>
-        </p:txBody>
-      </p:sp>
-      <p:sp>
-        <p:nvSpPr>
-          <p:cNvPr id="11" name="TextBox 10"/>
-          <p:cNvSpPr txBox="1"/>
-          <p:nvPr/>
-        </p:nvSpPr>
-        <p:spPr>
-          <a:xfrm>
-            <a:off x="4681727" y="2130552"/>
-            <a:ext cx="2907792" cy="2377440"/>
-          </a:xfrm>
-          <a:prstGeom prst="rect">
-            <a:avLst/>
-          </a:prstGeom>
-          <a:noFill/>
-        </p:spPr>
-        <p:txBody>
-          <a:bodyPr wrap="none" anchor="ctr">
-            <a:spAutoFit/>
-          </a:bodyPr>
-          <a:lstStyle/>
-          <a:p>
-            <a:pPr algn="ctr">
-              <a:defRPr sz="1300" b="0">
-                <a:solidFill>
-                  <a:srgbClr val="243441"/>
-                </a:solidFill>
-                <a:latin typeface="Aptos"/>
-              </a:defRPr>
-            </a:pPr>
-            <a:r>
-              <a:t>bemeneti feszültség</a:t>
-            </a:r>
-          </a:p>
-        </p:txBody>
-      </p:sp>
-      <p:sp>
-        <p:nvSpPr>
-          <p:cNvPr id="12" name="Rounded Rectangle 11"/>
+          <p:cNvPr id="9" name="TextBox 8"/>
+          <p:cNvSpPr txBox="1"/>
+          <p:nvPr/>
+        </p:nvSpPr>
+        <p:spPr>
+          <a:xfrm>
+            <a:off x="1234440" y="2587752"/>
+            <a:ext cx="9601200" cy="320040"/>
+          </a:xfrm>
+          <a:prstGeom prst="rect">
+            <a:avLst/>
+          </a:prstGeom>
+          <a:noFill/>
+        </p:spPr>
+        <p:txBody>
+          <a:bodyPr wrap="square">
+            <a:spAutoFit/>
+          </a:bodyPr>
+          <a:lstStyle/>
+          <a:p>
+            <a:pPr algn="l">
+              <a:defRPr sz="1300" b="1">
+                <a:solidFill>
+                  <a:srgbClr val="0B2F4B"/>
+                </a:solidFill>
+                <a:latin typeface="Aptos Display"/>
+              </a:defRPr>
+            </a:pPr>
+            <a:r>
+              <a:t>Rugós sorkapocs</a:t>
+            </a:r>
+          </a:p>
+        </p:txBody>
+      </p:sp>
+      <p:sp>
+        <p:nvSpPr>
+          <p:cNvPr id="10" name="Rounded Rectangle 9"/>
           <p:cNvSpPr/>
           <p:nvPr/>
         </p:nvSpPr>
         <p:spPr>
           <a:xfrm>
-            <a:off x="8302752" y="1508760"/>
-            <a:ext cx="3310128" cy="3154680"/>
+            <a:off x="914400" y="3429000"/>
+            <a:ext cx="10241280" cy="749808"/>
           </a:xfrm>
           <a:prstGeom prst="roundRect">
             <a:avLst/>
@@ -5841,7 +7474,7 @@
           </a:solidFill>
           <a:ln>
             <a:solidFill>
-              <a:srgbClr val="DCE7EF"/>
+              <a:srgbClr val="C9D8E2"/>
             </a:solidFill>
           </a:ln>
         </p:spPr>
@@ -5869,72 +7502,117 @@
       </p:sp>
       <p:sp>
         <p:nvSpPr>
+          <p:cNvPr id="11" name="TextBox 10"/>
+          <p:cNvSpPr txBox="1"/>
+          <p:nvPr/>
+        </p:nvSpPr>
+        <p:spPr>
+          <a:xfrm>
+            <a:off x="1234440" y="3639311"/>
+            <a:ext cx="9601200" cy="320040"/>
+          </a:xfrm>
+          <a:prstGeom prst="rect">
+            <a:avLst/>
+          </a:prstGeom>
+          <a:noFill/>
+        </p:spPr>
+        <p:txBody>
+          <a:bodyPr wrap="square">
+            <a:spAutoFit/>
+          </a:bodyPr>
+          <a:lstStyle/>
+          <a:p>
+            <a:pPr algn="l">
+              <a:defRPr sz="1300" b="1">
+                <a:solidFill>
+                  <a:srgbClr val="0B2F4B"/>
+                </a:solidFill>
+                <a:latin typeface="Aptos Display"/>
+              </a:defRPr>
+            </a:pPr>
+            <a:r>
+              <a:t>Érvéghüvely</a:t>
+            </a:r>
+          </a:p>
+        </p:txBody>
+      </p:sp>
+      <p:sp>
+        <p:nvSpPr>
+          <p:cNvPr id="12" name="Rounded Rectangle 11"/>
+          <p:cNvSpPr/>
+          <p:nvPr/>
+        </p:nvSpPr>
+        <p:spPr>
+          <a:xfrm>
+            <a:off x="914400" y="4480559"/>
+            <a:ext cx="10241280" cy="749808"/>
+          </a:xfrm>
+          <a:prstGeom prst="roundRect">
+            <a:avLst/>
+          </a:prstGeom>
+          <a:solidFill>
+            <a:srgbClr val="FFFFFF"/>
+          </a:solidFill>
+          <a:ln>
+            <a:solidFill>
+              <a:srgbClr val="C9D8E2"/>
+            </a:solidFill>
+          </a:ln>
+        </p:spPr>
+        <p:style>
+          <a:lnRef idx="1">
+            <a:schemeClr val="accent1"/>
+          </a:lnRef>
+          <a:fillRef idx="3">
+            <a:schemeClr val="accent1"/>
+          </a:fillRef>
+          <a:effectRef idx="2">
+            <a:schemeClr val="accent1"/>
+          </a:effectRef>
+          <a:fontRef idx="minor">
+            <a:schemeClr val="lt1"/>
+          </a:fontRef>
+        </p:style>
+        <p:txBody>
+          <a:bodyPr rtlCol="0" anchor="ctr"/>
+          <a:lstStyle/>
+          <a:p>
+            <a:pPr algn="ctr"/>
+          </a:p>
+        </p:txBody>
+      </p:sp>
+      <p:sp>
+        <p:nvSpPr>
           <p:cNvPr id="13" name="TextBox 12"/>
           <p:cNvSpPr txBox="1"/>
           <p:nvPr/>
         </p:nvSpPr>
         <p:spPr>
           <a:xfrm>
-            <a:off x="8467344" y="1645919"/>
-            <a:ext cx="2980944" cy="365760"/>
-          </a:xfrm>
-          <a:prstGeom prst="rect">
-            <a:avLst/>
-          </a:prstGeom>
-          <a:noFill/>
-        </p:spPr>
-        <p:txBody>
-          <a:bodyPr wrap="none" anchor="ctr">
-            <a:spAutoFit/>
-          </a:bodyPr>
-          <a:lstStyle/>
-          <a:p>
-            <a:pPr algn="ctr">
-              <a:defRPr sz="1500" b="1">
-                <a:solidFill>
-                  <a:srgbClr val="3F8F68"/>
-                </a:solidFill>
-                <a:latin typeface="Aptos"/>
-              </a:defRPr>
-            </a:pPr>
-            <a:r>
-              <a:t>Uki</a:t>
-            </a:r>
-          </a:p>
-        </p:txBody>
-      </p:sp>
-      <p:sp>
-        <p:nvSpPr>
-          <p:cNvPr id="14" name="TextBox 13"/>
-          <p:cNvSpPr txBox="1"/>
-          <p:nvPr/>
-        </p:nvSpPr>
-        <p:spPr>
-          <a:xfrm>
-            <a:off x="8503920" y="2130552"/>
-            <a:ext cx="2907792" cy="2377440"/>
-          </a:xfrm>
-          <a:prstGeom prst="rect">
-            <a:avLst/>
-          </a:prstGeom>
-          <a:noFill/>
-        </p:spPr>
-        <p:txBody>
-          <a:bodyPr wrap="none" anchor="ctr">
-            <a:spAutoFit/>
-          </a:bodyPr>
-          <a:lstStyle/>
-          <a:p>
-            <a:pPr algn="ctr">
-              <a:defRPr sz="1300" b="0">
-                <a:solidFill>
-                  <a:srgbClr val="243441"/>
-                </a:solidFill>
-                <a:latin typeface="Aptos"/>
-              </a:defRPr>
-            </a:pPr>
-            <a:r>
-              <a:t>kimeneti feszültség</a:t>
+            <a:off x="1234440" y="4690872"/>
+            <a:ext cx="9601200" cy="320040"/>
+          </a:xfrm>
+          <a:prstGeom prst="rect">
+            <a:avLst/>
+          </a:prstGeom>
+          <a:noFill/>
+        </p:spPr>
+        <p:txBody>
+          <a:bodyPr wrap="square">
+            <a:spAutoFit/>
+          </a:bodyPr>
+          <a:lstStyle/>
+          <a:p>
+            <a:pPr algn="l">
+              <a:defRPr sz="1300" b="1">
+                <a:solidFill>
+                  <a:srgbClr val="0B2F4B"/>
+                </a:solidFill>
+                <a:latin typeface="Aptos Display"/>
+              </a:defRPr>
+            </a:pPr>
+            <a:r>
+              <a:t>Saru</a:t>
             </a:r>
           </a:p>
         </p:txBody>
@@ -5953,7 +7631,7 @@
     <p:bg>
       <p:bgPr>
         <a:solidFill>
-          <a:srgbClr val="F4F8FB"/>
+          <a:srgbClr val="EEF6FA"/>
         </a:solidFill>
         <a:effectLst/>
       </p:bgPr>
@@ -5973,102 +7651,102 @@
         </p:nvSpPr>
         <p:spPr>
           <a:xfrm>
-            <a:off x="594360" y="292608"/>
-            <a:ext cx="10972800" cy="502920"/>
-          </a:xfrm>
-          <a:prstGeom prst="rect">
-            <a:avLst/>
-          </a:prstGeom>
-          <a:noFill/>
-        </p:spPr>
-        <p:txBody>
-          <a:bodyPr wrap="none" anchor="ctr">
+            <a:off x="411480" y="201168"/>
+            <a:ext cx="3474720" cy="182880"/>
+          </a:xfrm>
+          <a:prstGeom prst="rect">
+            <a:avLst/>
+          </a:prstGeom>
+          <a:noFill/>
+        </p:spPr>
+        <p:txBody>
+          <a:bodyPr wrap="square">
             <a:spAutoFit/>
           </a:bodyPr>
           <a:lstStyle/>
           <a:p>
             <a:pPr algn="l">
-              <a:defRPr sz="2500" b="1">
-                <a:solidFill>
-                  <a:srgbClr val="122D48"/>
+              <a:defRPr sz="700" b="1">
+                <a:solidFill>
+                  <a:srgbClr val="F59722"/>
+                </a:solidFill>
+                <a:latin typeface="Aptos Display"/>
+              </a:defRPr>
+            </a:pPr>
+            <a:r>
+              <a:t>1. TANÓRA</a:t>
+            </a:r>
+          </a:p>
+        </p:txBody>
+      </p:sp>
+      <p:sp>
+        <p:nvSpPr>
+          <p:cNvPr id="3" name="TextBox 2"/>
+          <p:cNvSpPr txBox="1"/>
+          <p:nvPr/>
+        </p:nvSpPr>
+        <p:spPr>
+          <a:xfrm>
+            <a:off x="411480" y="457200"/>
+            <a:ext cx="10972800" cy="457200"/>
+          </a:xfrm>
+          <a:prstGeom prst="rect">
+            <a:avLst/>
+          </a:prstGeom>
+          <a:noFill/>
+        </p:spPr>
+        <p:txBody>
+          <a:bodyPr wrap="square">
+            <a:spAutoFit/>
+          </a:bodyPr>
+          <a:lstStyle/>
+          <a:p>
+            <a:pPr algn="l">
+              <a:defRPr sz="2000" b="1">
+                <a:solidFill>
+                  <a:srgbClr val="0B2F4B"/>
+                </a:solidFill>
+                <a:latin typeface="Aptos Display"/>
+              </a:defRPr>
+            </a:pPr>
+            <a:r>
+              <a:t>A csavaros kötés lényege</a:t>
+            </a:r>
+          </a:p>
+        </p:txBody>
+      </p:sp>
+      <p:sp>
+        <p:nvSpPr>
+          <p:cNvPr id="4" name="TextBox 3"/>
+          <p:cNvSpPr txBox="1"/>
+          <p:nvPr/>
+        </p:nvSpPr>
+        <p:spPr>
+          <a:xfrm>
+            <a:off x="411480" y="6492240"/>
+            <a:ext cx="7315200" cy="164592"/>
+          </a:xfrm>
+          <a:prstGeom prst="rect">
+            <a:avLst/>
+          </a:prstGeom>
+          <a:noFill/>
+        </p:spPr>
+        <p:txBody>
+          <a:bodyPr wrap="square">
+            <a:spAutoFit/>
+          </a:bodyPr>
+          <a:lstStyle/>
+          <a:p>
+            <a:pPr algn="l">
+              <a:defRPr sz="600" b="0">
+                <a:solidFill>
+                  <a:srgbClr val="637988"/>
                 </a:solidFill>
                 <a:latin typeface="Aptos"/>
               </a:defRPr>
             </a:pPr>
             <a:r>
-              <a:t>Bode-diagram</a:t>
-            </a:r>
-          </a:p>
-        </p:txBody>
-      </p:sp>
-      <p:sp>
-        <p:nvSpPr>
-          <p:cNvPr id="3" name="TextBox 2"/>
-          <p:cNvSpPr txBox="1"/>
-          <p:nvPr/>
-        </p:nvSpPr>
-        <p:spPr>
-          <a:xfrm>
-            <a:off x="621792" y="822960"/>
-            <a:ext cx="10698480" cy="292608"/>
-          </a:xfrm>
-          <a:prstGeom prst="rect">
-            <a:avLst/>
-          </a:prstGeom>
-          <a:noFill/>
-        </p:spPr>
-        <p:txBody>
-          <a:bodyPr wrap="none" anchor="ctr">
-            <a:spAutoFit/>
-          </a:bodyPr>
-          <a:lstStyle/>
-          <a:p>
-            <a:pPr algn="l">
-              <a:defRPr sz="1100" b="0">
-                <a:solidFill>
-                  <a:srgbClr val="637380"/>
-                </a:solidFill>
-                <a:latin typeface="Aptos"/>
-              </a:defRPr>
-            </a:pPr>
-            <a:r>
-              <a:t>Erősítés dB-ben, logaritmikus frekvenciatengelyen.</a:t>
-            </a:r>
-          </a:p>
-        </p:txBody>
-      </p:sp>
-      <p:sp>
-        <p:nvSpPr>
-          <p:cNvPr id="4" name="TextBox 3"/>
-          <p:cNvSpPr txBox="1"/>
-          <p:nvPr/>
-        </p:nvSpPr>
-        <p:spPr>
-          <a:xfrm>
-            <a:off x="594360" y="6446520"/>
-            <a:ext cx="3657600" cy="182880"/>
-          </a:xfrm>
-          <a:prstGeom prst="rect">
-            <a:avLst/>
-          </a:prstGeom>
-          <a:noFill/>
-        </p:spPr>
-        <p:txBody>
-          <a:bodyPr wrap="none" anchor="ctr">
-            <a:spAutoFit/>
-          </a:bodyPr>
-          <a:lstStyle/>
-          <a:p>
-            <a:pPr algn="l">
-              <a:defRPr sz="900" b="1">
-                <a:solidFill>
-                  <a:srgbClr val="122D48"/>
-                </a:solidFill>
-                <a:latin typeface="Aptos"/>
-              </a:defRPr>
-            </a:pPr>
-            <a:r>
-              <a:t>IAP • Analóg áramkörök • 7. hét</a:t>
+              <a:t>IAP • 11. évfolyam • Villamos szerelések • 07. hét</a:t>
             </a:r>
           </a:p>
         </p:txBody>
@@ -6081,24 +7759,24 @@
         </p:nvSpPr>
         <p:spPr>
           <a:xfrm>
-            <a:off x="11155680" y="6428232"/>
-            <a:ext cx="411480" cy="182880"/>
-          </a:xfrm>
-          <a:prstGeom prst="rect">
-            <a:avLst/>
-          </a:prstGeom>
-          <a:noFill/>
-        </p:spPr>
-        <p:txBody>
-          <a:bodyPr wrap="none" anchor="ctr">
+            <a:off x="11430000" y="6473952"/>
+            <a:ext cx="274320" cy="182880"/>
+          </a:xfrm>
+          <a:prstGeom prst="rect">
+            <a:avLst/>
+          </a:prstGeom>
+          <a:noFill/>
+        </p:spPr>
+        <p:txBody>
+          <a:bodyPr wrap="square">
             <a:spAutoFit/>
           </a:bodyPr>
           <a:lstStyle/>
           <a:p>
             <a:pPr algn="r">
-              <a:defRPr sz="900" b="1">
-                <a:solidFill>
-                  <a:srgbClr val="637380"/>
+              <a:defRPr sz="700" b="0">
+                <a:solidFill>
+                  <a:srgbClr val="637988"/>
                 </a:solidFill>
                 <a:latin typeface="Aptos"/>
               </a:defRPr>
@@ -6117,8 +7795,8 @@
         </p:nvSpPr>
         <p:spPr>
           <a:xfrm>
-            <a:off x="658368" y="1508760"/>
-            <a:ext cx="3310128" cy="3154680"/>
+            <a:off x="914400" y="1325880"/>
+            <a:ext cx="10241280" cy="749808"/>
           </a:xfrm>
           <a:prstGeom prst="roundRect">
             <a:avLst/>
@@ -6128,7 +7806,7 @@
           </a:solidFill>
           <a:ln>
             <a:solidFill>
-              <a:srgbClr val="DCE7EF"/>
+              <a:srgbClr val="C9D8E2"/>
             </a:solidFill>
           </a:ln>
         </p:spPr>
@@ -6162,80 +7840,44 @@
         </p:nvSpPr>
         <p:spPr>
           <a:xfrm>
-            <a:off x="822959" y="1645919"/>
-            <a:ext cx="2980944" cy="365760"/>
-          </a:xfrm>
-          <a:prstGeom prst="rect">
-            <a:avLst/>
-          </a:prstGeom>
-          <a:noFill/>
-        </p:spPr>
-        <p:txBody>
-          <a:bodyPr wrap="none" anchor="ctr">
-            <a:spAutoFit/>
-          </a:bodyPr>
-          <a:lstStyle/>
-          <a:p>
-            <a:pPr algn="ctr">
-              <a:defRPr sz="1500" b="1">
-                <a:solidFill>
-                  <a:srgbClr val="42AAD2"/>
-                </a:solidFill>
-                <a:latin typeface="Aptos"/>
-              </a:defRPr>
-            </a:pPr>
-            <a:r>
-              <a:t>fL</a:t>
-            </a:r>
-          </a:p>
-        </p:txBody>
-      </p:sp>
-      <p:sp>
-        <p:nvSpPr>
-          <p:cNvPr id="8" name="TextBox 7"/>
-          <p:cNvSpPr txBox="1"/>
-          <p:nvPr/>
-        </p:nvSpPr>
-        <p:spPr>
-          <a:xfrm>
-            <a:off x="859536" y="2130552"/>
-            <a:ext cx="2907792" cy="2377440"/>
-          </a:xfrm>
-          <a:prstGeom prst="rect">
-            <a:avLst/>
-          </a:prstGeom>
-          <a:noFill/>
-        </p:spPr>
-        <p:txBody>
-          <a:bodyPr wrap="none" anchor="ctr">
-            <a:spAutoFit/>
-          </a:bodyPr>
-          <a:lstStyle/>
-          <a:p>
-            <a:pPr algn="ctr">
-              <a:defRPr sz="1300" b="0">
-                <a:solidFill>
-                  <a:srgbClr val="243441"/>
-                </a:solidFill>
-                <a:latin typeface="Aptos"/>
-              </a:defRPr>
-            </a:pPr>
-            <a:r>
-              <a:t>alsó határfrekvencia</a:t>
-            </a:r>
-          </a:p>
-        </p:txBody>
-      </p:sp>
-      <p:sp>
-        <p:nvSpPr>
-          <p:cNvPr id="9" name="Rounded Rectangle 8"/>
+            <a:off x="1234440" y="1536192"/>
+            <a:ext cx="9601200" cy="320040"/>
+          </a:xfrm>
+          <a:prstGeom prst="rect">
+            <a:avLst/>
+          </a:prstGeom>
+          <a:noFill/>
+        </p:spPr>
+        <p:txBody>
+          <a:bodyPr wrap="square">
+            <a:spAutoFit/>
+          </a:bodyPr>
+          <a:lstStyle/>
+          <a:p>
+            <a:pPr algn="l">
+              <a:defRPr sz="1300" b="1">
+                <a:solidFill>
+                  <a:srgbClr val="0B2F4B"/>
+                </a:solidFill>
+                <a:latin typeface="Aptos Display"/>
+              </a:defRPr>
+            </a:pPr>
+            <a:r>
+              <a:t>A vezető teljes felülettel legyen a szorító alatt.</a:t>
+            </a:r>
+          </a:p>
+        </p:txBody>
+      </p:sp>
+      <p:sp>
+        <p:nvSpPr>
+          <p:cNvPr id="8" name="Rounded Rectangle 7"/>
           <p:cNvSpPr/>
           <p:nvPr/>
         </p:nvSpPr>
         <p:spPr>
           <a:xfrm>
-            <a:off x="4480559" y="1508760"/>
-            <a:ext cx="3310128" cy="3154680"/>
+            <a:off x="914400" y="2377439"/>
+            <a:ext cx="10241280" cy="749808"/>
           </a:xfrm>
           <a:prstGeom prst="roundRect">
             <a:avLst/>
@@ -6245,7 +7887,7 @@
           </a:solidFill>
           <a:ln>
             <a:solidFill>
-              <a:srgbClr val="DCE7EF"/>
+              <a:srgbClr val="C9D8E2"/>
             </a:solidFill>
           </a:ln>
         </p:spPr>
@@ -6273,86 +7915,50 @@
       </p:sp>
       <p:sp>
         <p:nvSpPr>
-          <p:cNvPr id="10" name="TextBox 9"/>
-          <p:cNvSpPr txBox="1"/>
-          <p:nvPr/>
-        </p:nvSpPr>
-        <p:spPr>
-          <a:xfrm>
-            <a:off x="4645151" y="1645919"/>
-            <a:ext cx="2980944" cy="365760"/>
-          </a:xfrm>
-          <a:prstGeom prst="rect">
-            <a:avLst/>
-          </a:prstGeom>
-          <a:noFill/>
-        </p:spPr>
-        <p:txBody>
-          <a:bodyPr wrap="none" anchor="ctr">
-            <a:spAutoFit/>
-          </a:bodyPr>
-          <a:lstStyle/>
-          <a:p>
-            <a:pPr algn="ctr">
-              <a:defRPr sz="1500" b="1">
-                <a:solidFill>
-                  <a:srgbClr val="3F8F68"/>
-                </a:solidFill>
-                <a:latin typeface="Aptos"/>
-              </a:defRPr>
-            </a:pPr>
-            <a:r>
-              <a:t>KÖZÉP</a:t>
-            </a:r>
-          </a:p>
-        </p:txBody>
-      </p:sp>
-      <p:sp>
-        <p:nvSpPr>
-          <p:cNvPr id="11" name="TextBox 10"/>
-          <p:cNvSpPr txBox="1"/>
-          <p:nvPr/>
-        </p:nvSpPr>
-        <p:spPr>
-          <a:xfrm>
-            <a:off x="4681727" y="2130552"/>
-            <a:ext cx="2907792" cy="2377440"/>
-          </a:xfrm>
-          <a:prstGeom prst="rect">
-            <a:avLst/>
-          </a:prstGeom>
-          <a:noFill/>
-        </p:spPr>
-        <p:txBody>
-          <a:bodyPr wrap="none" anchor="ctr">
-            <a:spAutoFit/>
-          </a:bodyPr>
-          <a:lstStyle/>
-          <a:p>
-            <a:pPr algn="ctr">
-              <a:defRPr sz="1300" b="0">
-                <a:solidFill>
-                  <a:srgbClr val="243441"/>
-                </a:solidFill>
-                <a:latin typeface="Aptos"/>
-              </a:defRPr>
-            </a:pPr>
-            <a:r>
-              <a:t>hasznos tartomány</a:t>
-            </a:r>
-          </a:p>
-        </p:txBody>
-      </p:sp>
-      <p:sp>
-        <p:nvSpPr>
-          <p:cNvPr id="12" name="Rounded Rectangle 11"/>
+          <p:cNvPr id="9" name="TextBox 8"/>
+          <p:cNvSpPr txBox="1"/>
+          <p:nvPr/>
+        </p:nvSpPr>
+        <p:spPr>
+          <a:xfrm>
+            <a:off x="1234440" y="2587752"/>
+            <a:ext cx="9601200" cy="320040"/>
+          </a:xfrm>
+          <a:prstGeom prst="rect">
+            <a:avLst/>
+          </a:prstGeom>
+          <a:noFill/>
+        </p:spPr>
+        <p:txBody>
+          <a:bodyPr wrap="square">
+            <a:spAutoFit/>
+          </a:bodyPr>
+          <a:lstStyle/>
+          <a:p>
+            <a:pPr algn="l">
+              <a:defRPr sz="1300" b="1">
+                <a:solidFill>
+                  <a:srgbClr val="0B2F4B"/>
+                </a:solidFill>
+                <a:latin typeface="Aptos Display"/>
+              </a:defRPr>
+            </a:pPr>
+            <a:r>
+              <a:t>Laza kötés: melegedés.</a:t>
+            </a:r>
+          </a:p>
+        </p:txBody>
+      </p:sp>
+      <p:sp>
+        <p:nvSpPr>
+          <p:cNvPr id="10" name="Rounded Rectangle 9"/>
           <p:cNvSpPr/>
           <p:nvPr/>
         </p:nvSpPr>
         <p:spPr>
           <a:xfrm>
-            <a:off x="8302752" y="1508760"/>
-            <a:ext cx="3310128" cy="3154680"/>
+            <a:off x="914400" y="3429000"/>
+            <a:ext cx="10241280" cy="749808"/>
           </a:xfrm>
           <a:prstGeom prst="roundRect">
             <a:avLst/>
@@ -6362,7 +7968,7 @@
           </a:solidFill>
           <a:ln>
             <a:solidFill>
-              <a:srgbClr val="DCE7EF"/>
+              <a:srgbClr val="C9D8E2"/>
             </a:solidFill>
           </a:ln>
         </p:spPr>
@@ -6390,72 +7996,36 @@
       </p:sp>
       <p:sp>
         <p:nvSpPr>
-          <p:cNvPr id="13" name="TextBox 12"/>
-          <p:cNvSpPr txBox="1"/>
-          <p:nvPr/>
-        </p:nvSpPr>
-        <p:spPr>
-          <a:xfrm>
-            <a:off x="8467344" y="1645919"/>
-            <a:ext cx="2980944" cy="365760"/>
-          </a:xfrm>
-          <a:prstGeom prst="rect">
-            <a:avLst/>
-          </a:prstGeom>
-          <a:noFill/>
-        </p:spPr>
-        <p:txBody>
-          <a:bodyPr wrap="none" anchor="ctr">
-            <a:spAutoFit/>
-          </a:bodyPr>
-          <a:lstStyle/>
-          <a:p>
-            <a:pPr algn="ctr">
-              <a:defRPr sz="1500" b="1">
-                <a:solidFill>
-                  <a:srgbClr val="DE9136"/>
-                </a:solidFill>
-                <a:latin typeface="Aptos"/>
-              </a:defRPr>
-            </a:pPr>
-            <a:r>
-              <a:t>fH</a:t>
-            </a:r>
-          </a:p>
-        </p:txBody>
-      </p:sp>
-      <p:sp>
-        <p:nvSpPr>
-          <p:cNvPr id="14" name="TextBox 13"/>
-          <p:cNvSpPr txBox="1"/>
-          <p:nvPr/>
-        </p:nvSpPr>
-        <p:spPr>
-          <a:xfrm>
-            <a:off x="8503920" y="2130552"/>
-            <a:ext cx="2907792" cy="2377440"/>
-          </a:xfrm>
-          <a:prstGeom prst="rect">
-            <a:avLst/>
-          </a:prstGeom>
-          <a:noFill/>
-        </p:spPr>
-        <p:txBody>
-          <a:bodyPr wrap="none" anchor="ctr">
-            <a:spAutoFit/>
-          </a:bodyPr>
-          <a:lstStyle/>
-          <a:p>
-            <a:pPr algn="ctr">
-              <a:defRPr sz="1300" b="0">
-                <a:solidFill>
-                  <a:srgbClr val="243441"/>
-                </a:solidFill>
-                <a:latin typeface="Aptos"/>
-              </a:defRPr>
-            </a:pPr>
-            <a:r>
-              <a:t>felső határfrekvencia</a:t>
+          <p:cNvPr id="11" name="TextBox 10"/>
+          <p:cNvSpPr txBox="1"/>
+          <p:nvPr/>
+        </p:nvSpPr>
+        <p:spPr>
+          <a:xfrm>
+            <a:off x="1234440" y="3639311"/>
+            <a:ext cx="9601200" cy="320040"/>
+          </a:xfrm>
+          <a:prstGeom prst="rect">
+            <a:avLst/>
+          </a:prstGeom>
+          <a:noFill/>
+        </p:spPr>
+        <p:txBody>
+          <a:bodyPr wrap="square">
+            <a:spAutoFit/>
+          </a:bodyPr>
+          <a:lstStyle/>
+          <a:p>
+            <a:pPr algn="l">
+              <a:defRPr sz="1300" b="1">
+                <a:solidFill>
+                  <a:srgbClr val="0B2F4B"/>
+                </a:solidFill>
+                <a:latin typeface="Aptos Display"/>
+              </a:defRPr>
+            </a:pPr>
+            <a:r>
+              <a:t>Túlzott meghúzás: vezető- vagy kapocssérülés.</a:t>
             </a:r>
           </a:p>
         </p:txBody>
@@ -6474,7 +8044,7 @@
     <p:bg>
       <p:bgPr>
         <a:solidFill>
-          <a:srgbClr val="F4F8FB"/>
+          <a:srgbClr val="EEF6FA"/>
         </a:solidFill>
         <a:effectLst/>
       </p:bgPr>
@@ -6494,102 +8064,102 @@
         </p:nvSpPr>
         <p:spPr>
           <a:xfrm>
-            <a:off x="594360" y="292608"/>
-            <a:ext cx="10972800" cy="502920"/>
-          </a:xfrm>
-          <a:prstGeom prst="rect">
-            <a:avLst/>
-          </a:prstGeom>
-          <a:noFill/>
-        </p:spPr>
-        <p:txBody>
-          <a:bodyPr wrap="none" anchor="ctr">
+            <a:off x="411480" y="201168"/>
+            <a:ext cx="3474720" cy="182880"/>
+          </a:xfrm>
+          <a:prstGeom prst="rect">
+            <a:avLst/>
+          </a:prstGeom>
+          <a:noFill/>
+        </p:spPr>
+        <p:txBody>
+          <a:bodyPr wrap="square">
             <a:spAutoFit/>
           </a:bodyPr>
           <a:lstStyle/>
           <a:p>
             <a:pPr algn="l">
-              <a:defRPr sz="2500" b="1">
-                <a:solidFill>
-                  <a:srgbClr val="122D48"/>
+              <a:defRPr sz="700" b="1">
+                <a:solidFill>
+                  <a:srgbClr val="F59722"/>
+                </a:solidFill>
+                <a:latin typeface="Aptos Display"/>
+              </a:defRPr>
+            </a:pPr>
+            <a:r>
+              <a:t>1. TANÓRA</a:t>
+            </a:r>
+          </a:p>
+        </p:txBody>
+      </p:sp>
+      <p:sp>
+        <p:nvSpPr>
+          <p:cNvPr id="3" name="TextBox 2"/>
+          <p:cNvSpPr txBox="1"/>
+          <p:nvPr/>
+        </p:nvSpPr>
+        <p:spPr>
+          <a:xfrm>
+            <a:off x="411480" y="457200"/>
+            <a:ext cx="10972800" cy="457200"/>
+          </a:xfrm>
+          <a:prstGeom prst="rect">
+            <a:avLst/>
+          </a:prstGeom>
+          <a:noFill/>
+        </p:spPr>
+        <p:txBody>
+          <a:bodyPr wrap="square">
+            <a:spAutoFit/>
+          </a:bodyPr>
+          <a:lstStyle/>
+          <a:p>
+            <a:pPr algn="l">
+              <a:defRPr sz="2000" b="1">
+                <a:solidFill>
+                  <a:srgbClr val="0B2F4B"/>
+                </a:solidFill>
+                <a:latin typeface="Aptos Display"/>
+              </a:defRPr>
+            </a:pPr>
+            <a:r>
+              <a:t>A rugós kötés lényege</a:t>
+            </a:r>
+          </a:p>
+        </p:txBody>
+      </p:sp>
+      <p:sp>
+        <p:nvSpPr>
+          <p:cNvPr id="4" name="TextBox 3"/>
+          <p:cNvSpPr txBox="1"/>
+          <p:nvPr/>
+        </p:nvSpPr>
+        <p:spPr>
+          <a:xfrm>
+            <a:off x="411480" y="6492240"/>
+            <a:ext cx="7315200" cy="164592"/>
+          </a:xfrm>
+          <a:prstGeom prst="rect">
+            <a:avLst/>
+          </a:prstGeom>
+          <a:noFill/>
+        </p:spPr>
+        <p:txBody>
+          <a:bodyPr wrap="square">
+            <a:spAutoFit/>
+          </a:bodyPr>
+          <a:lstStyle/>
+          <a:p>
+            <a:pPr algn="l">
+              <a:defRPr sz="600" b="0">
+                <a:solidFill>
+                  <a:srgbClr val="637988"/>
                 </a:solidFill>
                 <a:latin typeface="Aptos"/>
               </a:defRPr>
             </a:pPr>
             <a:r>
-              <a:t>-3 dB-es pont</a:t>
-            </a:r>
-          </a:p>
-        </p:txBody>
-      </p:sp>
-      <p:sp>
-        <p:nvSpPr>
-          <p:cNvPr id="3" name="TextBox 2"/>
-          <p:cNvSpPr txBox="1"/>
-          <p:nvPr/>
-        </p:nvSpPr>
-        <p:spPr>
-          <a:xfrm>
-            <a:off x="621792" y="822960"/>
-            <a:ext cx="10698480" cy="292608"/>
-          </a:xfrm>
-          <a:prstGeom prst="rect">
-            <a:avLst/>
-          </a:prstGeom>
-          <a:noFill/>
-        </p:spPr>
-        <p:txBody>
-          <a:bodyPr wrap="none" anchor="ctr">
-            <a:spAutoFit/>
-          </a:bodyPr>
-          <a:lstStyle/>
-          <a:p>
-            <a:pPr algn="l">
-              <a:defRPr sz="1100" b="0">
-                <a:solidFill>
-                  <a:srgbClr val="637380"/>
-                </a:solidFill>
-                <a:latin typeface="Aptos"/>
-              </a:defRPr>
-            </a:pPr>
-            <a:r>
-              <a:t>A határfrekvencia meghatározásának kulcsa.</a:t>
-            </a:r>
-          </a:p>
-        </p:txBody>
-      </p:sp>
-      <p:sp>
-        <p:nvSpPr>
-          <p:cNvPr id="4" name="TextBox 3"/>
-          <p:cNvSpPr txBox="1"/>
-          <p:nvPr/>
-        </p:nvSpPr>
-        <p:spPr>
-          <a:xfrm>
-            <a:off x="594360" y="6446520"/>
-            <a:ext cx="3657600" cy="182880"/>
-          </a:xfrm>
-          <a:prstGeom prst="rect">
-            <a:avLst/>
-          </a:prstGeom>
-          <a:noFill/>
-        </p:spPr>
-        <p:txBody>
-          <a:bodyPr wrap="none" anchor="ctr">
-            <a:spAutoFit/>
-          </a:bodyPr>
-          <a:lstStyle/>
-          <a:p>
-            <a:pPr algn="l">
-              <a:defRPr sz="900" b="1">
-                <a:solidFill>
-                  <a:srgbClr val="122D48"/>
-                </a:solidFill>
-                <a:latin typeface="Aptos"/>
-              </a:defRPr>
-            </a:pPr>
-            <a:r>
-              <a:t>IAP • Analóg áramkörök • 7. hét</a:t>
+              <a:t>IAP • 11. évfolyam • Villamos szerelések • 07. hét</a:t>
             </a:r>
           </a:p>
         </p:txBody>
@@ -6602,24 +8172,24 @@
         </p:nvSpPr>
         <p:spPr>
           <a:xfrm>
-            <a:off x="11155680" y="6428232"/>
-            <a:ext cx="411480" cy="182880"/>
-          </a:xfrm>
-          <a:prstGeom prst="rect">
-            <a:avLst/>
-          </a:prstGeom>
-          <a:noFill/>
-        </p:spPr>
-        <p:txBody>
-          <a:bodyPr wrap="none" anchor="ctr">
+            <a:off x="11430000" y="6473952"/>
+            <a:ext cx="274320" cy="182880"/>
+          </a:xfrm>
+          <a:prstGeom prst="rect">
+            <a:avLst/>
+          </a:prstGeom>
+          <a:noFill/>
+        </p:spPr>
+        <p:txBody>
+          <a:bodyPr wrap="square">
             <a:spAutoFit/>
           </a:bodyPr>
           <a:lstStyle/>
           <a:p>
             <a:pPr algn="r">
-              <a:defRPr sz="900" b="1">
-                <a:solidFill>
-                  <a:srgbClr val="637380"/>
+              <a:defRPr sz="700" b="0">
+                <a:solidFill>
+                  <a:srgbClr val="637988"/>
                 </a:solidFill>
                 <a:latin typeface="Aptos"/>
               </a:defRPr>
@@ -6638,8 +8208,8 @@
         </p:nvSpPr>
         <p:spPr>
           <a:xfrm>
-            <a:off x="658368" y="1508760"/>
-            <a:ext cx="3310128" cy="3154680"/>
+            <a:off x="914400" y="1325880"/>
+            <a:ext cx="10241280" cy="749808"/>
           </a:xfrm>
           <a:prstGeom prst="roundRect">
             <a:avLst/>
@@ -6649,7 +8219,7 @@
           </a:solidFill>
           <a:ln>
             <a:solidFill>
-              <a:srgbClr val="DCE7EF"/>
+              <a:srgbClr val="C9D8E2"/>
             </a:solidFill>
           </a:ln>
         </p:spPr>
@@ -6683,80 +8253,44 @@
         </p:nvSpPr>
         <p:spPr>
           <a:xfrm>
-            <a:off x="822959" y="1645919"/>
-            <a:ext cx="2980944" cy="365760"/>
-          </a:xfrm>
-          <a:prstGeom prst="rect">
-            <a:avLst/>
-          </a:prstGeom>
-          <a:noFill/>
-        </p:spPr>
-        <p:txBody>
-          <a:bodyPr wrap="none" anchor="ctr">
-            <a:spAutoFit/>
-          </a:bodyPr>
-          <a:lstStyle/>
-          <a:p>
-            <a:pPr algn="ctr">
-              <a:defRPr sz="1500" b="1">
-                <a:solidFill>
-                  <a:srgbClr val="2B78B8"/>
-                </a:solidFill>
-                <a:latin typeface="Aptos"/>
-              </a:defRPr>
-            </a:pPr>
-            <a:r>
-              <a:t>ERŐSÍTÉS</a:t>
-            </a:r>
-          </a:p>
-        </p:txBody>
-      </p:sp>
-      <p:sp>
-        <p:nvSpPr>
-          <p:cNvPr id="8" name="TextBox 7"/>
-          <p:cNvSpPr txBox="1"/>
-          <p:nvPr/>
-        </p:nvSpPr>
-        <p:spPr>
-          <a:xfrm>
-            <a:off x="859536" y="2130552"/>
-            <a:ext cx="2907792" cy="2377440"/>
-          </a:xfrm>
-          <a:prstGeom prst="rect">
-            <a:avLst/>
-          </a:prstGeom>
-          <a:noFill/>
-        </p:spPr>
-        <p:txBody>
-          <a:bodyPr wrap="none" anchor="ctr">
-            <a:spAutoFit/>
-          </a:bodyPr>
-          <a:lstStyle/>
-          <a:p>
-            <a:pPr algn="ctr">
-              <a:defRPr sz="1300" b="0">
-                <a:solidFill>
-                  <a:srgbClr val="243441"/>
-                </a:solidFill>
-                <a:latin typeface="Aptos"/>
-              </a:defRPr>
-            </a:pPr>
-            <a:r>
-              <a:t>3 dB-lel kisebb</a:t>
-            </a:r>
-          </a:p>
-        </p:txBody>
-      </p:sp>
-      <p:sp>
-        <p:nvSpPr>
-          <p:cNvPr id="9" name="Rounded Rectangle 8"/>
+            <a:off x="1234440" y="1536192"/>
+            <a:ext cx="9601200" cy="320040"/>
+          </a:xfrm>
+          <a:prstGeom prst="rect">
+            <a:avLst/>
+          </a:prstGeom>
+          <a:noFill/>
+        </p:spPr>
+        <p:txBody>
+          <a:bodyPr wrap="square">
+            <a:spAutoFit/>
+          </a:bodyPr>
+          <a:lstStyle/>
+          <a:p>
+            <a:pPr algn="l">
+              <a:defRPr sz="1300" b="1">
+                <a:solidFill>
+                  <a:srgbClr val="0B2F4B"/>
+                </a:solidFill>
+                <a:latin typeface="Aptos Display"/>
+              </a:defRPr>
+            </a:pPr>
+            <a:r>
+              <a:t>Állandó szorítóerő.</a:t>
+            </a:r>
+          </a:p>
+        </p:txBody>
+      </p:sp>
+      <p:sp>
+        <p:nvSpPr>
+          <p:cNvPr id="8" name="Rounded Rectangle 7"/>
           <p:cNvSpPr/>
           <p:nvPr/>
         </p:nvSpPr>
         <p:spPr>
           <a:xfrm>
-            <a:off x="4480559" y="1508760"/>
-            <a:ext cx="3310128" cy="3154680"/>
+            <a:off x="914400" y="2377439"/>
+            <a:ext cx="10241280" cy="749808"/>
           </a:xfrm>
           <a:prstGeom prst="roundRect">
             <a:avLst/>
@@ -6766,7 +8300,7 @@
           </a:solidFill>
           <a:ln>
             <a:solidFill>
-              <a:srgbClr val="DCE7EF"/>
+              <a:srgbClr val="C9D8E2"/>
             </a:solidFill>
           </a:ln>
         </p:spPr>
@@ -6794,86 +8328,50 @@
       </p:sp>
       <p:sp>
         <p:nvSpPr>
-          <p:cNvPr id="10" name="TextBox 9"/>
-          <p:cNvSpPr txBox="1"/>
-          <p:nvPr/>
-        </p:nvSpPr>
-        <p:spPr>
-          <a:xfrm>
-            <a:off x="4645151" y="1645919"/>
-            <a:ext cx="2980944" cy="365760"/>
-          </a:xfrm>
-          <a:prstGeom prst="rect">
-            <a:avLst/>
-          </a:prstGeom>
-          <a:noFill/>
-        </p:spPr>
-        <p:txBody>
-          <a:bodyPr wrap="none" anchor="ctr">
-            <a:spAutoFit/>
-          </a:bodyPr>
-          <a:lstStyle/>
-          <a:p>
-            <a:pPr algn="ctr">
-              <a:defRPr sz="1500" b="1">
-                <a:solidFill>
-                  <a:srgbClr val="DE9136"/>
-                </a:solidFill>
-                <a:latin typeface="Aptos"/>
-              </a:defRPr>
-            </a:pPr>
-            <a:r>
-              <a:t>FESZÜLTSÉG</a:t>
-            </a:r>
-          </a:p>
-        </p:txBody>
-      </p:sp>
-      <p:sp>
-        <p:nvSpPr>
-          <p:cNvPr id="11" name="TextBox 10"/>
-          <p:cNvSpPr txBox="1"/>
-          <p:nvPr/>
-        </p:nvSpPr>
-        <p:spPr>
-          <a:xfrm>
-            <a:off x="4681727" y="2130552"/>
-            <a:ext cx="2907792" cy="2377440"/>
-          </a:xfrm>
-          <a:prstGeom prst="rect">
-            <a:avLst/>
-          </a:prstGeom>
-          <a:noFill/>
-        </p:spPr>
-        <p:txBody>
-          <a:bodyPr wrap="none" anchor="ctr">
-            <a:spAutoFit/>
-          </a:bodyPr>
-          <a:lstStyle/>
-          <a:p>
-            <a:pPr algn="ctr">
-              <a:defRPr sz="1300" b="0">
-                <a:solidFill>
-                  <a:srgbClr val="243441"/>
-                </a:solidFill>
-                <a:latin typeface="Aptos"/>
-              </a:defRPr>
-            </a:pPr>
-            <a:r>
-              <a:t>Uki = 0,707 × Uki(max)</a:t>
-            </a:r>
-          </a:p>
-        </p:txBody>
-      </p:sp>
-      <p:sp>
-        <p:nvSpPr>
-          <p:cNvPr id="12" name="Rounded Rectangle 11"/>
+          <p:cNvPr id="9" name="TextBox 8"/>
+          <p:cNvSpPr txBox="1"/>
+          <p:nvPr/>
+        </p:nvSpPr>
+        <p:spPr>
+          <a:xfrm>
+            <a:off x="1234440" y="2587752"/>
+            <a:ext cx="9601200" cy="320040"/>
+          </a:xfrm>
+          <a:prstGeom prst="rect">
+            <a:avLst/>
+          </a:prstGeom>
+          <a:noFill/>
+        </p:spPr>
+        <p:txBody>
+          <a:bodyPr wrap="square">
+            <a:spAutoFit/>
+          </a:bodyPr>
+          <a:lstStyle/>
+          <a:p>
+            <a:pPr algn="l">
+              <a:defRPr sz="1300" b="1">
+                <a:solidFill>
+                  <a:srgbClr val="0B2F4B"/>
+                </a:solidFill>
+                <a:latin typeface="Aptos Display"/>
+              </a:defRPr>
+            </a:pPr>
+            <a:r>
+              <a:t>Gyors szerelés.</a:t>
+            </a:r>
+          </a:p>
+        </p:txBody>
+      </p:sp>
+      <p:sp>
+        <p:nvSpPr>
+          <p:cNvPr id="10" name="Rounded Rectangle 9"/>
           <p:cNvSpPr/>
           <p:nvPr/>
         </p:nvSpPr>
         <p:spPr>
           <a:xfrm>
-            <a:off x="8302752" y="1508760"/>
-            <a:ext cx="3310128" cy="3154680"/>
+            <a:off x="914400" y="3429000"/>
+            <a:ext cx="10241280" cy="749808"/>
           </a:xfrm>
           <a:prstGeom prst="roundRect">
             <a:avLst/>
@@ -6883,7 +8381,7 @@
           </a:solidFill>
           <a:ln>
             <a:solidFill>
-              <a:srgbClr val="DCE7EF"/>
+              <a:srgbClr val="C9D8E2"/>
             </a:solidFill>
           </a:ln>
         </p:spPr>
@@ -6911,72 +8409,36 @@
       </p:sp>
       <p:sp>
         <p:nvSpPr>
-          <p:cNvPr id="13" name="TextBox 12"/>
-          <p:cNvSpPr txBox="1"/>
-          <p:nvPr/>
-        </p:nvSpPr>
-        <p:spPr>
-          <a:xfrm>
-            <a:off x="8467344" y="1645919"/>
-            <a:ext cx="2980944" cy="365760"/>
-          </a:xfrm>
-          <a:prstGeom prst="rect">
-            <a:avLst/>
-          </a:prstGeom>
-          <a:noFill/>
-        </p:spPr>
-        <p:txBody>
-          <a:bodyPr wrap="none" anchor="ctr">
-            <a:spAutoFit/>
-          </a:bodyPr>
-          <a:lstStyle/>
-          <a:p>
-            <a:pPr algn="ctr">
-              <a:defRPr sz="1500" b="1">
-                <a:solidFill>
-                  <a:srgbClr val="3F8F68"/>
-                </a:solidFill>
-                <a:latin typeface="Aptos"/>
-              </a:defRPr>
-            </a:pPr>
-            <a:r>
-              <a:t>JELENTÉS</a:t>
-            </a:r>
-          </a:p>
-        </p:txBody>
-      </p:sp>
-      <p:sp>
-        <p:nvSpPr>
-          <p:cNvPr id="14" name="TextBox 13"/>
-          <p:cNvSpPr txBox="1"/>
-          <p:nvPr/>
-        </p:nvSpPr>
-        <p:spPr>
-          <a:xfrm>
-            <a:off x="8503920" y="2130552"/>
-            <a:ext cx="2907792" cy="2377440"/>
-          </a:xfrm>
-          <a:prstGeom prst="rect">
-            <a:avLst/>
-          </a:prstGeom>
-          <a:noFill/>
-        </p:spPr>
-        <p:txBody>
-          <a:bodyPr wrap="none" anchor="ctr">
-            <a:spAutoFit/>
-          </a:bodyPr>
-          <a:lstStyle/>
-          <a:p>
-            <a:pPr algn="ctr">
-              <a:defRPr sz="1300" b="0">
-                <a:solidFill>
-                  <a:srgbClr val="243441"/>
-                </a:solidFill>
-                <a:latin typeface="Aptos"/>
-              </a:defRPr>
-            </a:pPr>
-            <a:r>
-              <a:t>határfrekvencia</a:t>
+          <p:cNvPr id="11" name="TextBox 10"/>
+          <p:cNvSpPr txBox="1"/>
+          <p:nvPr/>
+        </p:nvSpPr>
+        <p:spPr>
+          <a:xfrm>
+            <a:off x="1234440" y="3639311"/>
+            <a:ext cx="9601200" cy="320040"/>
+          </a:xfrm>
+          <a:prstGeom prst="rect">
+            <a:avLst/>
+          </a:prstGeom>
+          <a:noFill/>
+        </p:spPr>
+        <p:txBody>
+          <a:bodyPr wrap="square">
+            <a:spAutoFit/>
+          </a:bodyPr>
+          <a:lstStyle/>
+          <a:p>
+            <a:pPr algn="l">
+              <a:defRPr sz="1300" b="1">
+                <a:solidFill>
+                  <a:srgbClr val="0B2F4B"/>
+                </a:solidFill>
+                <a:latin typeface="Aptos Display"/>
+              </a:defRPr>
+            </a:pPr>
+            <a:r>
+              <a:t>A blankolási hossz pontos betartása kulcsfontosságú.</a:t>
             </a:r>
           </a:p>
         </p:txBody>
@@ -6995,7 +8457,7 @@
     <p:bg>
       <p:bgPr>
         <a:solidFill>
-          <a:srgbClr val="F4F8FB"/>
+          <a:srgbClr val="EEF6FA"/>
         </a:solidFill>
         <a:effectLst/>
       </p:bgPr>
@@ -7015,102 +8477,102 @@
         </p:nvSpPr>
         <p:spPr>
           <a:xfrm>
-            <a:off x="594360" y="292608"/>
-            <a:ext cx="10972800" cy="502920"/>
-          </a:xfrm>
-          <a:prstGeom prst="rect">
-            <a:avLst/>
-          </a:prstGeom>
-          <a:noFill/>
-        </p:spPr>
-        <p:txBody>
-          <a:bodyPr wrap="none" anchor="ctr">
+            <a:off x="411480" y="201168"/>
+            <a:ext cx="3474720" cy="182880"/>
+          </a:xfrm>
+          <a:prstGeom prst="rect">
+            <a:avLst/>
+          </a:prstGeom>
+          <a:noFill/>
+        </p:spPr>
+        <p:txBody>
+          <a:bodyPr wrap="square">
             <a:spAutoFit/>
           </a:bodyPr>
           <a:lstStyle/>
           <a:p>
             <a:pPr algn="l">
-              <a:defRPr sz="2500" b="1">
-                <a:solidFill>
-                  <a:srgbClr val="122D48"/>
+              <a:defRPr sz="700" b="1">
+                <a:solidFill>
+                  <a:srgbClr val="F59722"/>
+                </a:solidFill>
+                <a:latin typeface="Aptos Display"/>
+              </a:defRPr>
+            </a:pPr>
+            <a:r>
+              <a:t>2. TANÓRA</a:t>
+            </a:r>
+          </a:p>
+        </p:txBody>
+      </p:sp>
+      <p:sp>
+        <p:nvSpPr>
+          <p:cNvPr id="3" name="TextBox 2"/>
+          <p:cNvSpPr txBox="1"/>
+          <p:nvPr/>
+        </p:nvSpPr>
+        <p:spPr>
+          <a:xfrm>
+            <a:off x="411480" y="457200"/>
+            <a:ext cx="10972800" cy="457200"/>
+          </a:xfrm>
+          <a:prstGeom prst="rect">
+            <a:avLst/>
+          </a:prstGeom>
+          <a:noFill/>
+        </p:spPr>
+        <p:txBody>
+          <a:bodyPr wrap="square">
+            <a:spAutoFit/>
+          </a:bodyPr>
+          <a:lstStyle/>
+          <a:p>
+            <a:pPr algn="l">
+              <a:defRPr sz="2000" b="1">
+                <a:solidFill>
+                  <a:srgbClr val="0B2F4B"/>
+                </a:solidFill>
+                <a:latin typeface="Aptos Display"/>
+              </a:defRPr>
+            </a:pPr>
+            <a:r>
+              <a:t>Sodrott vezető: rendezetten a kapocsba</a:t>
+            </a:r>
+          </a:p>
+        </p:txBody>
+      </p:sp>
+      <p:sp>
+        <p:nvSpPr>
+          <p:cNvPr id="4" name="TextBox 3"/>
+          <p:cNvSpPr txBox="1"/>
+          <p:nvPr/>
+        </p:nvSpPr>
+        <p:spPr>
+          <a:xfrm>
+            <a:off x="411480" y="6492240"/>
+            <a:ext cx="7315200" cy="164592"/>
+          </a:xfrm>
+          <a:prstGeom prst="rect">
+            <a:avLst/>
+          </a:prstGeom>
+          <a:noFill/>
+        </p:spPr>
+        <p:txBody>
+          <a:bodyPr wrap="square">
+            <a:spAutoFit/>
+          </a:bodyPr>
+          <a:lstStyle/>
+          <a:p>
+            <a:pPr algn="l">
+              <a:defRPr sz="600" b="0">
+                <a:solidFill>
+                  <a:srgbClr val="637988"/>
                 </a:solidFill>
                 <a:latin typeface="Aptos"/>
               </a:defRPr>
             </a:pPr>
             <a:r>
-              <a:t>Kidolgozott példa</a:t>
-            </a:r>
-          </a:p>
-        </p:txBody>
-      </p:sp>
-      <p:sp>
-        <p:nvSpPr>
-          <p:cNvPr id="3" name="TextBox 2"/>
-          <p:cNvSpPr txBox="1"/>
-          <p:nvPr/>
-        </p:nvSpPr>
-        <p:spPr>
-          <a:xfrm>
-            <a:off x="621792" y="822960"/>
-            <a:ext cx="10698480" cy="292608"/>
-          </a:xfrm>
-          <a:prstGeom prst="rect">
-            <a:avLst/>
-          </a:prstGeom>
-          <a:noFill/>
-        </p:spPr>
-        <p:txBody>
-          <a:bodyPr wrap="none" anchor="ctr">
-            <a:spAutoFit/>
-          </a:bodyPr>
-          <a:lstStyle/>
-          <a:p>
-            <a:pPr algn="l">
-              <a:defRPr sz="1100" b="0">
-                <a:solidFill>
-                  <a:srgbClr val="637380"/>
-                </a:solidFill>
-                <a:latin typeface="Aptos"/>
-              </a:defRPr>
-            </a:pPr>
-            <a:r>
-              <a:t>Egy erősítő erősítése 26 dB.</a:t>
-            </a:r>
-          </a:p>
-        </p:txBody>
-      </p:sp>
-      <p:sp>
-        <p:nvSpPr>
-          <p:cNvPr id="4" name="TextBox 3"/>
-          <p:cNvSpPr txBox="1"/>
-          <p:nvPr/>
-        </p:nvSpPr>
-        <p:spPr>
-          <a:xfrm>
-            <a:off x="594360" y="6446520"/>
-            <a:ext cx="3657600" cy="182880"/>
-          </a:xfrm>
-          <a:prstGeom prst="rect">
-            <a:avLst/>
-          </a:prstGeom>
-          <a:noFill/>
-        </p:spPr>
-        <p:txBody>
-          <a:bodyPr wrap="none" anchor="ctr">
-            <a:spAutoFit/>
-          </a:bodyPr>
-          <a:lstStyle/>
-          <a:p>
-            <a:pPr algn="l">
-              <a:defRPr sz="900" b="1">
-                <a:solidFill>
-                  <a:srgbClr val="122D48"/>
-                </a:solidFill>
-                <a:latin typeface="Aptos"/>
-              </a:defRPr>
-            </a:pPr>
-            <a:r>
-              <a:t>IAP • Analóg áramkörök • 7. hét</a:t>
+              <a:t>IAP • 11. évfolyam • Villamos szerelések • 07. hét</a:t>
             </a:r>
           </a:p>
         </p:txBody>
@@ -7123,24 +8585,24 @@
         </p:nvSpPr>
         <p:spPr>
           <a:xfrm>
-            <a:off x="11155680" y="6428232"/>
-            <a:ext cx="411480" cy="182880"/>
-          </a:xfrm>
-          <a:prstGeom prst="rect">
-            <a:avLst/>
-          </a:prstGeom>
-          <a:noFill/>
-        </p:spPr>
-        <p:txBody>
-          <a:bodyPr wrap="none" anchor="ctr">
+            <a:off x="11430000" y="6473952"/>
+            <a:ext cx="274320" cy="182880"/>
+          </a:xfrm>
+          <a:prstGeom prst="rect">
+            <a:avLst/>
+          </a:prstGeom>
+          <a:noFill/>
+        </p:spPr>
+        <p:txBody>
+          <a:bodyPr wrap="square">
             <a:spAutoFit/>
           </a:bodyPr>
           <a:lstStyle/>
           <a:p>
             <a:pPr algn="r">
-              <a:defRPr sz="900" b="1">
-                <a:solidFill>
-                  <a:srgbClr val="637380"/>
+              <a:defRPr sz="700" b="0">
+                <a:solidFill>
+                  <a:srgbClr val="637988"/>
                 </a:solidFill>
                 <a:latin typeface="Aptos"/>
               </a:defRPr>
@@ -7159,8 +8621,8 @@
         </p:nvSpPr>
         <p:spPr>
           <a:xfrm>
-            <a:off x="658368" y="1508760"/>
-            <a:ext cx="3310128" cy="3154680"/>
+            <a:off x="914400" y="1325880"/>
+            <a:ext cx="10241280" cy="749808"/>
           </a:xfrm>
           <a:prstGeom prst="roundRect">
             <a:avLst/>
@@ -7170,7 +8632,7 @@
           </a:solidFill>
           <a:ln>
             <a:solidFill>
-              <a:srgbClr val="DCE7EF"/>
+              <a:srgbClr val="C9D8E2"/>
             </a:solidFill>
           </a:ln>
         </p:spPr>
@@ -7204,80 +8666,44 @@
         </p:nvSpPr>
         <p:spPr>
           <a:xfrm>
-            <a:off x="822959" y="1645919"/>
-            <a:ext cx="2980944" cy="365760"/>
-          </a:xfrm>
-          <a:prstGeom prst="rect">
-            <a:avLst/>
-          </a:prstGeom>
-          <a:noFill/>
-        </p:spPr>
-        <p:txBody>
-          <a:bodyPr wrap="none" anchor="ctr">
-            <a:spAutoFit/>
-          </a:bodyPr>
-          <a:lstStyle/>
-          <a:p>
-            <a:pPr algn="ctr">
-              <a:defRPr sz="1500" b="1">
-                <a:solidFill>
-                  <a:srgbClr val="2B78B8"/>
-                </a:solidFill>
-                <a:latin typeface="Aptos"/>
-              </a:defRPr>
-            </a:pPr>
-            <a:r>
-              <a:t>ÁTALAKÍTÁS</a:t>
-            </a:r>
-          </a:p>
-        </p:txBody>
-      </p:sp>
-      <p:sp>
-        <p:nvSpPr>
-          <p:cNvPr id="8" name="TextBox 7"/>
-          <p:cNvSpPr txBox="1"/>
-          <p:nvPr/>
-        </p:nvSpPr>
-        <p:spPr>
-          <a:xfrm>
-            <a:off x="859536" y="2130552"/>
-            <a:ext cx="2907792" cy="2377440"/>
-          </a:xfrm>
-          <a:prstGeom prst="rect">
-            <a:avLst/>
-          </a:prstGeom>
-          <a:noFill/>
-        </p:spPr>
-        <p:txBody>
-          <a:bodyPr wrap="none" anchor="ctr">
-            <a:spAutoFit/>
-          </a:bodyPr>
-          <a:lstStyle/>
-          <a:p>
-            <a:pPr algn="ctr">
-              <a:defRPr sz="1300" b="0">
-                <a:solidFill>
-                  <a:srgbClr val="243441"/>
-                </a:solidFill>
-                <a:latin typeface="Aptos"/>
-              </a:defRPr>
-            </a:pPr>
-            <a:r>
-              <a:t>Av = 10^(26/20)</a:t>
-            </a:r>
-          </a:p>
-        </p:txBody>
-      </p:sp>
-      <p:sp>
-        <p:nvSpPr>
-          <p:cNvPr id="9" name="Rounded Rectangle 8"/>
+            <a:off x="1234440" y="1536192"/>
+            <a:ext cx="9601200" cy="320040"/>
+          </a:xfrm>
+          <a:prstGeom prst="rect">
+            <a:avLst/>
+          </a:prstGeom>
+          <a:noFill/>
+        </p:spPr>
+        <p:txBody>
+          <a:bodyPr wrap="square">
+            <a:spAutoFit/>
+          </a:bodyPr>
+          <a:lstStyle/>
+          <a:p>
+            <a:pPr algn="l">
+              <a:defRPr sz="1300" b="1">
+                <a:solidFill>
+                  <a:srgbClr val="0B2F4B"/>
+                </a:solidFill>
+                <a:latin typeface="Aptos Display"/>
+              </a:defRPr>
+            </a:pPr>
+            <a:r>
+              <a:t>Nincs kilógó elemi szál.</a:t>
+            </a:r>
+          </a:p>
+        </p:txBody>
+      </p:sp>
+      <p:sp>
+        <p:nvSpPr>
+          <p:cNvPr id="8" name="Rounded Rectangle 7"/>
           <p:cNvSpPr/>
           <p:nvPr/>
         </p:nvSpPr>
         <p:spPr>
           <a:xfrm>
-            <a:off x="4480559" y="1508760"/>
-            <a:ext cx="3310128" cy="3154680"/>
+            <a:off x="914400" y="2377439"/>
+            <a:ext cx="10241280" cy="749808"/>
           </a:xfrm>
           <a:prstGeom prst="roundRect">
             <a:avLst/>
@@ -7287,7 +8713,7 @@
           </a:solidFill>
           <a:ln>
             <a:solidFill>
-              <a:srgbClr val="DCE7EF"/>
+              <a:srgbClr val="C9D8E2"/>
             </a:solidFill>
           </a:ln>
         </p:spPr>
@@ -7315,86 +8741,50 @@
       </p:sp>
       <p:sp>
         <p:nvSpPr>
-          <p:cNvPr id="10" name="TextBox 9"/>
-          <p:cNvSpPr txBox="1"/>
-          <p:nvPr/>
-        </p:nvSpPr>
-        <p:spPr>
-          <a:xfrm>
-            <a:off x="4645151" y="1645919"/>
-            <a:ext cx="2980944" cy="365760"/>
-          </a:xfrm>
-          <a:prstGeom prst="rect">
-            <a:avLst/>
-          </a:prstGeom>
-          <a:noFill/>
-        </p:spPr>
-        <p:txBody>
-          <a:bodyPr wrap="none" anchor="ctr">
-            <a:spAutoFit/>
-          </a:bodyPr>
-          <a:lstStyle/>
-          <a:p>
-            <a:pPr algn="ctr">
-              <a:defRPr sz="1500" b="1">
-                <a:solidFill>
-                  <a:srgbClr val="DE9136"/>
-                </a:solidFill>
-                <a:latin typeface="Aptos"/>
-              </a:defRPr>
-            </a:pPr>
-            <a:r>
-              <a:t>EREDMÉNY</a:t>
-            </a:r>
-          </a:p>
-        </p:txBody>
-      </p:sp>
-      <p:sp>
-        <p:nvSpPr>
-          <p:cNvPr id="11" name="TextBox 10"/>
-          <p:cNvSpPr txBox="1"/>
-          <p:nvPr/>
-        </p:nvSpPr>
-        <p:spPr>
-          <a:xfrm>
-            <a:off x="4681727" y="2130552"/>
-            <a:ext cx="2907792" cy="2377440"/>
-          </a:xfrm>
-          <a:prstGeom prst="rect">
-            <a:avLst/>
-          </a:prstGeom>
-          <a:noFill/>
-        </p:spPr>
-        <p:txBody>
-          <a:bodyPr wrap="none" anchor="ctr">
-            <a:spAutoFit/>
-          </a:bodyPr>
-          <a:lstStyle/>
-          <a:p>
-            <a:pPr algn="ctr">
-              <a:defRPr sz="1300" b="0">
-                <a:solidFill>
-                  <a:srgbClr val="243441"/>
-                </a:solidFill>
-                <a:latin typeface="Aptos"/>
-              </a:defRPr>
-            </a:pPr>
-            <a:r>
-              <a:t>Av ≈ 20</a:t>
-            </a:r>
-          </a:p>
-        </p:txBody>
-      </p:sp>
-      <p:sp>
-        <p:nvSpPr>
-          <p:cNvPr id="12" name="Rounded Rectangle 11"/>
+          <p:cNvPr id="9" name="TextBox 8"/>
+          <p:cNvSpPr txBox="1"/>
+          <p:nvPr/>
+        </p:nvSpPr>
+        <p:spPr>
+          <a:xfrm>
+            <a:off x="1234440" y="2587752"/>
+            <a:ext cx="9601200" cy="320040"/>
+          </a:xfrm>
+          <a:prstGeom prst="rect">
+            <a:avLst/>
+          </a:prstGeom>
+          <a:noFill/>
+        </p:spPr>
+        <p:txBody>
+          <a:bodyPr wrap="square">
+            <a:spAutoFit/>
+          </a:bodyPr>
+          <a:lstStyle/>
+          <a:p>
+            <a:pPr algn="l">
+              <a:defRPr sz="1300" b="1">
+                <a:solidFill>
+                  <a:srgbClr val="0B2F4B"/>
+                </a:solidFill>
+                <a:latin typeface="Aptos Display"/>
+              </a:defRPr>
+            </a:pPr>
+            <a:r>
+              <a:t>Megfelelő érvéghüvely.</a:t>
+            </a:r>
+          </a:p>
+        </p:txBody>
+      </p:sp>
+      <p:sp>
+        <p:nvSpPr>
+          <p:cNvPr id="10" name="Rounded Rectangle 9"/>
           <p:cNvSpPr/>
           <p:nvPr/>
         </p:nvSpPr>
         <p:spPr>
           <a:xfrm>
-            <a:off x="8302752" y="1508760"/>
-            <a:ext cx="3310128" cy="3154680"/>
+            <a:off x="914400" y="3429000"/>
+            <a:ext cx="10241280" cy="749808"/>
           </a:xfrm>
           <a:prstGeom prst="roundRect">
             <a:avLst/>
@@ -7404,7 +8794,7 @@
           </a:solidFill>
           <a:ln>
             <a:solidFill>
-              <a:srgbClr val="DCE7EF"/>
+              <a:srgbClr val="C9D8E2"/>
             </a:solidFill>
           </a:ln>
         </p:spPr>
@@ -7432,72 +8822,36 @@
       </p:sp>
       <p:sp>
         <p:nvSpPr>
-          <p:cNvPr id="13" name="TextBox 12"/>
-          <p:cNvSpPr txBox="1"/>
-          <p:nvPr/>
-        </p:nvSpPr>
-        <p:spPr>
-          <a:xfrm>
-            <a:off x="8467344" y="1645919"/>
-            <a:ext cx="2980944" cy="365760"/>
-          </a:xfrm>
-          <a:prstGeom prst="rect">
-            <a:avLst/>
-          </a:prstGeom>
-          <a:noFill/>
-        </p:spPr>
-        <p:txBody>
-          <a:bodyPr wrap="none" anchor="ctr">
-            <a:spAutoFit/>
-          </a:bodyPr>
-          <a:lstStyle/>
-          <a:p>
-            <a:pPr algn="ctr">
-              <a:defRPr sz="1500" b="1">
-                <a:solidFill>
-                  <a:srgbClr val="3F8F68"/>
-                </a:solidFill>
-                <a:latin typeface="Aptos"/>
-              </a:defRPr>
-            </a:pPr>
-            <a:r>
-              <a:t>ÉRTELMEZÉS</a:t>
-            </a:r>
-          </a:p>
-        </p:txBody>
-      </p:sp>
-      <p:sp>
-        <p:nvSpPr>
-          <p:cNvPr id="14" name="TextBox 13"/>
-          <p:cNvSpPr txBox="1"/>
-          <p:nvPr/>
-        </p:nvSpPr>
-        <p:spPr>
-          <a:xfrm>
-            <a:off x="8503920" y="2130552"/>
-            <a:ext cx="2907792" cy="2377440"/>
-          </a:xfrm>
-          <a:prstGeom prst="rect">
-            <a:avLst/>
-          </a:prstGeom>
-          <a:noFill/>
-        </p:spPr>
-        <p:txBody>
-          <a:bodyPr wrap="none" anchor="ctr">
-            <a:spAutoFit/>
-          </a:bodyPr>
-          <a:lstStyle/>
-          <a:p>
-            <a:pPr algn="ctr">
-              <a:defRPr sz="1300" b="0">
-                <a:solidFill>
-                  <a:srgbClr val="243441"/>
-                </a:solidFill>
-                <a:latin typeface="Aptos"/>
-              </a:defRPr>
-            </a:pPr>
-            <a:r>
-              <a:t>Uki közel 20× Ube</a:t>
+          <p:cNvPr id="11" name="TextBox 10"/>
+          <p:cNvSpPr txBox="1"/>
+          <p:nvPr/>
+        </p:nvSpPr>
+        <p:spPr>
+          <a:xfrm>
+            <a:off x="1234440" y="3639311"/>
+            <a:ext cx="9601200" cy="320040"/>
+          </a:xfrm>
+          <a:prstGeom prst="rect">
+            <a:avLst/>
+          </a:prstGeom>
+          <a:noFill/>
+        </p:spPr>
+        <p:txBody>
+          <a:bodyPr wrap="square">
+            <a:spAutoFit/>
+          </a:bodyPr>
+          <a:lstStyle/>
+          <a:p>
+            <a:pPr algn="l">
+              <a:defRPr sz="1300" b="1">
+                <a:solidFill>
+                  <a:srgbClr val="0B2F4B"/>
+                </a:solidFill>
+                <a:latin typeface="Aptos Display"/>
+              </a:defRPr>
+            </a:pPr>
+            <a:r>
+              <a:t>A krimpelés után ellenőrzés következik.</a:t>
             </a:r>
           </a:p>
         </p:txBody>
@@ -7516,7 +8870,7 @@
     <p:bg>
       <p:bgPr>
         <a:solidFill>
-          <a:srgbClr val="F4F8FB"/>
+          <a:srgbClr val="EEF6FA"/>
         </a:solidFill>
         <a:effectLst/>
       </p:bgPr>
@@ -7536,102 +8890,102 @@
         </p:nvSpPr>
         <p:spPr>
           <a:xfrm>
-            <a:off x="594360" y="292608"/>
-            <a:ext cx="10972800" cy="502920"/>
-          </a:xfrm>
-          <a:prstGeom prst="rect">
-            <a:avLst/>
-          </a:prstGeom>
-          <a:noFill/>
-        </p:spPr>
-        <p:txBody>
-          <a:bodyPr wrap="none" anchor="ctr">
+            <a:off x="411480" y="201168"/>
+            <a:ext cx="3474720" cy="182880"/>
+          </a:xfrm>
+          <a:prstGeom prst="rect">
+            <a:avLst/>
+          </a:prstGeom>
+          <a:noFill/>
+        </p:spPr>
+        <p:txBody>
+          <a:bodyPr wrap="square">
             <a:spAutoFit/>
           </a:bodyPr>
           <a:lstStyle/>
           <a:p>
             <a:pPr algn="l">
-              <a:defRPr sz="2500" b="1">
-                <a:solidFill>
-                  <a:srgbClr val="122D48"/>
+              <a:defRPr sz="700" b="1">
+                <a:solidFill>
+                  <a:srgbClr val="F59722"/>
+                </a:solidFill>
+                <a:latin typeface="Aptos Display"/>
+              </a:defRPr>
+            </a:pPr>
+            <a:r>
+              <a:t>2. TANÓRA</a:t>
+            </a:r>
+          </a:p>
+        </p:txBody>
+      </p:sp>
+      <p:sp>
+        <p:nvSpPr>
+          <p:cNvPr id="3" name="TextBox 2"/>
+          <p:cNvSpPr txBox="1"/>
+          <p:nvPr/>
+        </p:nvSpPr>
+        <p:spPr>
+          <a:xfrm>
+            <a:off x="411480" y="457200"/>
+            <a:ext cx="10972800" cy="457200"/>
+          </a:xfrm>
+          <a:prstGeom prst="rect">
+            <a:avLst/>
+          </a:prstGeom>
+          <a:noFill/>
+        </p:spPr>
+        <p:txBody>
+          <a:bodyPr wrap="square">
+            <a:spAutoFit/>
+          </a:bodyPr>
+          <a:lstStyle/>
+          <a:p>
+            <a:pPr algn="l">
+              <a:defRPr sz="2000" b="1">
+                <a:solidFill>
+                  <a:srgbClr val="0B2F4B"/>
+                </a:solidFill>
+                <a:latin typeface="Aptos Display"/>
+              </a:defRPr>
+            </a:pPr>
+            <a:r>
+              <a:t>A jó kötés ellenőrzési sorrendje</a:t>
+            </a:r>
+          </a:p>
+        </p:txBody>
+      </p:sp>
+      <p:sp>
+        <p:nvSpPr>
+          <p:cNvPr id="4" name="TextBox 3"/>
+          <p:cNvSpPr txBox="1"/>
+          <p:nvPr/>
+        </p:nvSpPr>
+        <p:spPr>
+          <a:xfrm>
+            <a:off x="411480" y="6492240"/>
+            <a:ext cx="7315200" cy="164592"/>
+          </a:xfrm>
+          <a:prstGeom prst="rect">
+            <a:avLst/>
+          </a:prstGeom>
+          <a:noFill/>
+        </p:spPr>
+        <p:txBody>
+          <a:bodyPr wrap="square">
+            <a:spAutoFit/>
+          </a:bodyPr>
+          <a:lstStyle/>
+          <a:p>
+            <a:pPr algn="l">
+              <a:defRPr sz="600" b="0">
+                <a:solidFill>
+                  <a:srgbClr val="637988"/>
                 </a:solidFill>
                 <a:latin typeface="Aptos"/>
               </a:defRPr>
             </a:pPr>
             <a:r>
-              <a:t>Laboratóriumi gyakorlat</a:t>
-            </a:r>
-          </a:p>
-        </p:txBody>
-      </p:sp>
-      <p:sp>
-        <p:nvSpPr>
-          <p:cNvPr id="3" name="TextBox 2"/>
-          <p:cNvSpPr txBox="1"/>
-          <p:nvPr/>
-        </p:nvSpPr>
-        <p:spPr>
-          <a:xfrm>
-            <a:off x="621792" y="822960"/>
-            <a:ext cx="10698480" cy="292608"/>
-          </a:xfrm>
-          <a:prstGeom prst="rect">
-            <a:avLst/>
-          </a:prstGeom>
-          <a:noFill/>
-        </p:spPr>
-        <p:txBody>
-          <a:bodyPr wrap="none" anchor="ctr">
-            <a:spAutoFit/>
-          </a:bodyPr>
-          <a:lstStyle/>
-          <a:p>
-            <a:pPr algn="l">
-              <a:defRPr sz="1100" b="0">
-                <a:solidFill>
-                  <a:srgbClr val="637380"/>
-                </a:solidFill>
-                <a:latin typeface="Aptos"/>
-              </a:defRPr>
-            </a:pPr>
-            <a:r>
-              <a:t>Mérj több frekvencián, majd rajzolj görbét.</a:t>
-            </a:r>
-          </a:p>
-        </p:txBody>
-      </p:sp>
-      <p:sp>
-        <p:nvSpPr>
-          <p:cNvPr id="4" name="TextBox 3"/>
-          <p:cNvSpPr txBox="1"/>
-          <p:nvPr/>
-        </p:nvSpPr>
-        <p:spPr>
-          <a:xfrm>
-            <a:off x="594360" y="6446520"/>
-            <a:ext cx="3657600" cy="182880"/>
-          </a:xfrm>
-          <a:prstGeom prst="rect">
-            <a:avLst/>
-          </a:prstGeom>
-          <a:noFill/>
-        </p:spPr>
-        <p:txBody>
-          <a:bodyPr wrap="none" anchor="ctr">
-            <a:spAutoFit/>
-          </a:bodyPr>
-          <a:lstStyle/>
-          <a:p>
-            <a:pPr algn="l">
-              <a:defRPr sz="900" b="1">
-                <a:solidFill>
-                  <a:srgbClr val="122D48"/>
-                </a:solidFill>
-                <a:latin typeface="Aptos"/>
-              </a:defRPr>
-            </a:pPr>
-            <a:r>
-              <a:t>IAP • Analóg áramkörök • 7. hét</a:t>
+              <a:t>IAP • 11. évfolyam • Villamos szerelések • 07. hét</a:t>
             </a:r>
           </a:p>
         </p:txBody>
@@ -7644,24 +8998,24 @@
         </p:nvSpPr>
         <p:spPr>
           <a:xfrm>
-            <a:off x="11155680" y="6428232"/>
-            <a:ext cx="411480" cy="182880"/>
-          </a:xfrm>
-          <a:prstGeom prst="rect">
-            <a:avLst/>
-          </a:prstGeom>
-          <a:noFill/>
-        </p:spPr>
-        <p:txBody>
-          <a:bodyPr wrap="none" anchor="ctr">
+            <a:off x="11430000" y="6473952"/>
+            <a:ext cx="274320" cy="182880"/>
+          </a:xfrm>
+          <a:prstGeom prst="rect">
+            <a:avLst/>
+          </a:prstGeom>
+          <a:noFill/>
+        </p:spPr>
+        <p:txBody>
+          <a:bodyPr wrap="square">
             <a:spAutoFit/>
           </a:bodyPr>
           <a:lstStyle/>
           <a:p>
             <a:pPr algn="r">
-              <a:defRPr sz="900" b="1">
-                <a:solidFill>
-                  <a:srgbClr val="637380"/>
+              <a:defRPr sz="700" b="0">
+                <a:solidFill>
+                  <a:srgbClr val="637988"/>
                 </a:solidFill>
                 <a:latin typeface="Aptos"/>
               </a:defRPr>
@@ -7680,8 +9034,8 @@
         </p:nvSpPr>
         <p:spPr>
           <a:xfrm>
-            <a:off x="658368" y="1508760"/>
-            <a:ext cx="3310128" cy="3154680"/>
+            <a:off x="914400" y="1325880"/>
+            <a:ext cx="10241280" cy="749808"/>
           </a:xfrm>
           <a:prstGeom prst="roundRect">
             <a:avLst/>
@@ -7691,7 +9045,7 @@
           </a:solidFill>
           <a:ln>
             <a:solidFill>
-              <a:srgbClr val="DCE7EF"/>
+              <a:srgbClr val="C9D8E2"/>
             </a:solidFill>
           </a:ln>
         </p:spPr>
@@ -7725,80 +9079,44 @@
         </p:nvSpPr>
         <p:spPr>
           <a:xfrm>
-            <a:off x="822959" y="1645919"/>
-            <a:ext cx="2980944" cy="365760"/>
-          </a:xfrm>
-          <a:prstGeom prst="rect">
-            <a:avLst/>
-          </a:prstGeom>
-          <a:noFill/>
-        </p:spPr>
-        <p:txBody>
-          <a:bodyPr wrap="none" anchor="ctr">
-            <a:spAutoFit/>
-          </a:bodyPr>
-          <a:lstStyle/>
-          <a:p>
-            <a:pPr algn="ctr">
-              <a:defRPr sz="1500" b="1">
-                <a:solidFill>
-                  <a:srgbClr val="42AAD2"/>
-                </a:solidFill>
-                <a:latin typeface="Aptos"/>
-              </a:defRPr>
-            </a:pPr>
-            <a:r>
-              <a:t>100 Hz</a:t>
-            </a:r>
-          </a:p>
-        </p:txBody>
-      </p:sp>
-      <p:sp>
-        <p:nvSpPr>
-          <p:cNvPr id="8" name="TextBox 7"/>
-          <p:cNvSpPr txBox="1"/>
-          <p:nvPr/>
-        </p:nvSpPr>
-        <p:spPr>
-          <a:xfrm>
-            <a:off x="859536" y="2130552"/>
-            <a:ext cx="2907792" cy="2377440"/>
-          </a:xfrm>
-          <a:prstGeom prst="rect">
-            <a:avLst/>
-          </a:prstGeom>
-          <a:noFill/>
-        </p:spPr>
-        <p:txBody>
-          <a:bodyPr wrap="none" anchor="ctr">
-            <a:spAutoFit/>
-          </a:bodyPr>
-          <a:lstStyle/>
-          <a:p>
-            <a:pPr algn="ctr">
-              <a:defRPr sz="1300" b="0">
-                <a:solidFill>
-                  <a:srgbClr val="243441"/>
-                </a:solidFill>
-                <a:latin typeface="Aptos"/>
-              </a:defRPr>
-            </a:pPr>
-            <a:r>
-              <a:t>mérés</a:t>
-            </a:r>
-          </a:p>
-        </p:txBody>
-      </p:sp>
-      <p:sp>
-        <p:nvSpPr>
-          <p:cNvPr id="9" name="Rounded Rectangle 8"/>
+            <a:off x="1234440" y="1536192"/>
+            <a:ext cx="9601200" cy="320040"/>
+          </a:xfrm>
+          <a:prstGeom prst="rect">
+            <a:avLst/>
+          </a:prstGeom>
+          <a:noFill/>
+        </p:spPr>
+        <p:txBody>
+          <a:bodyPr wrap="square">
+            <a:spAutoFit/>
+          </a:bodyPr>
+          <a:lstStyle/>
+          <a:p>
+            <a:pPr algn="l">
+              <a:defRPr sz="1300" b="1">
+                <a:solidFill>
+                  <a:srgbClr val="0B2F4B"/>
+                </a:solidFill>
+                <a:latin typeface="Aptos Display"/>
+              </a:defRPr>
+            </a:pPr>
+            <a:r>
+              <a:t>1 • Szemrevételezés</a:t>
+            </a:r>
+          </a:p>
+        </p:txBody>
+      </p:sp>
+      <p:sp>
+        <p:nvSpPr>
+          <p:cNvPr id="8" name="Rounded Rectangle 7"/>
           <p:cNvSpPr/>
           <p:nvPr/>
         </p:nvSpPr>
         <p:spPr>
           <a:xfrm>
-            <a:off x="4480559" y="1508760"/>
-            <a:ext cx="3310128" cy="3154680"/>
+            <a:off x="914400" y="2377439"/>
+            <a:ext cx="10241280" cy="749808"/>
           </a:xfrm>
           <a:prstGeom prst="roundRect">
             <a:avLst/>
@@ -7808,7 +9126,7 @@
           </a:solidFill>
           <a:ln>
             <a:solidFill>
-              <a:srgbClr val="DCE7EF"/>
+              <a:srgbClr val="C9D8E2"/>
             </a:solidFill>
           </a:ln>
         </p:spPr>
@@ -7836,86 +9154,50 @@
       </p:sp>
       <p:sp>
         <p:nvSpPr>
-          <p:cNvPr id="10" name="TextBox 9"/>
-          <p:cNvSpPr txBox="1"/>
-          <p:nvPr/>
-        </p:nvSpPr>
-        <p:spPr>
-          <a:xfrm>
-            <a:off x="4645151" y="1645919"/>
-            <a:ext cx="2980944" cy="365760"/>
-          </a:xfrm>
-          <a:prstGeom prst="rect">
-            <a:avLst/>
-          </a:prstGeom>
-          <a:noFill/>
-        </p:spPr>
-        <p:txBody>
-          <a:bodyPr wrap="none" anchor="ctr">
-            <a:spAutoFit/>
-          </a:bodyPr>
-          <a:lstStyle/>
-          <a:p>
-            <a:pPr algn="ctr">
-              <a:defRPr sz="1500" b="1">
-                <a:solidFill>
-                  <a:srgbClr val="3F8F68"/>
-                </a:solidFill>
-                <a:latin typeface="Aptos"/>
-              </a:defRPr>
-            </a:pPr>
-            <a:r>
-              <a:t>1–5 kHz</a:t>
-            </a:r>
-          </a:p>
-        </p:txBody>
-      </p:sp>
-      <p:sp>
-        <p:nvSpPr>
-          <p:cNvPr id="11" name="TextBox 10"/>
-          <p:cNvSpPr txBox="1"/>
-          <p:nvPr/>
-        </p:nvSpPr>
-        <p:spPr>
-          <a:xfrm>
-            <a:off x="4681727" y="2130552"/>
-            <a:ext cx="2907792" cy="2377440"/>
-          </a:xfrm>
-          <a:prstGeom prst="rect">
-            <a:avLst/>
-          </a:prstGeom>
-          <a:noFill/>
-        </p:spPr>
-        <p:txBody>
-          <a:bodyPr wrap="none" anchor="ctr">
-            <a:spAutoFit/>
-          </a:bodyPr>
-          <a:lstStyle/>
-          <a:p>
-            <a:pPr algn="ctr">
-              <a:defRPr sz="1300" b="0">
-                <a:solidFill>
-                  <a:srgbClr val="243441"/>
-                </a:solidFill>
-                <a:latin typeface="Aptos"/>
-              </a:defRPr>
-            </a:pPr>
-            <a:r>
-              <a:t>mérés</a:t>
-            </a:r>
-          </a:p>
-        </p:txBody>
-      </p:sp>
-      <p:sp>
-        <p:nvSpPr>
-          <p:cNvPr id="12" name="Rounded Rectangle 11"/>
+          <p:cNvPr id="9" name="TextBox 8"/>
+          <p:cNvSpPr txBox="1"/>
+          <p:nvPr/>
+        </p:nvSpPr>
+        <p:spPr>
+          <a:xfrm>
+            <a:off x="1234440" y="2587752"/>
+            <a:ext cx="9601200" cy="320040"/>
+          </a:xfrm>
+          <a:prstGeom prst="rect">
+            <a:avLst/>
+          </a:prstGeom>
+          <a:noFill/>
+        </p:spPr>
+        <p:txBody>
+          <a:bodyPr wrap="square">
+            <a:spAutoFit/>
+          </a:bodyPr>
+          <a:lstStyle/>
+          <a:p>
+            <a:pPr algn="l">
+              <a:defRPr sz="1300" b="1">
+                <a:solidFill>
+                  <a:srgbClr val="0B2F4B"/>
+                </a:solidFill>
+                <a:latin typeface="Aptos Display"/>
+              </a:defRPr>
+            </a:pPr>
+            <a:r>
+              <a:t>2 • Vezető helyzete</a:t>
+            </a:r>
+          </a:p>
+        </p:txBody>
+      </p:sp>
+      <p:sp>
+        <p:nvSpPr>
+          <p:cNvPr id="10" name="Rounded Rectangle 9"/>
           <p:cNvSpPr/>
           <p:nvPr/>
         </p:nvSpPr>
         <p:spPr>
           <a:xfrm>
-            <a:off x="8302752" y="1508760"/>
-            <a:ext cx="3310128" cy="3154680"/>
+            <a:off x="914400" y="3429000"/>
+            <a:ext cx="10241280" cy="749808"/>
           </a:xfrm>
           <a:prstGeom prst="roundRect">
             <a:avLst/>
@@ -7925,7 +9207,7 @@
           </a:solidFill>
           <a:ln>
             <a:solidFill>
-              <a:srgbClr val="DCE7EF"/>
+              <a:srgbClr val="C9D8E2"/>
             </a:solidFill>
           </a:ln>
         </p:spPr>
@@ -7953,72 +9235,117 @@
       </p:sp>
       <p:sp>
         <p:nvSpPr>
+          <p:cNvPr id="11" name="TextBox 10"/>
+          <p:cNvSpPr txBox="1"/>
+          <p:nvPr/>
+        </p:nvSpPr>
+        <p:spPr>
+          <a:xfrm>
+            <a:off x="1234440" y="3639311"/>
+            <a:ext cx="9601200" cy="320040"/>
+          </a:xfrm>
+          <a:prstGeom prst="rect">
+            <a:avLst/>
+          </a:prstGeom>
+          <a:noFill/>
+        </p:spPr>
+        <p:txBody>
+          <a:bodyPr wrap="square">
+            <a:spAutoFit/>
+          </a:bodyPr>
+          <a:lstStyle/>
+          <a:p>
+            <a:pPr algn="l">
+              <a:defRPr sz="1300" b="1">
+                <a:solidFill>
+                  <a:srgbClr val="0B2F4B"/>
+                </a:solidFill>
+                <a:latin typeface="Aptos Display"/>
+              </a:defRPr>
+            </a:pPr>
+            <a:r>
+              <a:t>3 • Óvatos húzópróba</a:t>
+            </a:r>
+          </a:p>
+        </p:txBody>
+      </p:sp>
+      <p:sp>
+        <p:nvSpPr>
+          <p:cNvPr id="12" name="Rounded Rectangle 11"/>
+          <p:cNvSpPr/>
+          <p:nvPr/>
+        </p:nvSpPr>
+        <p:spPr>
+          <a:xfrm>
+            <a:off x="914400" y="4480559"/>
+            <a:ext cx="10241280" cy="749808"/>
+          </a:xfrm>
+          <a:prstGeom prst="roundRect">
+            <a:avLst/>
+          </a:prstGeom>
+          <a:solidFill>
+            <a:srgbClr val="FFFFFF"/>
+          </a:solidFill>
+          <a:ln>
+            <a:solidFill>
+              <a:srgbClr val="C9D8E2"/>
+            </a:solidFill>
+          </a:ln>
+        </p:spPr>
+        <p:style>
+          <a:lnRef idx="1">
+            <a:schemeClr val="accent1"/>
+          </a:lnRef>
+          <a:fillRef idx="3">
+            <a:schemeClr val="accent1"/>
+          </a:fillRef>
+          <a:effectRef idx="2">
+            <a:schemeClr val="accent1"/>
+          </a:effectRef>
+          <a:fontRef idx="minor">
+            <a:schemeClr val="lt1"/>
+          </a:fontRef>
+        </p:style>
+        <p:txBody>
+          <a:bodyPr rtlCol="0" anchor="ctr"/>
+          <a:lstStyle/>
+          <a:p>
+            <a:pPr algn="ctr"/>
+          </a:p>
+        </p:txBody>
+      </p:sp>
+      <p:sp>
+        <p:nvSpPr>
           <p:cNvPr id="13" name="TextBox 12"/>
           <p:cNvSpPr txBox="1"/>
           <p:nvPr/>
         </p:nvSpPr>
         <p:spPr>
           <a:xfrm>
-            <a:off x="8467344" y="1645919"/>
-            <a:ext cx="2980944" cy="365760"/>
-          </a:xfrm>
-          <a:prstGeom prst="rect">
-            <a:avLst/>
-          </a:prstGeom>
-          <a:noFill/>
-        </p:spPr>
-        <p:txBody>
-          <a:bodyPr wrap="none" anchor="ctr">
-            <a:spAutoFit/>
-          </a:bodyPr>
-          <a:lstStyle/>
-          <a:p>
-            <a:pPr algn="ctr">
-              <a:defRPr sz="1500" b="1">
-                <a:solidFill>
-                  <a:srgbClr val="DE9136"/>
-                </a:solidFill>
-                <a:latin typeface="Aptos"/>
-              </a:defRPr>
-            </a:pPr>
-            <a:r>
-              <a:t>10–50 kHz</a:t>
-            </a:r>
-          </a:p>
-        </p:txBody>
-      </p:sp>
-      <p:sp>
-        <p:nvSpPr>
-          <p:cNvPr id="14" name="TextBox 13"/>
-          <p:cNvSpPr txBox="1"/>
-          <p:nvPr/>
-        </p:nvSpPr>
-        <p:spPr>
-          <a:xfrm>
-            <a:off x="8503920" y="2130552"/>
-            <a:ext cx="2907792" cy="2377440"/>
-          </a:xfrm>
-          <a:prstGeom prst="rect">
-            <a:avLst/>
-          </a:prstGeom>
-          <a:noFill/>
-        </p:spPr>
-        <p:txBody>
-          <a:bodyPr wrap="none" anchor="ctr">
-            <a:spAutoFit/>
-          </a:bodyPr>
-          <a:lstStyle/>
-          <a:p>
-            <a:pPr algn="ctr">
-              <a:defRPr sz="1300" b="0">
-                <a:solidFill>
-                  <a:srgbClr val="243441"/>
-                </a:solidFill>
-                <a:latin typeface="Aptos"/>
-              </a:defRPr>
-            </a:pPr>
-            <a:r>
-              <a:t>mérés</a:t>
+            <a:off x="1234440" y="4690872"/>
+            <a:ext cx="9601200" cy="320040"/>
+          </a:xfrm>
+          <a:prstGeom prst="rect">
+            <a:avLst/>
+          </a:prstGeom>
+          <a:noFill/>
+        </p:spPr>
+        <p:txBody>
+          <a:bodyPr wrap="square">
+            <a:spAutoFit/>
+          </a:bodyPr>
+          <a:lstStyle/>
+          <a:p>
+            <a:pPr algn="l">
+              <a:defRPr sz="1300" b="1">
+                <a:solidFill>
+                  <a:srgbClr val="0B2F4B"/>
+                </a:solidFill>
+                <a:latin typeface="Aptos Display"/>
+              </a:defRPr>
+            </a:pPr>
+            <a:r>
+              <a:t>4 • Szükség esetén villamos mérés</a:t>
             </a:r>
           </a:p>
         </p:txBody>
@@ -8037,7 +9364,7 @@
     <p:bg>
       <p:bgPr>
         <a:solidFill>
-          <a:srgbClr val="F4F8FB"/>
+          <a:srgbClr val="EEF6FA"/>
         </a:solidFill>
         <a:effectLst/>
       </p:bgPr>
@@ -8057,102 +9384,102 @@
         </p:nvSpPr>
         <p:spPr>
           <a:xfrm>
-            <a:off x="594360" y="292608"/>
-            <a:ext cx="10972800" cy="502920"/>
-          </a:xfrm>
-          <a:prstGeom prst="rect">
-            <a:avLst/>
-          </a:prstGeom>
-          <a:noFill/>
-        </p:spPr>
-        <p:txBody>
-          <a:bodyPr wrap="none" anchor="ctr">
+            <a:off x="411480" y="201168"/>
+            <a:ext cx="3474720" cy="182880"/>
+          </a:xfrm>
+          <a:prstGeom prst="rect">
+            <a:avLst/>
+          </a:prstGeom>
+          <a:noFill/>
+        </p:spPr>
+        <p:txBody>
+          <a:bodyPr wrap="square">
             <a:spAutoFit/>
           </a:bodyPr>
           <a:lstStyle/>
           <a:p>
             <a:pPr algn="l">
-              <a:defRPr sz="2500" b="1">
-                <a:solidFill>
-                  <a:srgbClr val="122D48"/>
+              <a:defRPr sz="700" b="1">
+                <a:solidFill>
+                  <a:srgbClr val="F59722"/>
+                </a:solidFill>
+                <a:latin typeface="Aptos Display"/>
+              </a:defRPr>
+            </a:pPr>
+            <a:r>
+              <a:t>MŰHELYTITOK</a:t>
+            </a:r>
+          </a:p>
+        </p:txBody>
+      </p:sp>
+      <p:sp>
+        <p:nvSpPr>
+          <p:cNvPr id="3" name="TextBox 2"/>
+          <p:cNvSpPr txBox="1"/>
+          <p:nvPr/>
+        </p:nvSpPr>
+        <p:spPr>
+          <a:xfrm>
+            <a:off x="411480" y="457200"/>
+            <a:ext cx="10972800" cy="457200"/>
+          </a:xfrm>
+          <a:prstGeom prst="rect">
+            <a:avLst/>
+          </a:prstGeom>
+          <a:noFill/>
+        </p:spPr>
+        <p:txBody>
+          <a:bodyPr wrap="square">
+            <a:spAutoFit/>
+          </a:bodyPr>
+          <a:lstStyle/>
+          <a:p>
+            <a:pPr algn="l">
+              <a:defRPr sz="2000" b="1">
+                <a:solidFill>
+                  <a:srgbClr val="0B2F4B"/>
+                </a:solidFill>
+                <a:latin typeface="Aptos Display"/>
+              </a:defRPr>
+            </a:pPr>
+            <a:r>
+              <a:t>Hat tipikus hiba</a:t>
+            </a:r>
+          </a:p>
+        </p:txBody>
+      </p:sp>
+      <p:sp>
+        <p:nvSpPr>
+          <p:cNvPr id="4" name="TextBox 3"/>
+          <p:cNvSpPr txBox="1"/>
+          <p:nvPr/>
+        </p:nvSpPr>
+        <p:spPr>
+          <a:xfrm>
+            <a:off x="411480" y="6492240"/>
+            <a:ext cx="7315200" cy="164592"/>
+          </a:xfrm>
+          <a:prstGeom prst="rect">
+            <a:avLst/>
+          </a:prstGeom>
+          <a:noFill/>
+        </p:spPr>
+        <p:txBody>
+          <a:bodyPr wrap="square">
+            <a:spAutoFit/>
+          </a:bodyPr>
+          <a:lstStyle/>
+          <a:p>
+            <a:pPr algn="l">
+              <a:defRPr sz="600" b="0">
+                <a:solidFill>
+                  <a:srgbClr val="637988"/>
                 </a:solidFill>
                 <a:latin typeface="Aptos"/>
               </a:defRPr>
             </a:pPr>
             <a:r>
-              <a:t>Kiértékelés</a:t>
-            </a:r>
-          </a:p>
-        </p:txBody>
-      </p:sp>
-      <p:sp>
-        <p:nvSpPr>
-          <p:cNvPr id="3" name="TextBox 2"/>
-          <p:cNvSpPr txBox="1"/>
-          <p:nvPr/>
-        </p:nvSpPr>
-        <p:spPr>
-          <a:xfrm>
-            <a:off x="621792" y="822960"/>
-            <a:ext cx="10698480" cy="292608"/>
-          </a:xfrm>
-          <a:prstGeom prst="rect">
-            <a:avLst/>
-          </a:prstGeom>
-          <a:noFill/>
-        </p:spPr>
-        <p:txBody>
-          <a:bodyPr wrap="none" anchor="ctr">
-            <a:spAutoFit/>
-          </a:bodyPr>
-          <a:lstStyle/>
-          <a:p>
-            <a:pPr algn="l">
-              <a:defRPr sz="1100" b="0">
-                <a:solidFill>
-                  <a:srgbClr val="637380"/>
-                </a:solidFill>
-                <a:latin typeface="Aptos"/>
-              </a:defRPr>
-            </a:pPr>
-            <a:r>
-              <a:t>A mérési pontokból frekvenciaátviteli görbe készül.</a:t>
-            </a:r>
-          </a:p>
-        </p:txBody>
-      </p:sp>
-      <p:sp>
-        <p:nvSpPr>
-          <p:cNvPr id="4" name="TextBox 3"/>
-          <p:cNvSpPr txBox="1"/>
-          <p:nvPr/>
-        </p:nvSpPr>
-        <p:spPr>
-          <a:xfrm>
-            <a:off x="594360" y="6446520"/>
-            <a:ext cx="3657600" cy="182880"/>
-          </a:xfrm>
-          <a:prstGeom prst="rect">
-            <a:avLst/>
-          </a:prstGeom>
-          <a:noFill/>
-        </p:spPr>
-        <p:txBody>
-          <a:bodyPr wrap="none" anchor="ctr">
-            <a:spAutoFit/>
-          </a:bodyPr>
-          <a:lstStyle/>
-          <a:p>
-            <a:pPr algn="l">
-              <a:defRPr sz="900" b="1">
-                <a:solidFill>
-                  <a:srgbClr val="122D48"/>
-                </a:solidFill>
-                <a:latin typeface="Aptos"/>
-              </a:defRPr>
-            </a:pPr>
-            <a:r>
-              <a:t>IAP • Analóg áramkörök • 7. hét</a:t>
+              <a:t>IAP • 11. évfolyam • Villamos szerelések • 07. hét</a:t>
             </a:r>
           </a:p>
         </p:txBody>
@@ -8165,24 +9492,24 @@
         </p:nvSpPr>
         <p:spPr>
           <a:xfrm>
-            <a:off x="11155680" y="6428232"/>
-            <a:ext cx="411480" cy="182880"/>
-          </a:xfrm>
-          <a:prstGeom prst="rect">
-            <a:avLst/>
-          </a:prstGeom>
-          <a:noFill/>
-        </p:spPr>
-        <p:txBody>
-          <a:bodyPr wrap="none" anchor="ctr">
+            <a:off x="11430000" y="6473952"/>
+            <a:ext cx="274320" cy="182880"/>
+          </a:xfrm>
+          <a:prstGeom prst="rect">
+            <a:avLst/>
+          </a:prstGeom>
+          <a:noFill/>
+        </p:spPr>
+        <p:txBody>
+          <a:bodyPr wrap="square">
             <a:spAutoFit/>
           </a:bodyPr>
           <a:lstStyle/>
           <a:p>
             <a:pPr algn="r">
-              <a:defRPr sz="900" b="1">
-                <a:solidFill>
-                  <a:srgbClr val="637380"/>
+              <a:defRPr sz="700" b="0">
+                <a:solidFill>
+                  <a:srgbClr val="637988"/>
                 </a:solidFill>
                 <a:latin typeface="Aptos"/>
               </a:defRPr>
@@ -8201,8 +9528,8 @@
         </p:nvSpPr>
         <p:spPr>
           <a:xfrm>
-            <a:off x="658368" y="1508760"/>
-            <a:ext cx="3310128" cy="3154680"/>
+            <a:off x="640080" y="1325880"/>
+            <a:ext cx="5029200" cy="914400"/>
           </a:xfrm>
           <a:prstGeom prst="roundRect">
             <a:avLst/>
@@ -8212,7 +9539,7 @@
           </a:solidFill>
           <a:ln>
             <a:solidFill>
-              <a:srgbClr val="DCE7EF"/>
+              <a:srgbClr val="C9D8E2"/>
             </a:solidFill>
           </a:ln>
         </p:spPr>
@@ -8246,80 +9573,44 @@
         </p:nvSpPr>
         <p:spPr>
           <a:xfrm>
-            <a:off x="822959" y="1645919"/>
-            <a:ext cx="2980944" cy="365760"/>
-          </a:xfrm>
-          <a:prstGeom prst="rect">
-            <a:avLst/>
-          </a:prstGeom>
-          <a:noFill/>
-        </p:spPr>
-        <p:txBody>
-          <a:bodyPr wrap="none" anchor="ctr">
+            <a:off x="914400" y="1600200"/>
+            <a:ext cx="4480560" cy="320040"/>
+          </a:xfrm>
+          <a:prstGeom prst="rect">
+            <a:avLst/>
+          </a:prstGeom>
+          <a:noFill/>
+        </p:spPr>
+        <p:txBody>
+          <a:bodyPr wrap="square">
             <a:spAutoFit/>
           </a:bodyPr>
           <a:lstStyle/>
           <a:p>
             <a:pPr algn="ctr">
-              <a:defRPr sz="1500" b="1">
-                <a:solidFill>
-                  <a:srgbClr val="2B78B8"/>
-                </a:solidFill>
-                <a:latin typeface="Aptos"/>
-              </a:defRPr>
-            </a:pPr>
-            <a:r>
-              <a:t>1.</a:t>
-            </a:r>
-          </a:p>
-        </p:txBody>
-      </p:sp>
-      <p:sp>
-        <p:nvSpPr>
-          <p:cNvPr id="8" name="TextBox 7"/>
-          <p:cNvSpPr txBox="1"/>
-          <p:nvPr/>
-        </p:nvSpPr>
-        <p:spPr>
-          <a:xfrm>
-            <a:off x="859536" y="2130552"/>
-            <a:ext cx="2907792" cy="2377440"/>
-          </a:xfrm>
-          <a:prstGeom prst="rect">
-            <a:avLst/>
-          </a:prstGeom>
-          <a:noFill/>
-        </p:spPr>
-        <p:txBody>
-          <a:bodyPr wrap="none" anchor="ctr">
-            <a:spAutoFit/>
-          </a:bodyPr>
-          <a:lstStyle/>
-          <a:p>
-            <a:pPr algn="ctr">
-              <a:defRPr sz="1300" b="0">
-                <a:solidFill>
-                  <a:srgbClr val="243441"/>
-                </a:solidFill>
-                <a:latin typeface="Aptos"/>
-              </a:defRPr>
-            </a:pPr>
-            <a:r>
-              <a:t>számíts Av(dB)-t</a:t>
-            </a:r>
-          </a:p>
-        </p:txBody>
-      </p:sp>
-      <p:sp>
-        <p:nvSpPr>
-          <p:cNvPr id="9" name="Rounded Rectangle 8"/>
+              <a:defRPr sz="1100" b="1">
+                <a:solidFill>
+                  <a:srgbClr val="0B2F4B"/>
+                </a:solidFill>
+                <a:latin typeface="Aptos Display"/>
+              </a:defRPr>
+            </a:pPr>
+            <a:r>
+              <a:t>Laza csavar</a:t>
+            </a:r>
+          </a:p>
+        </p:txBody>
+      </p:sp>
+      <p:sp>
+        <p:nvSpPr>
+          <p:cNvPr id="8" name="Rounded Rectangle 7"/>
           <p:cNvSpPr/>
           <p:nvPr/>
         </p:nvSpPr>
         <p:spPr>
           <a:xfrm>
-            <a:off x="4480559" y="1508760"/>
-            <a:ext cx="3310128" cy="3154680"/>
+            <a:off x="6217920" y="1325880"/>
+            <a:ext cx="5029200" cy="914400"/>
           </a:xfrm>
           <a:prstGeom prst="roundRect">
             <a:avLst/>
@@ -8329,7 +9620,7 @@
           </a:solidFill>
           <a:ln>
             <a:solidFill>
-              <a:srgbClr val="DCE7EF"/>
+              <a:srgbClr val="C9D8E2"/>
             </a:solidFill>
           </a:ln>
         </p:spPr>
@@ -8357,86 +9648,50 @@
       </p:sp>
       <p:sp>
         <p:nvSpPr>
-          <p:cNvPr id="10" name="TextBox 9"/>
-          <p:cNvSpPr txBox="1"/>
-          <p:nvPr/>
-        </p:nvSpPr>
-        <p:spPr>
-          <a:xfrm>
-            <a:off x="4645151" y="1645919"/>
-            <a:ext cx="2980944" cy="365760"/>
-          </a:xfrm>
-          <a:prstGeom prst="rect">
-            <a:avLst/>
-          </a:prstGeom>
-          <a:noFill/>
-        </p:spPr>
-        <p:txBody>
-          <a:bodyPr wrap="none" anchor="ctr">
+          <p:cNvPr id="9" name="TextBox 8"/>
+          <p:cNvSpPr txBox="1"/>
+          <p:nvPr/>
+        </p:nvSpPr>
+        <p:spPr>
+          <a:xfrm>
+            <a:off x="6492240" y="1600200"/>
+            <a:ext cx="4480560" cy="320040"/>
+          </a:xfrm>
+          <a:prstGeom prst="rect">
+            <a:avLst/>
+          </a:prstGeom>
+          <a:noFill/>
+        </p:spPr>
+        <p:txBody>
+          <a:bodyPr wrap="square">
             <a:spAutoFit/>
           </a:bodyPr>
           <a:lstStyle/>
           <a:p>
             <a:pPr algn="ctr">
-              <a:defRPr sz="1500" b="1">
-                <a:solidFill>
-                  <a:srgbClr val="DE9136"/>
-                </a:solidFill>
-                <a:latin typeface="Aptos"/>
-              </a:defRPr>
-            </a:pPr>
-            <a:r>
-              <a:t>2.</a:t>
-            </a:r>
-          </a:p>
-        </p:txBody>
-      </p:sp>
-      <p:sp>
-        <p:nvSpPr>
-          <p:cNvPr id="11" name="TextBox 10"/>
-          <p:cNvSpPr txBox="1"/>
-          <p:nvPr/>
-        </p:nvSpPr>
-        <p:spPr>
-          <a:xfrm>
-            <a:off x="4681727" y="2130552"/>
-            <a:ext cx="2907792" cy="2377440"/>
-          </a:xfrm>
-          <a:prstGeom prst="rect">
-            <a:avLst/>
-          </a:prstGeom>
-          <a:noFill/>
-        </p:spPr>
-        <p:txBody>
-          <a:bodyPr wrap="none" anchor="ctr">
-            <a:spAutoFit/>
-          </a:bodyPr>
-          <a:lstStyle/>
-          <a:p>
-            <a:pPr algn="ctr">
-              <a:defRPr sz="1300" b="0">
-                <a:solidFill>
-                  <a:srgbClr val="243441"/>
-                </a:solidFill>
-                <a:latin typeface="Aptos"/>
-              </a:defRPr>
-            </a:pPr>
-            <a:r>
-              <a:t>rajzold fel a görbét</a:t>
-            </a:r>
-          </a:p>
-        </p:txBody>
-      </p:sp>
-      <p:sp>
-        <p:nvSpPr>
-          <p:cNvPr id="12" name="Rounded Rectangle 11"/>
+              <a:defRPr sz="1100" b="1">
+                <a:solidFill>
+                  <a:srgbClr val="0B2F4B"/>
+                </a:solidFill>
+                <a:latin typeface="Aptos Display"/>
+              </a:defRPr>
+            </a:pPr>
+            <a:r>
+              <a:t>Rossz blankolási hossz</a:t>
+            </a:r>
+          </a:p>
+        </p:txBody>
+      </p:sp>
+      <p:sp>
+        <p:nvSpPr>
+          <p:cNvPr id="10" name="Rounded Rectangle 9"/>
           <p:cNvSpPr/>
           <p:nvPr/>
         </p:nvSpPr>
         <p:spPr>
           <a:xfrm>
-            <a:off x="8302752" y="1508760"/>
-            <a:ext cx="3310128" cy="3154680"/>
+            <a:off x="640080" y="2651760"/>
+            <a:ext cx="5029200" cy="914400"/>
           </a:xfrm>
           <a:prstGeom prst="roundRect">
             <a:avLst/>
@@ -8446,7 +9701,7 @@
           </a:solidFill>
           <a:ln>
             <a:solidFill>
-              <a:srgbClr val="DCE7EF"/>
+              <a:srgbClr val="C9D8E2"/>
             </a:solidFill>
           </a:ln>
         </p:spPr>
@@ -8474,72 +9729,279 @@
       </p:sp>
       <p:sp>
         <p:nvSpPr>
+          <p:cNvPr id="11" name="TextBox 10"/>
+          <p:cNvSpPr txBox="1"/>
+          <p:nvPr/>
+        </p:nvSpPr>
+        <p:spPr>
+          <a:xfrm>
+            <a:off x="914400" y="2926079"/>
+            <a:ext cx="4480560" cy="320040"/>
+          </a:xfrm>
+          <a:prstGeom prst="rect">
+            <a:avLst/>
+          </a:prstGeom>
+          <a:noFill/>
+        </p:spPr>
+        <p:txBody>
+          <a:bodyPr wrap="square">
+            <a:spAutoFit/>
+          </a:bodyPr>
+          <a:lstStyle/>
+          <a:p>
+            <a:pPr algn="ctr">
+              <a:defRPr sz="1100" b="1">
+                <a:solidFill>
+                  <a:srgbClr val="0B2F4B"/>
+                </a:solidFill>
+                <a:latin typeface="Aptos Display"/>
+              </a:defRPr>
+            </a:pPr>
+            <a:r>
+              <a:t>Kilógó elemi szál</a:t>
+            </a:r>
+          </a:p>
+        </p:txBody>
+      </p:sp>
+      <p:sp>
+        <p:nvSpPr>
+          <p:cNvPr id="12" name="Rounded Rectangle 11"/>
+          <p:cNvSpPr/>
+          <p:nvPr/>
+        </p:nvSpPr>
+        <p:spPr>
+          <a:xfrm>
+            <a:off x="6217920" y="2651760"/>
+            <a:ext cx="5029200" cy="914400"/>
+          </a:xfrm>
+          <a:prstGeom prst="roundRect">
+            <a:avLst/>
+          </a:prstGeom>
+          <a:solidFill>
+            <a:srgbClr val="FFFFFF"/>
+          </a:solidFill>
+          <a:ln>
+            <a:solidFill>
+              <a:srgbClr val="C9D8E2"/>
+            </a:solidFill>
+          </a:ln>
+        </p:spPr>
+        <p:style>
+          <a:lnRef idx="1">
+            <a:schemeClr val="accent1"/>
+          </a:lnRef>
+          <a:fillRef idx="3">
+            <a:schemeClr val="accent1"/>
+          </a:fillRef>
+          <a:effectRef idx="2">
+            <a:schemeClr val="accent1"/>
+          </a:effectRef>
+          <a:fontRef idx="minor">
+            <a:schemeClr val="lt1"/>
+          </a:fontRef>
+        </p:style>
+        <p:txBody>
+          <a:bodyPr rtlCol="0" anchor="ctr"/>
+          <a:lstStyle/>
+          <a:p>
+            <a:pPr algn="ctr"/>
+          </a:p>
+        </p:txBody>
+      </p:sp>
+      <p:sp>
+        <p:nvSpPr>
           <p:cNvPr id="13" name="TextBox 12"/>
           <p:cNvSpPr txBox="1"/>
           <p:nvPr/>
         </p:nvSpPr>
         <p:spPr>
           <a:xfrm>
-            <a:off x="8467344" y="1645919"/>
-            <a:ext cx="2980944" cy="365760"/>
-          </a:xfrm>
-          <a:prstGeom prst="rect">
-            <a:avLst/>
-          </a:prstGeom>
-          <a:noFill/>
-        </p:spPr>
-        <p:txBody>
-          <a:bodyPr wrap="none" anchor="ctr">
+            <a:off x="6492240" y="2926079"/>
+            <a:ext cx="4480560" cy="320040"/>
+          </a:xfrm>
+          <a:prstGeom prst="rect">
+            <a:avLst/>
+          </a:prstGeom>
+          <a:noFill/>
+        </p:spPr>
+        <p:txBody>
+          <a:bodyPr wrap="square">
             <a:spAutoFit/>
           </a:bodyPr>
           <a:lstStyle/>
           <a:p>
             <a:pPr algn="ctr">
-              <a:defRPr sz="1500" b="1">
-                <a:solidFill>
-                  <a:srgbClr val="3F8F68"/>
-                </a:solidFill>
-                <a:latin typeface="Aptos"/>
-              </a:defRPr>
-            </a:pPr>
-            <a:r>
-              <a:t>3.</a:t>
-            </a:r>
-          </a:p>
-        </p:txBody>
-      </p:sp>
-      <p:sp>
-        <p:nvSpPr>
-          <p:cNvPr id="14" name="TextBox 13"/>
-          <p:cNvSpPr txBox="1"/>
-          <p:nvPr/>
-        </p:nvSpPr>
-        <p:spPr>
-          <a:xfrm>
-            <a:off x="8503920" y="2130552"/>
-            <a:ext cx="2907792" cy="2377440"/>
-          </a:xfrm>
-          <a:prstGeom prst="rect">
-            <a:avLst/>
-          </a:prstGeom>
-          <a:noFill/>
-        </p:spPr>
-        <p:txBody>
-          <a:bodyPr wrap="none" anchor="ctr">
+              <a:defRPr sz="1100" b="1">
+                <a:solidFill>
+                  <a:srgbClr val="0B2F4B"/>
+                </a:solidFill>
+                <a:latin typeface="Aptos Display"/>
+              </a:defRPr>
+            </a:pPr>
+            <a:r>
+              <a:t>Rossz hüvelyméret</a:t>
+            </a:r>
+          </a:p>
+        </p:txBody>
+      </p:sp>
+      <p:sp>
+        <p:nvSpPr>
+          <p:cNvPr id="14" name="Rounded Rectangle 13"/>
+          <p:cNvSpPr/>
+          <p:nvPr/>
+        </p:nvSpPr>
+        <p:spPr>
+          <a:xfrm>
+            <a:off x="640080" y="3977639"/>
+            <a:ext cx="5029200" cy="914400"/>
+          </a:xfrm>
+          <a:prstGeom prst="roundRect">
+            <a:avLst/>
+          </a:prstGeom>
+          <a:solidFill>
+            <a:srgbClr val="FFFFFF"/>
+          </a:solidFill>
+          <a:ln>
+            <a:solidFill>
+              <a:srgbClr val="C9D8E2"/>
+            </a:solidFill>
+          </a:ln>
+        </p:spPr>
+        <p:style>
+          <a:lnRef idx="1">
+            <a:schemeClr val="accent1"/>
+          </a:lnRef>
+          <a:fillRef idx="3">
+            <a:schemeClr val="accent1"/>
+          </a:fillRef>
+          <a:effectRef idx="2">
+            <a:schemeClr val="accent1"/>
+          </a:effectRef>
+          <a:fontRef idx="minor">
+            <a:schemeClr val="lt1"/>
+          </a:fontRef>
+        </p:style>
+        <p:txBody>
+          <a:bodyPr rtlCol="0" anchor="ctr"/>
+          <a:lstStyle/>
+          <a:p>
+            <a:pPr algn="ctr"/>
+          </a:p>
+        </p:txBody>
+      </p:sp>
+      <p:sp>
+        <p:nvSpPr>
+          <p:cNvPr id="15" name="TextBox 14"/>
+          <p:cNvSpPr txBox="1"/>
+          <p:nvPr/>
+        </p:nvSpPr>
+        <p:spPr>
+          <a:xfrm>
+            <a:off x="914400" y="4251959"/>
+            <a:ext cx="4480560" cy="320040"/>
+          </a:xfrm>
+          <a:prstGeom prst="rect">
+            <a:avLst/>
+          </a:prstGeom>
+          <a:noFill/>
+        </p:spPr>
+        <p:txBody>
+          <a:bodyPr wrap="square">
             <a:spAutoFit/>
           </a:bodyPr>
           <a:lstStyle/>
           <a:p>
             <a:pPr algn="ctr">
-              <a:defRPr sz="1300" b="0">
-                <a:solidFill>
-                  <a:srgbClr val="243441"/>
-                </a:solidFill>
-                <a:latin typeface="Aptos"/>
-              </a:defRPr>
-            </a:pPr>
-            <a:r>
-              <a:t>jelöld fL, fH és -3 dB-t</a:t>
+              <a:defRPr sz="1100" b="1">
+                <a:solidFill>
+                  <a:srgbClr val="0B2F4B"/>
+                </a:solidFill>
+                <a:latin typeface="Aptos Display"/>
+              </a:defRPr>
+            </a:pPr>
+            <a:r>
+              <a:t>Sérült sorkapocs</a:t>
+            </a:r>
+          </a:p>
+        </p:txBody>
+      </p:sp>
+      <p:sp>
+        <p:nvSpPr>
+          <p:cNvPr id="16" name="Rounded Rectangle 15"/>
+          <p:cNvSpPr/>
+          <p:nvPr/>
+        </p:nvSpPr>
+        <p:spPr>
+          <a:xfrm>
+            <a:off x="6217920" y="3977639"/>
+            <a:ext cx="5029200" cy="914400"/>
+          </a:xfrm>
+          <a:prstGeom prst="roundRect">
+            <a:avLst/>
+          </a:prstGeom>
+          <a:solidFill>
+            <a:srgbClr val="FFFFFF"/>
+          </a:solidFill>
+          <a:ln>
+            <a:solidFill>
+              <a:srgbClr val="C9D8E2"/>
+            </a:solidFill>
+          </a:ln>
+        </p:spPr>
+        <p:style>
+          <a:lnRef idx="1">
+            <a:schemeClr val="accent1"/>
+          </a:lnRef>
+          <a:fillRef idx="3">
+            <a:schemeClr val="accent1"/>
+          </a:fillRef>
+          <a:effectRef idx="2">
+            <a:schemeClr val="accent1"/>
+          </a:effectRef>
+          <a:fontRef idx="minor">
+            <a:schemeClr val="lt1"/>
+          </a:fontRef>
+        </p:style>
+        <p:txBody>
+          <a:bodyPr rtlCol="0" anchor="ctr"/>
+          <a:lstStyle/>
+          <a:p>
+            <a:pPr algn="ctr"/>
+          </a:p>
+        </p:txBody>
+      </p:sp>
+      <p:sp>
+        <p:nvSpPr>
+          <p:cNvPr id="17" name="TextBox 16"/>
+          <p:cNvSpPr txBox="1"/>
+          <p:nvPr/>
+        </p:nvSpPr>
+        <p:spPr>
+          <a:xfrm>
+            <a:off x="6492240" y="4251959"/>
+            <a:ext cx="4480560" cy="320040"/>
+          </a:xfrm>
+          <a:prstGeom prst="rect">
+            <a:avLst/>
+          </a:prstGeom>
+          <a:noFill/>
+        </p:spPr>
+        <p:txBody>
+          <a:bodyPr wrap="square">
+            <a:spAutoFit/>
+          </a:bodyPr>
+          <a:lstStyle/>
+          <a:p>
+            <a:pPr algn="ctr">
+              <a:defRPr sz="1100" b="1">
+                <a:solidFill>
+                  <a:srgbClr val="0B2F4B"/>
+                </a:solidFill>
+                <a:latin typeface="Aptos Display"/>
+              </a:defRPr>
+            </a:pPr>
+            <a:r>
+              <a:t>Ellenőrzés hiánya</a:t>
             </a:r>
           </a:p>
         </p:txBody>
